--- a/docs/presentation/Risk_Signal_Engine.pptx
+++ b/docs/presentation/Risk_Signal_Engine.pptx
@@ -858,7 +858,7 @@
           <a:lstStyle/>
           <a:p>
             <a:r>
-              <a:t>State the caveat plainly: the evaluation labels were drafted by an AI assistant and are pending human review, and the same assistant wrote the rules, so those numbers are a smoke test. Replaying 911 real captured documents, our false-trigger fixes cut simulated stress runs from 84 to 50 and removed every run triggered by social posts alone.</a:t>
+              <a:t>State the caveat plainly: the evaluation labels were drafted by an AI assistant and are pending human review, and the same assistant wrote the rules, so those numbers are a smoke test. Replaying 911 real captured documents, our false-trigger fixes cut simulated stress runs from 84 to 50 and removed every run triggered by social posts alone. The watchlist is the credit analyst's view: every held issuer gets a rules-based status from its recent signals; it is an attention flag, not a rating.</a:t>
             </a:r>
           </a:p>
         </p:txBody>
@@ -6174,7 +6174,7 @@
                 </a:solidFill>
                 <a:latin typeface="Calibri"/>
               </a:rPr>
-              <a:t>12 sections and explanations</a:t>
+              <a:t>12 sections and a watchlist</a:t>
             </a:r>
           </a:p>
         </p:txBody>
@@ -8603,7 +8603,7 @@
         <p:spPr>
           <a:xfrm>
             <a:off x="548640" y="3337560"/>
-            <a:ext cx="5789864" cy="1801291"/>
+            <a:ext cx="6388701" cy="1987596"/>
           </a:xfrm>
           <a:prstGeom prst="rect">
             <a:avLst/>
@@ -8617,7 +8617,7 @@
       </p:pic>
       <p:pic>
         <p:nvPicPr>
-          <p:cNvPr id="26" name="Picture 25" descr="signals_charts.png"/>
+          <p:cNvPr id="26" name="Picture 25" descr="watchlist.png"/>
           <p:cNvPicPr>
             <a:picLocks noChangeAspect="1"/>
           </p:cNvPicPr>
@@ -8631,8 +8631,8 @@
         </p:blipFill>
         <p:spPr>
           <a:xfrm>
-            <a:off x="6567104" y="3337560"/>
-            <a:ext cx="5075946" cy="1801291"/>
+            <a:off x="7165941" y="3337560"/>
+            <a:ext cx="4477110" cy="1987596"/>
           </a:xfrm>
           <a:prstGeom prst="rect">
             <a:avLst/>
@@ -8652,8 +8652,8 @@
         </p:nvSpPr>
         <p:spPr>
           <a:xfrm>
-            <a:off x="548640" y="5276011"/>
-            <a:ext cx="11064240" cy="457200"/>
+            <a:off x="548640" y="5370876"/>
+            <a:ext cx="6388701" cy="274320"/>
           </a:xfrm>
           <a:prstGeom prst="rect">
             <a:avLst/>
@@ -8668,36 +8668,27 @@
           <a:p>
             <a:pPr algn="l"/>
             <a:r>
-              <a:rPr sz="1800" b="1" i="0">
-                <a:solidFill>
-                  <a:srgbClr val="1F2A44"/>
-                </a:solidFill>
-                <a:latin typeface="Calibri"/>
-              </a:rPr>
-              <a:t>Business impact: </a:t>
-            </a:r>
-            <a:r>
-              <a:rPr sz="1800" b="0" i="0">
-                <a:solidFill>
-                  <a:srgbClr val="1A1A1A"/>
-                </a:solidFill>
-                <a:latin typeface="Calibri"/>
-              </a:rPr>
-              <a:t>earlier warning, triage by materiality, an audited portfolio view in seconds. Decision support, not investment advice.</a:t>
-            </a:r>
-          </a:p>
-        </p:txBody>
-      </p:sp>
-      <p:sp>
-        <p:nvSpPr>
-          <p:cNvPr id="28" name="Footer"/>
+              <a:rPr sz="1200" b="0" i="1">
+                <a:solidFill>
+                  <a:srgbClr val="555B66"/>
+                </a:solidFill>
+                <a:latin typeface="Calibri"/>
+              </a:rPr>
+              <a:t>Executive overview after the SYNTHETIC demo story</a:t>
+            </a:r>
+          </a:p>
+        </p:txBody>
+      </p:sp>
+      <p:sp>
+        <p:nvSpPr>
+          <p:cNvPr id="28" name="TextBox 27"/>
           <p:cNvSpPr txBox="1"/>
           <p:nvPr/>
         </p:nvSpPr>
         <p:spPr>
           <a:xfrm>
-            <a:off x="548640" y="6446520"/>
-            <a:ext cx="8686800" cy="274320"/>
+            <a:off x="7165941" y="5370876"/>
+            <a:ext cx="4477110" cy="274320"/>
           </a:xfrm>
           <a:prstGeom prst="rect">
             <a:avLst/>
@@ -8712,6 +8703,85 @@
           <a:p>
             <a:pPr algn="l"/>
             <a:r>
+              <a:rPr sz="1200" b="0" i="1">
+                <a:solidFill>
+                  <a:srgbClr val="555B66"/>
+                </a:solidFill>
+                <a:latin typeface="Calibri"/>
+              </a:rPr>
+              <a:t>Watchlist: Tata Motors WATCH-NEGATIVE after the downgrade</a:t>
+            </a:r>
+          </a:p>
+        </p:txBody>
+      </p:sp>
+      <p:sp>
+        <p:nvSpPr>
+          <p:cNvPr id="29" name="TextBox 28"/>
+          <p:cNvSpPr txBox="1"/>
+          <p:nvPr/>
+        </p:nvSpPr>
+        <p:spPr>
+          <a:xfrm>
+            <a:off x="548640" y="5736636"/>
+            <a:ext cx="11064240" cy="731520"/>
+          </a:xfrm>
+          <a:prstGeom prst="rect">
+            <a:avLst/>
+          </a:prstGeom>
+          <a:noFill/>
+        </p:spPr>
+        <p:txBody>
+          <a:bodyPr wrap="square" anchor="t" lIns="0" rIns="0" tIns="0" bIns="0">
+            <a:spAutoFit/>
+          </a:bodyPr>
+          <a:lstStyle/>
+          <a:p>
+            <a:pPr algn="l"/>
+            <a:r>
+              <a:rPr sz="1800" b="1" i="0">
+                <a:solidFill>
+                  <a:srgbClr val="1F2A44"/>
+                </a:solidFill>
+                <a:latin typeface="Calibri"/>
+              </a:rPr>
+              <a:t>Business impact: </a:t>
+            </a:r>
+            <a:r>
+              <a:rPr sz="1800" b="0" i="0">
+                <a:solidFill>
+                  <a:srgbClr val="1A1A1A"/>
+                </a:solidFill>
+                <a:latin typeface="Calibri"/>
+              </a:rPr>
+              <a:t>earlier warning on held names, triage by materiality, an audited portfolio view.</a:t>
+            </a:r>
+          </a:p>
+        </p:txBody>
+      </p:sp>
+      <p:sp>
+        <p:nvSpPr>
+          <p:cNvPr id="30" name="Footer"/>
+          <p:cNvSpPr txBox="1"/>
+          <p:nvPr/>
+        </p:nvSpPr>
+        <p:spPr>
+          <a:xfrm>
+            <a:off x="548640" y="6446520"/>
+            <a:ext cx="8686800" cy="274320"/>
+          </a:xfrm>
+          <a:prstGeom prst="rect">
+            <a:avLst/>
+          </a:prstGeom>
+          <a:noFill/>
+        </p:spPr>
+        <p:txBody>
+          <a:bodyPr wrap="square" anchor="t" lIns="0" rIns="0" tIns="0" bIns="0">
+            <a:spAutoFit/>
+          </a:bodyPr>
+          <a:lstStyle/>
+          <a:p>
+            <a:pPr algn="l"/>
+            <a:r>
               <a:rPr sz="1100" b="0" i="0">
                 <a:solidFill>
                   <a:srgbClr val="555B66"/>
@@ -8725,7 +8795,7 @@
       </p:sp>
       <p:sp>
         <p:nvSpPr>
-          <p:cNvPr id="29" name="SlideNo"/>
+          <p:cNvPr id="31" name="SlideNo"/>
           <p:cNvSpPr txBox="1"/>
           <p:nvPr/>
         </p:nvSpPr>

--- a/docs/presentation/Risk_Signal_Engine.pptx
+++ b/docs/presentation/Risk_Signal_Engine.pptx
@@ -788,7 +788,7 @@
           <a:lstStyle/>
           <a:p>
             <a:r>
-              <a:t>Read the disclaimer aloud. In the demo the Tata Motors downgrade triggers an issuer-only stress; our CDS hedge offsets much of it. The invasion headline triggers a moderate systemic stress; a second independent source escalates it to severe, above our 2% risk appetite.</a:t>
+              <a:t>Read the disclaimer aloud. In the demo the Tata Motors downgrade triggers an issuer-only stress; our CDS hedge offsets much of it. The invasion headline triggers a moderate systemic stress; a second independent source escalates it to severe, above our 2% risk appetite. The propagation graph shows what else in the book is linked to the issuer: the links are curated by hand and documented.</a:t>
             </a:r>
           </a:p>
         </p:txBody>
@@ -858,7 +858,7 @@
           <a:lstStyle/>
           <a:p>
             <a:r>
-              <a:t>State the caveat plainly: the evaluation labels were drafted by an AI assistant and are pending human review, and the same assistant wrote the rules, so those numbers are a smoke test. Replaying 911 real captured documents, our false-trigger fixes cut simulated stress runs from 84 to 50 and removed every run triggered by social posts alone. The watchlist is the credit analyst's view: every held issuer gets a rules-based status from its recent signals; it is an attention flag, not a rating.</a:t>
+              <a:t>State the caveat plainly: the evaluation labels were drafted by an AI assistant and are pending human review, and the same assistant wrote the rules, so those numbers are a smoke test. Replaying 911 real captured documents, our false-trigger fixes cut simulated stress runs from 84 to 50 and removed every run triggered by social posts alone. The watchlist is the credit analyst's view on real captured news; the credit brief is filled from templates, not generated by a language model.</a:t>
             </a:r>
           </a:p>
         </p:txBody>
@@ -6174,7 +6174,7 @@
                 </a:solidFill>
                 <a:latin typeface="Calibri"/>
               </a:rPr>
-              <a:t>12 sections and a watchlist</a:t>
+              <a:t>watchlist, propagation, what-if, brief</a:t>
             </a:r>
           </a:p>
         </p:txBody>
@@ -6963,7 +6963,7 @@
         <p:spPr>
           <a:xfrm>
             <a:off x="5623560" y="1371600"/>
-            <a:ext cx="6035040" cy="1931213"/>
+            <a:ext cx="6035040" cy="1670413"/>
           </a:xfrm>
           <a:prstGeom prst="rect">
             <a:avLst/>
@@ -6983,7 +6983,7 @@
         </p:nvSpPr>
         <p:spPr>
           <a:xfrm>
-            <a:off x="5623560" y="3366821"/>
+            <a:off x="5623560" y="3106021"/>
             <a:ext cx="6035040" cy="274320"/>
           </a:xfrm>
           <a:prstGeom prst="rect">
@@ -7176,8 +7176,8 @@
         </p:nvSpPr>
         <p:spPr>
           <a:xfrm>
-            <a:off x="548640" y="1508760"/>
-            <a:ext cx="4297680" cy="3108960"/>
+            <a:off x="548640" y="1463040"/>
+            <a:ext cx="4343400" cy="2651760"/>
           </a:xfrm>
           <a:prstGeom prst="rect">
             <a:avLst/>
@@ -7192,7 +7192,7 @@
           <a:p>
             <a:pPr marL="274320" indent="-274320">
               <a:spcAft>
-                <a:spcPts val="1000"/>
+                <a:spcPts val="800"/>
               </a:spcAft>
               <a:buClr>
                 <a:srgbClr val="0E8A84"/>
@@ -7201,7 +7201,7 @@
               <a:buChar char="•"/>
             </a:pPr>
             <a:r>
-              <a:rPr sz="1800" b="0" i="0">
+              <a:rPr sz="1700" b="0" i="0">
                 <a:solidFill>
                   <a:srgbClr val="1A1A1A"/>
                 </a:solidFill>
@@ -7213,7 +7213,7 @@
           <a:p>
             <a:pPr marL="274320" indent="-274320">
               <a:spcAft>
-                <a:spcPts val="1000"/>
+                <a:spcPts val="800"/>
               </a:spcAft>
               <a:buClr>
                 <a:srgbClr val="0E8A84"/>
@@ -7222,7 +7222,7 @@
               <a:buChar char="•"/>
             </a:pPr>
             <a:r>
-              <a:rPr sz="1800" b="0" i="0">
+              <a:rPr sz="1700" b="0" i="0">
                 <a:solidFill>
                   <a:srgbClr val="1A1A1A"/>
                 </a:solidFill>
@@ -7234,7 +7234,7 @@
           <a:p>
             <a:pPr marL="274320" indent="-274320">
               <a:spcAft>
-                <a:spcPts val="1000"/>
+                <a:spcPts val="800"/>
               </a:spcAft>
               <a:buClr>
                 <a:srgbClr val="0E8A84"/>
@@ -7243,7 +7243,7 @@
               <a:buChar char="•"/>
             </a:pPr>
             <a:r>
-              <a:rPr sz="1800" b="0" i="0">
+              <a:rPr sz="1700" b="0" i="0">
                 <a:solidFill>
                   <a:srgbClr val="1A1A1A"/>
                 </a:solidFill>
@@ -7255,7 +7255,7 @@
           <a:p>
             <a:pPr marL="274320" indent="-274320">
               <a:spcAft>
-                <a:spcPts val="1000"/>
+                <a:spcPts val="800"/>
               </a:spcAft>
               <a:buClr>
                 <a:srgbClr val="0E8A84"/>
@@ -7264,13 +7264,13 @@
               <a:buChar char="•"/>
             </a:pPr>
             <a:r>
-              <a:rPr sz="1800" b="0" i="0">
+              <a:rPr sz="1700" b="0" i="0">
                 <a:solidFill>
                   <a:srgbClr val="1A1A1A"/>
                 </a:solidFill>
                 <a:latin typeface="Calibri"/>
               </a:rPr>
-              <a:t>Cooldown and an audit trail for every run</a:t>
+              <a:t>What-if sliders reprice the book instantly</a:t>
             </a:r>
           </a:p>
         </p:txBody>
@@ -7283,8 +7283,8 @@
         </p:nvSpPr>
         <p:spPr>
           <a:xfrm>
-            <a:off x="548640" y="4617720"/>
-            <a:ext cx="256032" cy="256032"/>
+            <a:off x="548640" y="4251960"/>
+            <a:ext cx="237744" cy="237744"/>
           </a:xfrm>
           <a:prstGeom prst="ellipse">
             <a:avLst/>
@@ -7327,8 +7327,8 @@
         </p:nvSpPr>
         <p:spPr>
           <a:xfrm>
-            <a:off x="960120" y="4526280"/>
-            <a:ext cx="3931920" cy="457200"/>
+            <a:off x="932688" y="4160520"/>
+            <a:ext cx="3931920" cy="420624"/>
           </a:xfrm>
           <a:prstGeom prst="rect">
             <a:avLst/>
@@ -7343,7 +7343,7 @@
           <a:p>
             <a:pPr algn="l"/>
             <a:r>
-              <a:rPr sz="1900" b="1" i="0">
+              <a:rPr sz="1800" b="1" i="0">
                 <a:solidFill>
                   <a:srgbClr val="0CA30C"/>
                 </a:solidFill>
@@ -7352,7 +7352,7 @@
               <a:t>0.41% GREEN  </a:t>
             </a:r>
             <a:r>
-              <a:rPr sz="1800" b="0" i="0">
+              <a:rPr sz="1700" b="0" i="0">
                 <a:solidFill>
                   <a:srgbClr val="1A1A1A"/>
                 </a:solidFill>
@@ -7371,8 +7371,8 @@
         </p:nvSpPr>
         <p:spPr>
           <a:xfrm>
-            <a:off x="548640" y="5166360"/>
-            <a:ext cx="256032" cy="256032"/>
+            <a:off x="548640" y="4709160"/>
+            <a:ext cx="237744" cy="237744"/>
           </a:xfrm>
           <a:prstGeom prst="ellipse">
             <a:avLst/>
@@ -7415,8 +7415,8 @@
         </p:nvSpPr>
         <p:spPr>
           <a:xfrm>
-            <a:off x="960120" y="5074920"/>
-            <a:ext cx="3931920" cy="457200"/>
+            <a:off x="932688" y="4617720"/>
+            <a:ext cx="3931920" cy="420624"/>
           </a:xfrm>
           <a:prstGeom prst="rect">
             <a:avLst/>
@@ -7431,7 +7431,7 @@
           <a:p>
             <a:pPr algn="l"/>
             <a:r>
-              <a:rPr sz="1900" b="1" i="0">
+              <a:rPr sz="1800" b="1" i="0">
                 <a:solidFill>
                   <a:srgbClr val="C98A00"/>
                 </a:solidFill>
@@ -7440,7 +7440,7 @@
               <a:t>1.32% AMBER  </a:t>
             </a:r>
             <a:r>
-              <a:rPr sz="1800" b="0" i="0">
+              <a:rPr sz="1700" b="0" i="0">
                 <a:solidFill>
                   <a:srgbClr val="1A1A1A"/>
                 </a:solidFill>
@@ -7459,8 +7459,8 @@
         </p:nvSpPr>
         <p:spPr>
           <a:xfrm>
-            <a:off x="548640" y="5715000"/>
-            <a:ext cx="256032" cy="256032"/>
+            <a:off x="548640" y="5166360"/>
+            <a:ext cx="237744" cy="237744"/>
           </a:xfrm>
           <a:prstGeom prst="ellipse">
             <a:avLst/>
@@ -7503,8 +7503,8 @@
         </p:nvSpPr>
         <p:spPr>
           <a:xfrm>
-            <a:off x="960120" y="5623560"/>
-            <a:ext cx="3931920" cy="457200"/>
+            <a:off x="932688" y="5074920"/>
+            <a:ext cx="3931920" cy="420624"/>
           </a:xfrm>
           <a:prstGeom prst="rect">
             <a:avLst/>
@@ -7519,7 +7519,7 @@
           <a:p>
             <a:pPr algn="l"/>
             <a:r>
-              <a:rPr sz="1900" b="1" i="0">
+              <a:rPr sz="1800" b="1" i="0">
                 <a:solidFill>
                   <a:srgbClr val="D03B3B"/>
                 </a:solidFill>
@@ -7528,20 +7528,55 @@
               <a:t>2.45% RED  </a:t>
             </a:r>
             <a:r>
-              <a:rPr sz="1800" b="0" i="0">
+              <a:rPr sz="1700" b="0" i="0">
                 <a:solidFill>
                   <a:srgbClr val="1A1A1A"/>
                 </a:solidFill>
                 <a:latin typeface="Calibri"/>
               </a:rPr>
               <a:t>Corroborated (2 sources)</a:t>
+            </a:r>
+          </a:p>
+        </p:txBody>
+      </p:sp>
+      <p:sp>
+        <p:nvSpPr>
+          <p:cNvPr id="11" name="TextBox 10"/>
+          <p:cNvSpPr txBox="1"/>
+          <p:nvPr/>
+        </p:nvSpPr>
+        <p:spPr>
+          <a:xfrm>
+            <a:off x="548640" y="5577840"/>
+            <a:ext cx="4343400" cy="640080"/>
+          </a:xfrm>
+          <a:prstGeom prst="rect">
+            <a:avLst/>
+          </a:prstGeom>
+          <a:noFill/>
+        </p:spPr>
+        <p:txBody>
+          <a:bodyPr wrap="square" anchor="t" lIns="0" rIns="0" tIns="0" bIns="0">
+            <a:spAutoFit/>
+          </a:bodyPr>
+          <a:lstStyle/>
+          <a:p>
+            <a:pPr algn="l"/>
+            <a:r>
+              <a:rPr sz="1300" b="1" i="0">
+                <a:solidFill>
+                  <a:srgbClr val="D03B3B"/>
+                </a:solidFill>
+                <a:latin typeface="Calibri"/>
+              </a:rPr>
+              <a:t>Simplified, illustrative hackathon stress model. Not a production or regulatory risk model.</a:t>
             </a:r>
           </a:p>
         </p:txBody>
       </p:sp>
       <p:pic>
         <p:nvPicPr>
-          <p:cNvPr id="11" name="Picture 10" descr="stress_waterfall.png"/>
+          <p:cNvPr id="12" name="Picture 11" descr="stress_waterfall.png"/>
           <p:cNvPicPr>
             <a:picLocks noChangeAspect="1"/>
           </p:cNvPicPr>
@@ -7555,8 +7590,8 @@
         </p:blipFill>
         <p:spPr>
           <a:xfrm>
-            <a:off x="5166360" y="1508760"/>
-            <a:ext cx="6492240" cy="2478855"/>
+            <a:off x="5120640" y="1417320"/>
+            <a:ext cx="6537960" cy="2451735"/>
           </a:xfrm>
           <a:prstGeom prst="rect">
             <a:avLst/>
@@ -7570,14 +7605,14 @@
       </p:pic>
       <p:sp>
         <p:nvSpPr>
-          <p:cNvPr id="12" name="TextBox 11"/>
+          <p:cNvPr id="13" name="TextBox 12"/>
           <p:cNvSpPr txBox="1"/>
           <p:nvPr/>
         </p:nvSpPr>
         <p:spPr>
           <a:xfrm>
-            <a:off x="5166360" y="4079055"/>
-            <a:ext cx="6492240" cy="274320"/>
+            <a:off x="5120640" y="3896487"/>
+            <a:ext cx="6537960" cy="274320"/>
           </a:xfrm>
           <a:prstGeom prst="rect">
             <a:avLst/>
@@ -7603,16 +7638,45 @@
           </a:p>
         </p:txBody>
       </p:sp>
-      <p:sp>
-        <p:nvSpPr>
-          <p:cNvPr id="13" name="TextBox 12"/>
+      <p:pic>
+        <p:nvPicPr>
+          <p:cNvPr id="14" name="Picture 13" descr="propagation_graph.png"/>
+          <p:cNvPicPr>
+            <a:picLocks noChangeAspect="1"/>
+          </p:cNvPicPr>
+          <p:nvPr/>
+        </p:nvPicPr>
+        <p:blipFill>
+          <a:blip r:embed="rId3"/>
+          <a:stretch>
+            <a:fillRect/>
+          </a:stretch>
+        </p:blipFill>
+        <p:spPr>
+          <a:xfrm>
+            <a:off x="5120640" y="4253103"/>
+            <a:ext cx="2769617" cy="2010537"/>
+          </a:xfrm>
+          <a:prstGeom prst="rect">
+            <a:avLst/>
+          </a:prstGeom>
+          <a:ln w="12700">
+            <a:solidFill>
+              <a:srgbClr val="C9D3DB"/>
+            </a:solidFill>
+          </a:ln>
+        </p:spPr>
+      </p:pic>
+      <p:sp>
+        <p:nvSpPr>
+          <p:cNvPr id="15" name="TextBox 14"/>
           <p:cNvSpPr txBox="1"/>
           <p:nvPr/>
         </p:nvSpPr>
         <p:spPr>
           <a:xfrm>
-            <a:off x="5166360" y="4444815"/>
-            <a:ext cx="6492240" cy="640080"/>
+            <a:off x="8118857" y="4253103"/>
+            <a:ext cx="3539743" cy="2010537"/>
           </a:xfrm>
           <a:prstGeom prst="rect">
             <a:avLst/>
@@ -7627,20 +7691,44 @@
           <a:p>
             <a:pPr algn="l"/>
             <a:r>
-              <a:rPr sz="1400" b="1" i="0">
-                <a:solidFill>
-                  <a:srgbClr val="D03B3B"/>
-                </a:solidFill>
-                <a:latin typeface="Calibri"/>
-              </a:rPr>
-              <a:t>Simplified, illustrative hackathon stress model. Not a production or regulatory risk model.</a:t>
-            </a:r>
-          </a:p>
-        </p:txBody>
-      </p:sp>
-      <p:sp>
-        <p:nvSpPr>
-          <p:cNvPr id="14" name="Footer"/>
+              <a:rPr sz="1800" b="1" i="0">
+                <a:solidFill>
+                  <a:srgbClr val="1F2A44"/>
+                </a:solidFill>
+                <a:latin typeface="Calibri"/>
+              </a:rPr>
+              <a:t>Risk propagation</a:t>
+            </a:r>
+          </a:p>
+          <a:p>
+            <a:pPr algn="l"/>
+            <a:r>
+              <a:rPr sz="1500" b="0" i="0">
+                <a:solidFill>
+                  <a:srgbClr val="1A1A1A"/>
+                </a:solidFill>
+                <a:latin typeface="Calibri"/>
+              </a:rPr>
+              <a:t>Direct vs second-order exposure over 16 hand-curated links (supplier, parent, peer). Tata Motors: $41m held, $23m more via Ford and Tesla.</a:t>
+            </a:r>
+          </a:p>
+          <a:p>
+            <a:pPr algn="l"/>
+            <a:r>
+              <a:rPr sz="1300" b="0" i="0">
+                <a:solidFill>
+                  <a:srgbClr val="555B66"/>
+                </a:solidFill>
+                <a:latin typeface="Calibri"/>
+              </a:rPr>
+              <a:t>Curated, not inferred; an attention measure, not a contagion model.</a:t>
+            </a:r>
+          </a:p>
+        </p:txBody>
+      </p:sp>
+      <p:sp>
+        <p:nvSpPr>
+          <p:cNvPr id="16" name="Footer"/>
           <p:cNvSpPr txBox="1"/>
           <p:nvPr/>
         </p:nvSpPr>
@@ -7675,7 +7763,7 @@
       </p:sp>
       <p:sp>
         <p:nvSpPr>
-          <p:cNvPr id="15" name="SlideNo"/>
+          <p:cNvPr id="17" name="SlideNo"/>
           <p:cNvSpPr txBox="1"/>
           <p:nvPr/>
         </p:nvSpPr>
@@ -7805,7 +7893,7 @@
         <p:spPr>
           <a:xfrm>
             <a:off x="548640" y="1417320"/>
-            <a:ext cx="2103120" cy="1417320"/>
+            <a:ext cx="2103120" cy="1325880"/>
           </a:xfrm>
           <a:prstGeom prst="roundRect">
             <a:avLst>
@@ -7850,7 +7938,7 @@
         </p:nvSpPr>
         <p:spPr>
           <a:xfrm>
-            <a:off x="713232" y="1508760"/>
+            <a:off x="713232" y="1490472"/>
             <a:ext cx="1828800" cy="548640"/>
           </a:xfrm>
           <a:prstGeom prst="rect">
@@ -7866,7 +7954,7 @@
           <a:p>
             <a:pPr algn="l"/>
             <a:r>
-              <a:rPr sz="3000" b="1" i="0">
+              <a:rPr sz="2800" b="1" i="0">
                 <a:solidFill>
                   <a:srgbClr val="1F2A44"/>
                 </a:solidFill>
@@ -7885,7 +7973,7 @@
         </p:nvSpPr>
         <p:spPr>
           <a:xfrm>
-            <a:off x="713232" y="2075688"/>
+            <a:off x="713232" y="2020824"/>
             <a:ext cx="1828800" cy="365760"/>
           </a:xfrm>
           <a:prstGeom prst="rect">
@@ -7920,7 +8008,7 @@
         </p:nvSpPr>
         <p:spPr>
           <a:xfrm>
-            <a:off x="713232" y="2404872"/>
+            <a:off x="713232" y="2331720"/>
             <a:ext cx="1828800" cy="320040"/>
           </a:xfrm>
           <a:prstGeom prst="rect">
@@ -7956,7 +8044,7 @@
         <p:spPr>
           <a:xfrm>
             <a:off x="2770632" y="1417320"/>
-            <a:ext cx="2103120" cy="1417320"/>
+            <a:ext cx="2103120" cy="1325880"/>
           </a:xfrm>
           <a:prstGeom prst="roundRect">
             <a:avLst>
@@ -8001,7 +8089,7 @@
         </p:nvSpPr>
         <p:spPr>
           <a:xfrm>
-            <a:off x="2935224" y="1508760"/>
+            <a:off x="2935224" y="1490472"/>
             <a:ext cx="1828800" cy="548640"/>
           </a:xfrm>
           <a:prstGeom prst="rect">
@@ -8017,7 +8105,7 @@
           <a:p>
             <a:pPr algn="l"/>
             <a:r>
-              <a:rPr sz="3000" b="1" i="0">
+              <a:rPr sz="2800" b="1" i="0">
                 <a:solidFill>
                   <a:srgbClr val="1F2A44"/>
                 </a:solidFill>
@@ -8036,7 +8124,7 @@
         </p:nvSpPr>
         <p:spPr>
           <a:xfrm>
-            <a:off x="2935224" y="2075688"/>
+            <a:off x="2935224" y="2020824"/>
             <a:ext cx="1828800" cy="365760"/>
           </a:xfrm>
           <a:prstGeom prst="rect">
@@ -8071,7 +8159,7 @@
         </p:nvSpPr>
         <p:spPr>
           <a:xfrm>
-            <a:off x="2935224" y="2404872"/>
+            <a:off x="2935224" y="2331720"/>
             <a:ext cx="1828800" cy="320040"/>
           </a:xfrm>
           <a:prstGeom prst="rect">
@@ -8107,7 +8195,7 @@
         <p:spPr>
           <a:xfrm>
             <a:off x="4992624" y="1417320"/>
-            <a:ext cx="2103120" cy="1417320"/>
+            <a:ext cx="2103120" cy="1325880"/>
           </a:xfrm>
           <a:prstGeom prst="roundRect">
             <a:avLst>
@@ -8152,7 +8240,7 @@
         </p:nvSpPr>
         <p:spPr>
           <a:xfrm>
-            <a:off x="5157216" y="1508760"/>
+            <a:off x="5157216" y="1490472"/>
             <a:ext cx="1828800" cy="548640"/>
           </a:xfrm>
           <a:prstGeom prst="rect">
@@ -8168,7 +8256,7 @@
           <a:p>
             <a:pPr algn="l"/>
             <a:r>
-              <a:rPr sz="3000" b="1" i="0">
+              <a:rPr sz="2800" b="1" i="0">
                 <a:solidFill>
                   <a:srgbClr val="1F2A44"/>
                 </a:solidFill>
@@ -8187,7 +8275,7 @@
         </p:nvSpPr>
         <p:spPr>
           <a:xfrm>
-            <a:off x="5157216" y="2075688"/>
+            <a:off x="5157216" y="2020824"/>
             <a:ext cx="1828800" cy="365760"/>
           </a:xfrm>
           <a:prstGeom prst="rect">
@@ -8222,7 +8310,7 @@
         </p:nvSpPr>
         <p:spPr>
           <a:xfrm>
-            <a:off x="5157216" y="2404872"/>
+            <a:off x="5157216" y="2331720"/>
             <a:ext cx="1828800" cy="320040"/>
           </a:xfrm>
           <a:prstGeom prst="rect">
@@ -8258,7 +8346,7 @@
         <p:spPr>
           <a:xfrm>
             <a:off x="7214616" y="1417320"/>
-            <a:ext cx="2103120" cy="1417320"/>
+            <a:ext cx="2103120" cy="1325880"/>
           </a:xfrm>
           <a:prstGeom prst="roundRect">
             <a:avLst>
@@ -8303,7 +8391,7 @@
         </p:nvSpPr>
         <p:spPr>
           <a:xfrm>
-            <a:off x="7379208" y="1508760"/>
+            <a:off x="7379208" y="1490472"/>
             <a:ext cx="1828800" cy="548640"/>
           </a:xfrm>
           <a:prstGeom prst="rect">
@@ -8319,7 +8407,7 @@
           <a:p>
             <a:pPr algn="l"/>
             <a:r>
-              <a:rPr sz="3000" b="1" i="0">
+              <a:rPr sz="2800" b="1" i="0">
                 <a:solidFill>
                   <a:srgbClr val="1F2A44"/>
                 </a:solidFill>
@@ -8338,7 +8426,7 @@
         </p:nvSpPr>
         <p:spPr>
           <a:xfrm>
-            <a:off x="7379208" y="2075688"/>
+            <a:off x="7379208" y="2020824"/>
             <a:ext cx="1828800" cy="365760"/>
           </a:xfrm>
           <a:prstGeom prst="rect">
@@ -8373,7 +8461,7 @@
         </p:nvSpPr>
         <p:spPr>
           <a:xfrm>
-            <a:off x="7379208" y="2404872"/>
+            <a:off x="7379208" y="2331720"/>
             <a:ext cx="1828800" cy="320040"/>
           </a:xfrm>
           <a:prstGeom prst="rect">
@@ -8409,7 +8497,7 @@
         <p:spPr>
           <a:xfrm>
             <a:off x="9436608" y="1417320"/>
-            <a:ext cx="2103120" cy="1417320"/>
+            <a:ext cx="2103120" cy="1325880"/>
           </a:xfrm>
           <a:prstGeom prst="roundRect">
             <a:avLst>
@@ -8454,7 +8542,7 @@
         </p:nvSpPr>
         <p:spPr>
           <a:xfrm>
-            <a:off x="9601200" y="1508760"/>
+            <a:off x="9601200" y="1490472"/>
             <a:ext cx="1828800" cy="548640"/>
           </a:xfrm>
           <a:prstGeom prst="rect">
@@ -8470,7 +8558,7 @@
           <a:p>
             <a:pPr algn="l"/>
             <a:r>
-              <a:rPr sz="3000" b="1" i="0">
+              <a:rPr sz="2800" b="1" i="0">
                 <a:solidFill>
                   <a:srgbClr val="1F2A44"/>
                 </a:solidFill>
@@ -8489,7 +8577,7 @@
         </p:nvSpPr>
         <p:spPr>
           <a:xfrm>
-            <a:off x="9601200" y="2075688"/>
+            <a:off x="9601200" y="2020824"/>
             <a:ext cx="1828800" cy="365760"/>
           </a:xfrm>
           <a:prstGeom prst="rect">
@@ -8524,7 +8612,7 @@
         </p:nvSpPr>
         <p:spPr>
           <a:xfrm>
-            <a:off x="9601200" y="2404872"/>
+            <a:off x="9601200" y="2331720"/>
             <a:ext cx="1828800" cy="320040"/>
           </a:xfrm>
           <a:prstGeom prst="rect">
@@ -8559,7 +8647,7 @@
         </p:nvSpPr>
         <p:spPr>
           <a:xfrm>
-            <a:off x="548640" y="2898648"/>
+            <a:off x="548640" y="2788920"/>
             <a:ext cx="10972800" cy="274320"/>
           </a:xfrm>
           <a:prstGeom prst="rect">
@@ -8588,7 +8676,7 @@
       </p:sp>
       <p:pic>
         <p:nvPicPr>
-          <p:cNvPr id="25" name="Picture 24" descr="home_kpis.png"/>
+          <p:cNvPr id="25" name="Picture 24" descr="watchlist.png"/>
           <p:cNvPicPr>
             <a:picLocks noChangeAspect="1"/>
           </p:cNvPicPr>
@@ -8602,8 +8690,8 @@
         </p:blipFill>
         <p:spPr>
           <a:xfrm>
-            <a:off x="548640" y="3337560"/>
-            <a:ext cx="6388701" cy="1987596"/>
+            <a:off x="548640" y="3200400"/>
+            <a:ext cx="4523232" cy="2423160"/>
           </a:xfrm>
           <a:prstGeom prst="rect">
             <a:avLst/>
@@ -8617,7 +8705,7 @@
       </p:pic>
       <p:pic>
         <p:nvPicPr>
-          <p:cNvPr id="26" name="Picture 25" descr="watchlist.png"/>
+          <p:cNvPr id="26" name="Picture 25" descr="credit_brief.png"/>
           <p:cNvPicPr>
             <a:picLocks noChangeAspect="1"/>
           </p:cNvPicPr>
@@ -8631,8 +8719,8 @@
         </p:blipFill>
         <p:spPr>
           <a:xfrm>
-            <a:off x="7165941" y="3337560"/>
-            <a:ext cx="4477110" cy="1987596"/>
+            <a:off x="5254752" y="3200400"/>
+            <a:ext cx="4621312" cy="2423160"/>
           </a:xfrm>
           <a:prstGeom prst="rect">
             <a:avLst/>
@@ -8652,8 +8740,8 @@
         </p:nvSpPr>
         <p:spPr>
           <a:xfrm>
-            <a:off x="548640" y="5370876"/>
-            <a:ext cx="6388701" cy="274320"/>
+            <a:off x="548640" y="5660136"/>
+            <a:ext cx="4523232" cy="274320"/>
           </a:xfrm>
           <a:prstGeom prst="rect">
             <a:avLst/>
@@ -8674,7 +8762,7 @@
                 </a:solidFill>
                 <a:latin typeface="Calibri"/>
               </a:rPr>
-              <a:t>Executive overview after the SYNTHETIC demo story</a:t>
+              <a:t>Early-warning watchlist (real data + SYNTHETIC story)</a:t>
             </a:r>
           </a:p>
         </p:txBody>
@@ -8687,8 +8775,8 @@
         </p:nvSpPr>
         <p:spPr>
           <a:xfrm>
-            <a:off x="7165941" y="5370876"/>
-            <a:ext cx="4477110" cy="274320"/>
+            <a:off x="5254752" y="5660136"/>
+            <a:ext cx="4621312" cy="274320"/>
           </a:xfrm>
           <a:prstGeom prst="rect">
             <a:avLst/>
@@ -8709,7 +8797,7 @@
                 </a:solidFill>
                 <a:latin typeface="Calibri"/>
               </a:rPr>
-              <a:t>Watchlist: Tata Motors WATCH-NEGATIVE after the downgrade</a:t>
+              <a:t>One-click credit brief (template, no LLM; PDF)</a:t>
             </a:r>
           </a:p>
         </p:txBody>
@@ -8722,8 +8810,8 @@
         </p:nvSpPr>
         <p:spPr>
           <a:xfrm>
-            <a:off x="548640" y="5736636"/>
-            <a:ext cx="11064240" cy="731520"/>
+            <a:off x="10104664" y="3200400"/>
+            <a:ext cx="1538391" cy="365760"/>
           </a:xfrm>
           <a:prstGeom prst="rect">
             <a:avLst/>
@@ -8744,23 +8832,100 @@
                 </a:solidFill>
                 <a:latin typeface="Calibri"/>
               </a:rPr>
-              <a:t>Business impact: </a:t>
-            </a:r>
-            <a:r>
-              <a:rPr sz="1800" b="0" i="0">
+              <a:t>Business impact</a:t>
+            </a:r>
+          </a:p>
+        </p:txBody>
+      </p:sp>
+      <p:sp>
+        <p:nvSpPr>
+          <p:cNvPr id="30" name="TextBox 29"/>
+          <p:cNvSpPr txBox="1"/>
+          <p:nvPr/>
+        </p:nvSpPr>
+        <p:spPr>
+          <a:xfrm>
+            <a:off x="10104664" y="3611880"/>
+            <a:ext cx="1538391" cy="2011680"/>
+          </a:xfrm>
+          <a:prstGeom prst="rect">
+            <a:avLst/>
+          </a:prstGeom>
+          <a:noFill/>
+        </p:spPr>
+        <p:txBody>
+          <a:bodyPr wrap="square" lIns="0" rIns="0" tIns="0" bIns="0">
+            <a:spAutoFit/>
+          </a:bodyPr>
+          <a:lstStyle/>
+          <a:p>
+            <a:pPr marL="274320" indent="-274320">
+              <a:spcAft>
+                <a:spcPts val="800"/>
+              </a:spcAft>
+              <a:buClr>
+                <a:srgbClr val="0E8A84"/>
+              </a:buClr>
+              <a:buFont typeface="Arial"/>
+              <a:buChar char="•"/>
+            </a:pPr>
+            <a:r>
+              <a:rPr sz="1400" b="0" i="0">
                 <a:solidFill>
                   <a:srgbClr val="1A1A1A"/>
                 </a:solidFill>
                 <a:latin typeface="Calibri"/>
               </a:rPr>
-              <a:t>earlier warning on held names, triage by materiality, an audited portfolio view.</a:t>
-            </a:r>
-          </a:p>
-        </p:txBody>
-      </p:sp>
-      <p:sp>
-        <p:nvSpPr>
-          <p:cNvPr id="30" name="Footer"/>
+              <a:t>Earlier warning on held names</a:t>
+            </a:r>
+          </a:p>
+          <a:p>
+            <a:pPr marL="274320" indent="-274320">
+              <a:spcAft>
+                <a:spcPts val="800"/>
+              </a:spcAft>
+              <a:buClr>
+                <a:srgbClr val="0E8A84"/>
+              </a:buClr>
+              <a:buFont typeface="Arial"/>
+              <a:buChar char="•"/>
+            </a:pPr>
+            <a:r>
+              <a:rPr sz="1400" b="0" i="0">
+                <a:solidFill>
+                  <a:srgbClr val="1A1A1A"/>
+                </a:solidFill>
+                <a:latin typeface="Calibri"/>
+              </a:rPr>
+              <a:t>Triage by materiality, rule shown</a:t>
+            </a:r>
+          </a:p>
+          <a:p>
+            <a:pPr marL="274320" indent="-274320">
+              <a:spcAft>
+                <a:spcPts val="800"/>
+              </a:spcAft>
+              <a:buClr>
+                <a:srgbClr val="0E8A84"/>
+              </a:buClr>
+              <a:buFont typeface="Arial"/>
+              <a:buChar char="•"/>
+            </a:pPr>
+            <a:r>
+              <a:rPr sz="1400" b="0" i="0">
+                <a:solidFill>
+                  <a:srgbClr val="1A1A1A"/>
+                </a:solidFill>
+                <a:latin typeface="Calibri"/>
+              </a:rPr>
+              <a:t>Audited portfolio view in seconds</a:t>
+            </a:r>
+          </a:p>
+        </p:txBody>
+      </p:sp>
+      <p:sp>
+        <p:nvSpPr>
+          <p:cNvPr id="31" name="Footer"/>
           <p:cNvSpPr txBox="1"/>
           <p:nvPr/>
         </p:nvSpPr>
@@ -8795,7 +8960,7 @@
       </p:sp>
       <p:sp>
         <p:nvSpPr>
-          <p:cNvPr id="31" name="SlideNo"/>
+          <p:cNvPr id="32" name="SlideNo"/>
           <p:cNvSpPr txBox="1"/>
           <p:nvPr/>
         </p:nvSpPr>

--- a/docs/presentation/Risk_Signal_Engine.pptx
+++ b/docs/presentation/Risk_Signal_Engine.pptx
@@ -508,7 +508,7 @@
           <a:lstStyle/>
           <a:p>
             <a:r>
-              <a:t>Every number you will see is either measured by a script in the repository or clearly labelled as simulated or synthetic. The problem: risk-relevant events surface in text first, and nothing connects them to the portfolio until someone reads and calculates. Our answer: an NLP risk engine plus an event-driven stress test.</a:t>
+              <a:t>Every number in this deck is produced by a script in the repository or labelled as simulated or synthetic. One sentence: we turn news and social text into explainable risk signals and stress the portfolio when something material happens.</a:t>
             </a:r>
           </a:p>
         </p:txBody>
@@ -578,7 +578,7 @@
           <a:lstStyle/>
           <a:p>
             <a:r>
-              <a:t>Frame this as decision support, not trading signals. Users: risk managers, credit analysts, portfolio managers. We make no ROI or time-saved claim; the only speed number is the measured per-document latency of the pipeline.</a:t>
+              <a:t>Frame it as decision support for risk managers, credit analysts and portfolio managers. We make no ROI or time-saved claim; the only speed number is the measured per-document latency.</a:t>
             </a:r>
           </a:p>
         </p:txBody>
@@ -648,7 +648,7 @@
           <a:lstStyle/>
           <a:p>
             <a:r>
-              <a:t>Sources are only claimed after our probe script passed on this machine. Adapters never crash the app: timeouts, bounded retries and backoff, with health shown in the dashboard. The stress engine is just a subscriber on the event bus. The whole demo runs offline after a one-time model download.</a:t>
+              <a:t>Sources are only claimed after our probe script passed. Adapters never crash the app. The stress engine is a subscriber on the event bus. Everything runs offline after a one-time model download.</a:t>
             </a:r>
           </a:p>
         </p:txBody>
@@ -718,7 +718,7 @@
           <a:lstStyle/>
           <a:p>
             <a:r>
-              <a:t>Walk through the formula with the example on the right: event severity and strong negative sentiment dominate, the signal is market-wide, and two independent sources corroborate it. The weights are expert priors, published at /methodology; calibration against market reactions is future work.</a:t>
+              <a:t>Walk through the formula with the example: event severity and strong negative sentiment dominate, the signal is market-wide, and two sources corroborate it. Weights are published at /methodology.</a:t>
             </a:r>
           </a:p>
         </p:txBody>
@@ -788,7 +788,7 @@
           <a:lstStyle/>
           <a:p>
             <a:r>
-              <a:t>Read the disclaimer aloud. In the demo the Tata Motors downgrade triggers an issuer-only stress; our CDS hedge offsets much of it. The invasion headline triggers a moderate systemic stress; a second independent source escalates it to severe, above our 2% risk appetite. The propagation graph shows what else in the book is linked to the issuer: the links are curated by hand and documented.</a:t>
+              <a:t>State the caveat plainly: the evaluation labels were drafted by an AI assistant and are pending human review, and the same assistant wrote the rules, so those numbers are a smoke test. Replaying 911 real captured documents, our false-trigger fixes cut simulated stress runs from 84 to 50. Read the disclaimer aloud.</a:t>
             </a:r>
           </a:p>
         </p:txBody>
@@ -858,7 +858,7 @@
           <a:lstStyle/>
           <a:p>
             <a:r>
-              <a:t>State the caveat plainly: the evaluation labels were drafted by an AI assistant and are pending human review, and the same assistant wrote the rules, so those numbers are a smoke test. Replaying 911 real captured documents, our false-trigger fixes cut simulated stress runs from 84 to 50 and removed every run triggered by social posts alone. The watchlist is the credit analyst's view on real captured news; the credit brief is filled from templates, not generated by a language model.</a:t>
+              <a:t>Business value without invented numbers: earlier attention on held names, triage by materiality with the reason shown, and an immediate, audited portfolio view. Linked exposure is an attention measure, not a contagion model.</a:t>
             </a:r>
           </a:p>
         </p:txBody>
@@ -928,7 +928,7 @@
           <a:lstStyle/>
           <a:p>
             <a:r>
-              <a:t>Close on the takeaway and invite the judges to type their own headline into the dashboard. If asked about weaknesses, the limitations column is the honest list; docs/judge_qa.md has the answers.</a:t>
+              <a:t>Close on the takeaway. If asked about weaknesses, the limitations column is the honest list; docs/judge_qa.md has the answers.</a:t>
             </a:r>
           </a:p>
         </p:txBody>
@@ -3936,84 +3936,14 @@
       <p:grpSpPr/>
       <p:sp>
         <p:nvSpPr>
-          <p:cNvPr id="2" name="TextBox 1"/>
-          <p:cNvSpPr txBox="1"/>
-          <p:nvPr/>
-        </p:nvSpPr>
-        <p:spPr>
-          <a:xfrm>
-            <a:off x="548640" y="914400"/>
-            <a:ext cx="10972800" cy="914400"/>
-          </a:xfrm>
-          <a:prstGeom prst="rect">
-            <a:avLst/>
-          </a:prstGeom>
-          <a:noFill/>
-        </p:spPr>
-        <p:txBody>
-          <a:bodyPr wrap="square" anchor="t" lIns="0" rIns="0" tIns="0" bIns="0">
-            <a:spAutoFit/>
-          </a:bodyPr>
-          <a:lstStyle/>
-          <a:p>
-            <a:pPr algn="l"/>
-            <a:r>
-              <a:rPr sz="4800" b="1" i="0">
-                <a:solidFill>
-                  <a:srgbClr val="1F2A44"/>
-                </a:solidFill>
-                <a:latin typeface="Calibri"/>
-              </a:rPr>
-              <a:t>Risk Signal Engine</a:t>
-            </a:r>
-          </a:p>
-        </p:txBody>
-      </p:sp>
-      <p:sp>
-        <p:nvSpPr>
-          <p:cNvPr id="3" name="TextBox 2"/>
-          <p:cNvSpPr txBox="1"/>
-          <p:nvPr/>
-        </p:nvSpPr>
-        <p:spPr>
-          <a:xfrm>
-            <a:off x="548640" y="1783080"/>
-            <a:ext cx="10972800" cy="548640"/>
-          </a:xfrm>
-          <a:prstGeom prst="rect">
-            <a:avLst/>
-          </a:prstGeom>
-          <a:noFill/>
-        </p:spPr>
-        <p:txBody>
-          <a:bodyPr wrap="square" anchor="t" lIns="0" rIns="0" tIns="0" bIns="0">
-            <a:spAutoFit/>
-          </a:bodyPr>
-          <a:lstStyle/>
-          <a:p>
-            <a:pPr algn="l"/>
-            <a:r>
-              <a:rPr sz="2400" b="0" i="0">
-                <a:solidFill>
-                  <a:srgbClr val="0E8A84"/>
-                </a:solidFill>
-                <a:latin typeface="Calibri"/>
-              </a:rPr>
-              <a:t>From breaking news and social posts to a portfolio stress test, automatically</a:t>
-            </a:r>
-          </a:p>
-        </p:txBody>
-      </p:sp>
-      <p:sp>
-        <p:nvSpPr>
-          <p:cNvPr id="4" name="Rounded Rectangle 3"/>
+          <p:cNvPr id="2" name="Rounded Rectangle 1"/>
           <p:cNvSpPr/>
           <p:nvPr/>
         </p:nvSpPr>
         <p:spPr>
           <a:xfrm>
-            <a:off x="548640" y="2788920"/>
-            <a:ext cx="5394960" cy="2377440"/>
+            <a:off x="0" y="0"/>
+            <a:ext cx="12191695" cy="3840480"/>
           </a:xfrm>
           <a:prstGeom prst="roundRect">
             <a:avLst>
@@ -4021,7 +3951,7 @@
             </a:avLst>
           </a:prstGeom>
           <a:solidFill>
-            <a:srgbClr val="EEF4F6"/>
+            <a:srgbClr val="1F2A44"/>
           </a:solidFill>
           <a:ln>
             <a:noFill/>
@@ -4052,14 +3982,14 @@
       </p:sp>
       <p:sp>
         <p:nvSpPr>
-          <p:cNvPr id="5" name="TextBox 4"/>
+          <p:cNvPr id="3" name="TextBox 2"/>
           <p:cNvSpPr txBox="1"/>
           <p:nvPr/>
         </p:nvSpPr>
         <p:spPr>
           <a:xfrm>
-            <a:off x="868680" y="3017520"/>
-            <a:ext cx="4754880" cy="457200"/>
+            <a:off x="548640" y="1143000"/>
+            <a:ext cx="10972800" cy="914400"/>
           </a:xfrm>
           <a:prstGeom prst="rect">
             <a:avLst/>
@@ -4074,27 +4004,27 @@
           <a:p>
             <a:pPr algn="l"/>
             <a:r>
-              <a:rPr sz="2400" b="1" i="0">
-                <a:solidFill>
-                  <a:srgbClr val="1F2A44"/>
-                </a:solidFill>
-                <a:latin typeface="Calibri"/>
-              </a:rPr>
-              <a:t>The problem</a:t>
-            </a:r>
-          </a:p>
-        </p:txBody>
-      </p:sp>
-      <p:sp>
-        <p:nvSpPr>
-          <p:cNvPr id="6" name="TextBox 5"/>
+              <a:rPr sz="5400" b="1" i="0">
+                <a:solidFill>
+                  <a:srgbClr val="FFFFFF"/>
+                </a:solidFill>
+                <a:latin typeface="Calibri"/>
+              </a:rPr>
+              <a:t>Risk Signal Engine</a:t>
+            </a:r>
+          </a:p>
+        </p:txBody>
+      </p:sp>
+      <p:sp>
+        <p:nvSpPr>
+          <p:cNvPr id="4" name="TextBox 3"/>
           <p:cNvSpPr txBox="1"/>
           <p:nvPr/>
         </p:nvSpPr>
         <p:spPr>
           <a:xfrm>
-            <a:off x="868680" y="3566160"/>
-            <a:ext cx="4754880" cy="1554480"/>
+            <a:off x="548640" y="2148840"/>
+            <a:ext cx="10972800" cy="640080"/>
           </a:xfrm>
           <a:prstGeom prst="rect">
             <a:avLst/>
@@ -4109,73 +4039,27 @@
           <a:p>
             <a:pPr algn="l"/>
             <a:r>
-              <a:rPr sz="2000" b="0" i="0">
-                <a:solidFill>
-                  <a:srgbClr val="1A1A1A"/>
-                </a:solidFill>
-                <a:latin typeface="Calibri"/>
-              </a:rPr>
-              <a:t>Downgrades, sanctions, probes and rate moves hit unstructured text first. Risk teams read them by hand, and the portfolio impact is worked out later.</a:t>
-            </a:r>
-          </a:p>
-        </p:txBody>
-      </p:sp>
-      <p:sp>
-        <p:nvSpPr>
-          <p:cNvPr id="7" name="Rounded Rectangle 6"/>
-          <p:cNvSpPr/>
-          <p:nvPr/>
-        </p:nvSpPr>
-        <p:spPr>
-          <a:xfrm>
-            <a:off x="6172200" y="2788920"/>
-            <a:ext cx="5394960" cy="2377440"/>
-          </a:xfrm>
-          <a:prstGeom prst="roundRect">
-            <a:avLst>
-              <a:gd name="adj" fmla="val 6000"/>
-            </a:avLst>
-          </a:prstGeom>
-          <a:solidFill>
-            <a:srgbClr val="EEF4F6"/>
-          </a:solidFill>
-          <a:ln>
-            <a:noFill/>
-          </a:ln>
-          <a:effectLst/>
-        </p:spPr>
-        <p:style>
-          <a:lnRef idx="1">
-            <a:schemeClr val="accent1"/>
-          </a:lnRef>
-          <a:fillRef idx="3">
-            <a:schemeClr val="accent1"/>
-          </a:fillRef>
-          <a:effectRef idx="2">
-            <a:schemeClr val="accent1"/>
-          </a:effectRef>
-          <a:fontRef idx="minor">
-            <a:schemeClr val="lt1"/>
-          </a:fontRef>
-        </p:style>
-        <p:txBody>
-          <a:bodyPr rtlCol="0" anchor="ctr"/>
-          <a:lstStyle/>
-          <a:p>
-            <a:pPr algn="ctr"/>
-          </a:p>
-        </p:txBody>
-      </p:sp>
-      <p:sp>
-        <p:nvSpPr>
-          <p:cNvPr id="8" name="TextBox 7"/>
+              <a:rPr sz="2400" b="0" i="0">
+                <a:solidFill>
+                  <a:srgbClr val="FFFFFF"/>
+                </a:solidFill>
+                <a:latin typeface="Calibri"/>
+              </a:rPr>
+              <a:t>From breaking news and social posts to explainable risk signals and a portfolio stress test</a:t>
+            </a:r>
+          </a:p>
+        </p:txBody>
+      </p:sp>
+      <p:sp>
+        <p:nvSpPr>
+          <p:cNvPr id="5" name="TextBox 4"/>
           <p:cNvSpPr txBox="1"/>
           <p:nvPr/>
         </p:nvSpPr>
         <p:spPr>
           <a:xfrm>
-            <a:off x="6492240" y="3017520"/>
-            <a:ext cx="4754880" cy="457200"/>
+            <a:off x="548640" y="2880360"/>
+            <a:ext cx="10972800" cy="457200"/>
           </a:xfrm>
           <a:prstGeom prst="rect">
             <a:avLst/>
@@ -4190,27 +4074,27 @@
           <a:p>
             <a:pPr algn="l"/>
             <a:r>
-              <a:rPr sz="2400" b="1" i="0">
-                <a:solidFill>
-                  <a:srgbClr val="1F2A44"/>
-                </a:solidFill>
-                <a:latin typeface="Calibri"/>
-              </a:rPr>
-              <a:t>Our solution</a:t>
-            </a:r>
-          </a:p>
-        </p:txBody>
-      </p:sp>
-      <p:sp>
-        <p:nvSpPr>
-          <p:cNvPr id="9" name="TextBox 8"/>
+              <a:rPr sz="1700" b="0" i="0">
+                <a:solidFill>
+                  <a:srgbClr val="FFFFFF"/>
+                </a:solidFill>
+                <a:latin typeface="Calibri"/>
+              </a:rPr>
+              <a:t>S&amp;P Global × CRISIL · Code to Connect Hackathon 2026 · Module B: Strategic Portfolio Stress Testing</a:t>
+            </a:r>
+          </a:p>
+        </p:txBody>
+      </p:sp>
+      <p:sp>
+        <p:nvSpPr>
+          <p:cNvPr id="6" name="TextBox 5"/>
           <p:cNvSpPr txBox="1"/>
           <p:nvPr/>
         </p:nvSpPr>
         <p:spPr>
           <a:xfrm>
-            <a:off x="6492240" y="3566160"/>
-            <a:ext cx="4754880" cy="1554480"/>
+            <a:off x="548640" y="4343400"/>
+            <a:ext cx="3474720" cy="731520"/>
           </a:xfrm>
           <a:prstGeom prst="rect">
             <a:avLst/>
@@ -4225,27 +4109,27 @@
           <a:p>
             <a:pPr algn="l"/>
             <a:r>
-              <a:rPr sz="2000" b="0" i="0">
-                <a:solidFill>
-                  <a:srgbClr val="1A1A1A"/>
-                </a:solidFill>
-                <a:latin typeface="Calibri"/>
-              </a:rPr>
-              <a:t>An NLP engine scores every item for sentiment, event type and a transparent 1–10 impact, then triggers a stress test of a loans, bonds and derivatives book.</a:t>
-            </a:r>
-          </a:p>
-        </p:txBody>
-      </p:sp>
-      <p:sp>
-        <p:nvSpPr>
-          <p:cNvPr id="10" name="TextBox 9"/>
+              <a:rPr sz="3600" b="1" i="0">
+                <a:solidFill>
+                  <a:srgbClr val="0E8A84"/>
+                </a:solidFill>
+                <a:latin typeface="Calibri"/>
+              </a:rPr>
+              <a:t>1,325</a:t>
+            </a:r>
+          </a:p>
+        </p:txBody>
+      </p:sp>
+      <p:sp>
+        <p:nvSpPr>
+          <p:cNvPr id="7" name="TextBox 6"/>
           <p:cNvSpPr txBox="1"/>
           <p:nvPr/>
         </p:nvSpPr>
         <p:spPr>
           <a:xfrm>
-            <a:off x="548640" y="5532120"/>
-            <a:ext cx="10972800" cy="365760"/>
+            <a:off x="548640" y="5029200"/>
+            <a:ext cx="3474720" cy="548640"/>
           </a:xfrm>
           <a:prstGeom prst="rect">
             <a:avLst/>
@@ -4260,27 +4144,27 @@
           <a:p>
             <a:pPr algn="l"/>
             <a:r>
-              <a:rPr sz="1600" b="0" i="0">
-                <a:solidFill>
-                  <a:srgbClr val="555B66"/>
-                </a:solidFill>
-                <a:latin typeface="Calibri"/>
-              </a:rPr>
-              <a:t>S&amp;P Global × CRISIL · Code to Connect Hackathon 2026 · Module B: Strategic Portfolio Stress Testing</a:t>
-            </a:r>
-          </a:p>
-        </p:txBody>
-      </p:sp>
-      <p:sp>
-        <p:nvSpPr>
-          <p:cNvPr id="11" name="Footer"/>
+              <a:rPr sz="1800" b="0" i="0">
+                <a:solidFill>
+                  <a:srgbClr val="1A1A1A"/>
+                </a:solidFill>
+                <a:latin typeface="Calibri"/>
+              </a:rPr>
+              <a:t>real captured headlines and posts</a:t>
+            </a:r>
+          </a:p>
+        </p:txBody>
+      </p:sp>
+      <p:sp>
+        <p:nvSpPr>
+          <p:cNvPr id="8" name="TextBox 7"/>
           <p:cNvSpPr txBox="1"/>
           <p:nvPr/>
         </p:nvSpPr>
         <p:spPr>
           <a:xfrm>
-            <a:off x="548640" y="6446520"/>
-            <a:ext cx="8686800" cy="274320"/>
+            <a:off x="4297679" y="4343400"/>
+            <a:ext cx="3474720" cy="731520"/>
           </a:xfrm>
           <a:prstGeom prst="rect">
             <a:avLst/>
@@ -4295,27 +4179,27 @@
           <a:p>
             <a:pPr algn="l"/>
             <a:r>
-              <a:rPr sz="1100" b="0" i="0">
-                <a:solidFill>
-                  <a:srgbClr val="555B66"/>
-                </a:solidFill>
-                <a:latin typeface="Calibri"/>
-              </a:rPr>
-              <a:t>Risk Signal Engine · Code to Connect 2026 · decision-support prototype, not investment advice</a:t>
-            </a:r>
-          </a:p>
-        </p:txBody>
-      </p:sp>
-      <p:sp>
-        <p:nvSpPr>
-          <p:cNvPr id="12" name="SlideNo"/>
+              <a:rPr sz="3600" b="1" i="0">
+                <a:solidFill>
+                  <a:srgbClr val="0E8A84"/>
+                </a:solidFill>
+                <a:latin typeface="Calibri"/>
+              </a:rPr>
+              <a:t>1–10</a:t>
+            </a:r>
+          </a:p>
+        </p:txBody>
+      </p:sp>
+      <p:sp>
+        <p:nvSpPr>
+          <p:cNvPr id="9" name="TextBox 8"/>
           <p:cNvSpPr txBox="1"/>
           <p:nvPr/>
         </p:nvSpPr>
         <p:spPr>
           <a:xfrm>
-            <a:off x="10911535" y="6446520"/>
-            <a:ext cx="731520" cy="274320"/>
+            <a:off x="4297679" y="5029200"/>
+            <a:ext cx="3474720" cy="548640"/>
           </a:xfrm>
           <a:prstGeom prst="rect">
             <a:avLst/>
@@ -4328,15 +4212,120 @@
           </a:bodyPr>
           <a:lstStyle/>
           <a:p>
-            <a:pPr algn="r"/>
-            <a:r>
-              <a:rPr sz="1100" b="0" i="0">
+            <a:pPr algn="l"/>
+            <a:r>
+              <a:rPr sz="1800" b="0" i="0">
+                <a:solidFill>
+                  <a:srgbClr val="1A1A1A"/>
+                </a:solidFill>
+                <a:latin typeface="Calibri"/>
+              </a:rPr>
+              <a:t>explainable impact score</a:t>
+            </a:r>
+          </a:p>
+        </p:txBody>
+      </p:sp>
+      <p:sp>
+        <p:nvSpPr>
+          <p:cNvPr id="10" name="TextBox 9"/>
+          <p:cNvSpPr txBox="1"/>
+          <p:nvPr/>
+        </p:nvSpPr>
+        <p:spPr>
+          <a:xfrm>
+            <a:off x="8046718" y="4343400"/>
+            <a:ext cx="3474720" cy="731520"/>
+          </a:xfrm>
+          <a:prstGeom prst="rect">
+            <a:avLst/>
+          </a:prstGeom>
+          <a:noFill/>
+        </p:spPr>
+        <p:txBody>
+          <a:bodyPr wrap="square" anchor="t" lIns="0" rIns="0" tIns="0" bIns="0">
+            <a:spAutoFit/>
+          </a:bodyPr>
+          <a:lstStyle/>
+          <a:p>
+            <a:pPr algn="l"/>
+            <a:r>
+              <a:rPr sz="3600" b="1" i="0">
+                <a:solidFill>
+                  <a:srgbClr val="0E8A84"/>
+                </a:solidFill>
+                <a:latin typeface="Calibri"/>
+              </a:rPr>
+              <a:t>seconds</a:t>
+            </a:r>
+          </a:p>
+        </p:txBody>
+      </p:sp>
+      <p:sp>
+        <p:nvSpPr>
+          <p:cNvPr id="11" name="TextBox 10"/>
+          <p:cNvSpPr txBox="1"/>
+          <p:nvPr/>
+        </p:nvSpPr>
+        <p:spPr>
+          <a:xfrm>
+            <a:off x="8046718" y="5029200"/>
+            <a:ext cx="3474720" cy="548640"/>
+          </a:xfrm>
+          <a:prstGeom prst="rect">
+            <a:avLst/>
+          </a:prstGeom>
+          <a:noFill/>
+        </p:spPr>
+        <p:txBody>
+          <a:bodyPr wrap="square" anchor="t" lIns="0" rIns="0" tIns="0" bIns="0">
+            <a:spAutoFit/>
+          </a:bodyPr>
+          <a:lstStyle/>
+          <a:p>
+            <a:pPr algn="l"/>
+            <a:r>
+              <a:rPr sz="1800" b="0" i="0">
+                <a:solidFill>
+                  <a:srgbClr val="1A1A1A"/>
+                </a:solidFill>
+                <a:latin typeface="Calibri"/>
+              </a:rPr>
+              <a:t>from headline to portfolio view</a:t>
+            </a:r>
+          </a:p>
+        </p:txBody>
+      </p:sp>
+      <p:sp>
+        <p:nvSpPr>
+          <p:cNvPr id="12" name="TextBox 11"/>
+          <p:cNvSpPr txBox="1"/>
+          <p:nvPr/>
+        </p:nvSpPr>
+        <p:spPr>
+          <a:xfrm>
+            <a:off x="548640" y="5806440"/>
+            <a:ext cx="10972800" cy="365760"/>
+          </a:xfrm>
+          <a:prstGeom prst="rect">
+            <a:avLst/>
+          </a:prstGeom>
+          <a:noFill/>
+        </p:spPr>
+        <p:txBody>
+          <a:bodyPr wrap="square" anchor="t" lIns="0" rIns="0" tIns="0" bIns="0">
+            <a:spAutoFit/>
+          </a:bodyPr>
+          <a:lstStyle/>
+          <a:p>
+            <a:pPr algn="l"/>
+            <a:r>
+              <a:rPr sz="1500" b="0" i="0">
                 <a:solidFill>
                   <a:srgbClr val="555B66"/>
                 </a:solidFill>
                 <a:latin typeface="Calibri"/>
               </a:rPr>
-              <a:t>1 / 7</a:t>
+              <a:t>Individual submission · decision-support prototype, not investment advice</a:t>
             </a:r>
           </a:p>
         </p:txBody>
@@ -4389,7 +4378,7 @@
                 </a:solidFill>
                 <a:latin typeface="Calibri"/>
               </a:rPr>
-              <a:t>Why it matters</a:t>
+              <a:t>Problem and approach</a:t>
             </a:r>
           </a:p>
         </p:txBody>
@@ -4438,7 +4427,7 @@
         <p:spPr>
           <a:xfrm>
             <a:off x="548640" y="1508760"/>
-            <a:ext cx="5120640" cy="4206240"/>
+            <a:ext cx="5120640" cy="4389120"/>
           </a:xfrm>
           <a:prstGeom prst="rect">
             <a:avLst/>
@@ -4462,13 +4451,13 @@
               <a:buChar char="•"/>
             </a:pPr>
             <a:r>
-              <a:rPr sz="2000" b="0" i="0">
+              <a:rPr sz="1900" b="0" i="0">
                 <a:solidFill>
                   <a:srgbClr val="1A1A1A"/>
                 </a:solidFill>
                 <a:latin typeface="Calibri"/>
               </a:rPr>
-              <a:t>Credit analysts and risk teams monitor hundreds of issuers</a:t>
+              <a:t>Downgrades, probes, sanctions and rate moves break as headlines and posts</a:t>
             </a:r>
           </a:p>
           <a:p>
@@ -4483,13 +4472,13 @@
               <a:buChar char="•"/>
             </a:pPr>
             <a:r>
-              <a:rPr sz="2000" b="0" i="0">
+              <a:rPr sz="1900" b="0" i="0">
                 <a:solidFill>
                   <a:srgbClr val="1A1A1A"/>
                 </a:solidFill>
                 <a:latin typeface="Calibri"/>
               </a:rPr>
-              <a:t>Downgrades, probes and sanctions break as headlines and posts</a:t>
+              <a:t>Credit analysts and risk teams triage them by hand: slow, noisy, duplicated</a:t>
             </a:r>
           </a:p>
           <a:p>
@@ -4504,13 +4493,13 @@
               <a:buChar char="•"/>
             </a:pPr>
             <a:r>
-              <a:rPr sz="2000" b="0" i="0">
+              <a:rPr sz="1900" b="0" i="0">
                 <a:solidFill>
                   <a:srgbClr val="1A1A1A"/>
                 </a:solidFill>
                 <a:latin typeface="Calibri"/>
               </a:rPr>
-              <a:t>Manual triage is slow, noisy and duplicated</a:t>
+              <a:t>Nothing links a headline to the book's exposure until someone runs numbers</a:t>
             </a:r>
           </a:p>
           <a:p>
@@ -4525,43 +4514,22 @@
               <a:buChar char="•"/>
             </a:pPr>
             <a:r>
-              <a:rPr sz="2000" b="0" i="0">
+              <a:rPr sz="1900" b="1" i="0">
                 <a:solidFill>
                   <a:srgbClr val="1A1A1A"/>
                 </a:solidFill>
                 <a:latin typeface="Calibri"/>
               </a:rPr>
-              <a:t>Nothing links a headline to the book's exposure</a:t>
-            </a:r>
-          </a:p>
-          <a:p>
-            <a:pPr marL="274320" indent="-274320">
-              <a:spcAft>
-                <a:spcPts val="1000"/>
-              </a:spcAft>
-              <a:buClr>
-                <a:srgbClr val="0E8A84"/>
-              </a:buClr>
-              <a:buFont typeface="Arial"/>
-              <a:buChar char="•"/>
-            </a:pPr>
-            <a:r>
-              <a:rPr sz="2000" b="1" i="0">
+              <a:t>Approach: </a:t>
+            </a:r>
+            <a:r>
+              <a:rPr sz="1900" b="0" i="0">
                 <a:solidFill>
                   <a:srgbClr val="1A1A1A"/>
                 </a:solidFill>
                 <a:latin typeface="Calibri"/>
               </a:rPr>
-              <a:t>Need: </a:t>
-            </a:r>
-            <a:r>
-              <a:rPr sz="2000" b="0" i="0">
-                <a:solidFill>
-                  <a:srgbClr val="1A1A1A"/>
-                </a:solidFill>
-                <a:latin typeface="Calibri"/>
-              </a:rPr>
-              <a:t>early warning, materiality ranking, instant portfolio view</a:t>
+              <a:t>an NLP risk engine scores every item (sentiment, event, impact) and an event-driven stress engine reprices the book</a:t>
             </a:r>
           </a:p>
         </p:txBody>
@@ -4645,7 +4613,7 @@
           <a:p>
             <a:pPr algn="ctr"/>
             <a:r>
-              <a:rPr sz="1800" b="1" i="0">
+              <a:rPr sz="1700" b="1" i="0">
                 <a:solidFill>
                   <a:srgbClr val="1F2A44"/>
                 </a:solidFill>
@@ -4736,7 +4704,7 @@
           <a:p>
             <a:pPr algn="ctr"/>
             <a:r>
-              <a:rPr sz="1800" b="1" i="0">
+              <a:rPr sz="1700" b="1" i="0">
                 <a:solidFill>
                   <a:srgbClr val="1F2A44"/>
                 </a:solidFill>
@@ -4827,7 +4795,7 @@
           <a:p>
             <a:pPr algn="ctr"/>
             <a:r>
-              <a:rPr sz="1800" b="1" i="0">
+              <a:rPr sz="1700" b="1" i="0">
                 <a:solidFill>
                   <a:srgbClr val="1F2A44"/>
                 </a:solidFill>
@@ -4917,7 +4885,7 @@
           <a:p>
             <a:pPr algn="ctr"/>
             <a:r>
-              <a:rPr sz="1800" b="1" i="0">
+              <a:rPr sz="1700" b="1" i="0">
                 <a:solidFill>
                   <a:srgbClr val="FFFFFF"/>
                 </a:solidFill>
@@ -5008,7 +4976,7 @@
           <a:p>
             <a:pPr algn="ctr"/>
             <a:r>
-              <a:rPr sz="1800" b="1" i="0">
+              <a:rPr sz="1700" b="1" i="0">
                 <a:solidFill>
                   <a:srgbClr val="FFFFFF"/>
                 </a:solidFill>
@@ -5099,7 +5067,7 @@
           <a:p>
             <a:pPr algn="ctr"/>
             <a:r>
-              <a:rPr sz="1800" b="1" i="0">
+              <a:rPr sz="1700" b="1" i="0">
                 <a:solidFill>
                   <a:srgbClr val="FFFFFF"/>
                 </a:solidFill>
@@ -5118,7 +5086,7 @@
         </p:nvSpPr>
         <p:spPr>
           <a:xfrm>
-            <a:off x="6126480" y="5760720"/>
+            <a:off x="6126480" y="5440680"/>
             <a:ext cx="5486400" cy="274320"/>
           </a:xfrm>
           <a:prstGeom prst="rect">
@@ -5263,7 +5231,7 @@
                 </a:solidFill>
                 <a:latin typeface="Calibri"/>
               </a:rPr>
-              <a:t>Architecture</a:t>
+              <a:t>System design</a:t>
             </a:r>
           </a:p>
         </p:txBody>
@@ -5298,1208 +5266,50 @@
                 </a:solidFill>
                 <a:latin typeface="Calibri"/>
               </a:rPr>
-              <a:t>One NLP pipeline for live, replay, scripted demo and API input</a:t>
-            </a:r>
-          </a:p>
-        </p:txBody>
-      </p:sp>
-      <p:sp>
-        <p:nvSpPr>
-          <p:cNvPr id="4" name="Arch0"/>
-          <p:cNvSpPr/>
-          <p:nvPr/>
-        </p:nvSpPr>
-        <p:spPr>
-          <a:xfrm>
-            <a:off x="548640" y="2057400"/>
-            <a:ext cx="1664208" cy="2331720"/>
-          </a:xfrm>
-          <a:prstGeom prst="roundRect">
-            <a:avLst>
-              <a:gd name="adj" fmla="val 6000"/>
-            </a:avLst>
-          </a:prstGeom>
-          <a:solidFill>
-            <a:srgbClr val="EEF4F6"/>
-          </a:solidFill>
-          <a:ln>
-            <a:noFill/>
-          </a:ln>
-          <a:effectLst/>
-        </p:spPr>
-        <p:style>
-          <a:lnRef idx="1">
-            <a:schemeClr val="accent1"/>
-          </a:lnRef>
-          <a:fillRef idx="3">
-            <a:schemeClr val="accent1"/>
-          </a:fillRef>
-          <a:effectRef idx="2">
-            <a:schemeClr val="accent1"/>
-          </a:effectRef>
-          <a:fontRef idx="minor">
-            <a:schemeClr val="lt1"/>
-          </a:fontRef>
-        </p:style>
-        <p:txBody>
-          <a:bodyPr rtlCol="0" anchor="ctr"/>
-          <a:lstStyle/>
-          <a:p>
-            <a:pPr algn="ctr"/>
-          </a:p>
-        </p:txBody>
-      </p:sp>
-      <p:sp>
-        <p:nvSpPr>
-          <p:cNvPr id="5" name="TextBox 4"/>
-          <p:cNvSpPr txBox="1"/>
-          <p:nvPr/>
-        </p:nvSpPr>
-        <p:spPr>
-          <a:xfrm>
-            <a:off x="685800" y="2240280"/>
-            <a:ext cx="1389888" cy="457200"/>
-          </a:xfrm>
-          <a:prstGeom prst="rect">
-            <a:avLst/>
-          </a:prstGeom>
-          <a:noFill/>
-        </p:spPr>
-        <p:txBody>
-          <a:bodyPr wrap="square" anchor="t" lIns="0" rIns="0" tIns="0" bIns="0">
-            <a:spAutoFit/>
-          </a:bodyPr>
-          <a:lstStyle/>
-          <a:p>
-            <a:pPr algn="l"/>
-            <a:r>
-              <a:rPr sz="1900" b="1" i="0">
-                <a:solidFill>
-                  <a:srgbClr val="1F2A44"/>
-                </a:solidFill>
-                <a:latin typeface="Calibri"/>
-              </a:rPr>
-              <a:t>Sources</a:t>
-            </a:r>
-          </a:p>
-        </p:txBody>
-      </p:sp>
-      <p:sp>
-        <p:nvSpPr>
-          <p:cNvPr id="6" name="TextBox 5"/>
-          <p:cNvSpPr txBox="1"/>
-          <p:nvPr/>
-        </p:nvSpPr>
-        <p:spPr>
-          <a:xfrm>
-            <a:off x="685800" y="2788920"/>
-            <a:ext cx="1389888" cy="1554480"/>
-          </a:xfrm>
-          <a:prstGeom prst="rect">
-            <a:avLst/>
-          </a:prstGeom>
-          <a:noFill/>
-        </p:spPr>
-        <p:txBody>
-          <a:bodyPr wrap="square" anchor="t" lIns="0" rIns="0" tIns="0" bIns="0">
-            <a:spAutoFit/>
-          </a:bodyPr>
-          <a:lstStyle/>
-          <a:p>
-            <a:pPr algn="l"/>
-            <a:r>
-              <a:rPr sz="1800" b="0" i="0">
-                <a:solidFill>
-                  <a:srgbClr val="1A1A1A"/>
-                </a:solidFill>
-                <a:latin typeface="Calibri"/>
-              </a:rPr>
-              <a:t>Google News, Reddit, Mastodon</a:t>
-            </a:r>
-          </a:p>
-        </p:txBody>
-      </p:sp>
-      <p:cxnSp>
-        <p:nvCxnSpPr>
-          <p:cNvPr id="7" name="Connector 6"/>
-          <p:cNvCxnSpPr/>
-          <p:nvPr/>
-        </p:nvCxnSpPr>
-        <p:spPr>
-          <a:xfrm>
-            <a:off x="2231136" y="3218688"/>
-            <a:ext cx="210312" cy="0"/>
-          </a:xfrm>
-          <a:prstGeom prst="line">
-            <a:avLst/>
-          </a:prstGeom>
-          <a:ln w="31750">
-            <a:solidFill>
-              <a:srgbClr val="0E8A84"/>
-            </a:solidFill>
-            <a:tailEnd type="triangle"/>
-          </a:ln>
-        </p:spPr>
-        <p:style>
-          <a:lnRef idx="2">
-            <a:schemeClr val="accent1"/>
-          </a:lnRef>
-          <a:fillRef idx="0">
-            <a:schemeClr val="accent1"/>
-          </a:fillRef>
-          <a:effectRef idx="1">
-            <a:schemeClr val="accent1"/>
-          </a:effectRef>
-          <a:fontRef idx="minor">
-            <a:schemeClr val="tx1"/>
-          </a:fontRef>
-        </p:style>
-      </p:cxnSp>
-      <p:sp>
-        <p:nvSpPr>
-          <p:cNvPr id="8" name="Arch1"/>
-          <p:cNvSpPr/>
-          <p:nvPr/>
-        </p:nvSpPr>
-        <p:spPr>
-          <a:xfrm>
-            <a:off x="2459736" y="2057400"/>
-            <a:ext cx="1664208" cy="2331720"/>
-          </a:xfrm>
-          <a:prstGeom prst="roundRect">
-            <a:avLst>
-              <a:gd name="adj" fmla="val 6000"/>
-            </a:avLst>
-          </a:prstGeom>
-          <a:solidFill>
-            <a:srgbClr val="EEF4F6"/>
-          </a:solidFill>
-          <a:ln>
-            <a:noFill/>
-          </a:ln>
-          <a:effectLst/>
-        </p:spPr>
-        <p:style>
-          <a:lnRef idx="1">
-            <a:schemeClr val="accent1"/>
-          </a:lnRef>
-          <a:fillRef idx="3">
-            <a:schemeClr val="accent1"/>
-          </a:fillRef>
-          <a:effectRef idx="2">
-            <a:schemeClr val="accent1"/>
-          </a:effectRef>
-          <a:fontRef idx="minor">
-            <a:schemeClr val="lt1"/>
-          </a:fontRef>
-        </p:style>
-        <p:txBody>
-          <a:bodyPr rtlCol="0" anchor="ctr"/>
-          <a:lstStyle/>
-          <a:p>
-            <a:pPr algn="ctr"/>
-          </a:p>
-        </p:txBody>
-      </p:sp>
-      <p:sp>
-        <p:nvSpPr>
-          <p:cNvPr id="9" name="TextBox 8"/>
-          <p:cNvSpPr txBox="1"/>
-          <p:nvPr/>
-        </p:nvSpPr>
-        <p:spPr>
-          <a:xfrm>
-            <a:off x="2596896" y="2240280"/>
-            <a:ext cx="1389888" cy="457200"/>
-          </a:xfrm>
-          <a:prstGeom prst="rect">
-            <a:avLst/>
-          </a:prstGeom>
-          <a:noFill/>
-        </p:spPr>
-        <p:txBody>
-          <a:bodyPr wrap="square" anchor="t" lIns="0" rIns="0" tIns="0" bIns="0">
-            <a:spAutoFit/>
-          </a:bodyPr>
-          <a:lstStyle/>
-          <a:p>
-            <a:pPr algn="l"/>
-            <a:r>
-              <a:rPr sz="1900" b="1" i="0">
-                <a:solidFill>
-                  <a:srgbClr val="1F2A44"/>
-                </a:solidFill>
-                <a:latin typeface="Calibri"/>
-              </a:rPr>
-              <a:t>Ingestion</a:t>
-            </a:r>
-          </a:p>
-        </p:txBody>
-      </p:sp>
-      <p:sp>
-        <p:nvSpPr>
-          <p:cNvPr id="10" name="TextBox 9"/>
-          <p:cNvSpPr txBox="1"/>
-          <p:nvPr/>
-        </p:nvSpPr>
-        <p:spPr>
-          <a:xfrm>
-            <a:off x="2596896" y="2788920"/>
-            <a:ext cx="1389888" cy="1554480"/>
-          </a:xfrm>
-          <a:prstGeom prst="rect">
-            <a:avLst/>
-          </a:prstGeom>
-          <a:noFill/>
-        </p:spPr>
-        <p:txBody>
-          <a:bodyPr wrap="square" anchor="t" lIns="0" rIns="0" tIns="0" bIns="0">
-            <a:spAutoFit/>
-          </a:bodyPr>
-          <a:lstStyle/>
-          <a:p>
-            <a:pPr algn="l"/>
-            <a:r>
-              <a:rPr sz="1800" b="0" i="0">
-                <a:solidFill>
-                  <a:srgbClr val="1A1A1A"/>
-                </a:solidFill>
-                <a:latin typeface="Calibri"/>
-              </a:rPr>
-              <a:t>Rate limits, retries, dedup</a:t>
-            </a:r>
-          </a:p>
-        </p:txBody>
-      </p:sp>
-      <p:cxnSp>
-        <p:nvCxnSpPr>
-          <p:cNvPr id="11" name="Connector 10"/>
-          <p:cNvCxnSpPr/>
-          <p:nvPr/>
-        </p:nvCxnSpPr>
-        <p:spPr>
-          <a:xfrm>
-            <a:off x="4142232" y="3218688"/>
-            <a:ext cx="210312" cy="0"/>
-          </a:xfrm>
-          <a:prstGeom prst="line">
-            <a:avLst/>
-          </a:prstGeom>
-          <a:ln w="31750">
-            <a:solidFill>
-              <a:srgbClr val="0E8A84"/>
-            </a:solidFill>
-            <a:tailEnd type="triangle"/>
-          </a:ln>
-        </p:spPr>
-        <p:style>
-          <a:lnRef idx="2">
-            <a:schemeClr val="accent1"/>
-          </a:lnRef>
-          <a:fillRef idx="0">
-            <a:schemeClr val="accent1"/>
-          </a:fillRef>
-          <a:effectRef idx="1">
-            <a:schemeClr val="accent1"/>
-          </a:effectRef>
-          <a:fontRef idx="minor">
-            <a:schemeClr val="tx1"/>
-          </a:fontRef>
-        </p:style>
-      </p:cxnSp>
-      <p:sp>
-        <p:nvSpPr>
-          <p:cNvPr id="12" name="Arch2"/>
-          <p:cNvSpPr/>
-          <p:nvPr/>
-        </p:nvSpPr>
-        <p:spPr>
-          <a:xfrm>
-            <a:off x="4370832" y="2057400"/>
-            <a:ext cx="1664208" cy="2331720"/>
-          </a:xfrm>
-          <a:prstGeom prst="roundRect">
-            <a:avLst>
-              <a:gd name="adj" fmla="val 6000"/>
-            </a:avLst>
-          </a:prstGeom>
-          <a:solidFill>
-            <a:srgbClr val="1F2A44"/>
-          </a:solidFill>
-          <a:ln>
-            <a:noFill/>
-          </a:ln>
-          <a:effectLst/>
-        </p:spPr>
-        <p:style>
-          <a:lnRef idx="1">
-            <a:schemeClr val="accent1"/>
-          </a:lnRef>
-          <a:fillRef idx="3">
-            <a:schemeClr val="accent1"/>
-          </a:fillRef>
-          <a:effectRef idx="2">
-            <a:schemeClr val="accent1"/>
-          </a:effectRef>
-          <a:fontRef idx="minor">
-            <a:schemeClr val="lt1"/>
-          </a:fontRef>
-        </p:style>
-        <p:txBody>
-          <a:bodyPr rtlCol="0" anchor="ctr"/>
-          <a:lstStyle/>
-          <a:p>
-            <a:pPr algn="ctr"/>
-          </a:p>
-        </p:txBody>
-      </p:sp>
-      <p:sp>
-        <p:nvSpPr>
-          <p:cNvPr id="13" name="TextBox 12"/>
-          <p:cNvSpPr txBox="1"/>
-          <p:nvPr/>
-        </p:nvSpPr>
-        <p:spPr>
-          <a:xfrm>
-            <a:off x="4507992" y="2240280"/>
-            <a:ext cx="1389888" cy="457200"/>
-          </a:xfrm>
-          <a:prstGeom prst="rect">
-            <a:avLst/>
-          </a:prstGeom>
-          <a:noFill/>
-        </p:spPr>
-        <p:txBody>
-          <a:bodyPr wrap="square" anchor="t" lIns="0" rIns="0" tIns="0" bIns="0">
-            <a:spAutoFit/>
-          </a:bodyPr>
-          <a:lstStyle/>
-          <a:p>
-            <a:pPr algn="l"/>
-            <a:r>
-              <a:rPr sz="1900" b="1" i="0">
-                <a:solidFill>
-                  <a:srgbClr val="FFFFFF"/>
-                </a:solidFill>
-                <a:latin typeface="Calibri"/>
-              </a:rPr>
-              <a:t>NLP pipeline</a:t>
-            </a:r>
-          </a:p>
-        </p:txBody>
-      </p:sp>
-      <p:sp>
-        <p:nvSpPr>
-          <p:cNvPr id="14" name="TextBox 13"/>
-          <p:cNvSpPr txBox="1"/>
-          <p:nvPr/>
-        </p:nvSpPr>
-        <p:spPr>
-          <a:xfrm>
-            <a:off x="4507992" y="2788920"/>
-            <a:ext cx="1389888" cy="1554480"/>
-          </a:xfrm>
-          <a:prstGeom prst="rect">
-            <a:avLst/>
-          </a:prstGeom>
-          <a:noFill/>
-        </p:spPr>
-        <p:txBody>
-          <a:bodyPr wrap="square" anchor="t" lIns="0" rIns="0" tIns="0" bIns="0">
-            <a:spAutoFit/>
-          </a:bodyPr>
-          <a:lstStyle/>
-          <a:p>
-            <a:pPr algn="l"/>
-            <a:r>
-              <a:rPr sz="1800" b="0" i="0">
-                <a:solidFill>
-                  <a:srgbClr val="FFFFFF"/>
-                </a:solidFill>
-                <a:latin typeface="Calibri"/>
-              </a:rPr>
-              <a:t>Entities, FinBERT, events, impact</a:t>
-            </a:r>
-          </a:p>
-        </p:txBody>
-      </p:sp>
-      <p:cxnSp>
-        <p:nvCxnSpPr>
-          <p:cNvPr id="15" name="Connector 14"/>
-          <p:cNvCxnSpPr/>
-          <p:nvPr/>
-        </p:nvCxnSpPr>
-        <p:spPr>
-          <a:xfrm>
-            <a:off x="6053328" y="3218688"/>
-            <a:ext cx="210312" cy="0"/>
-          </a:xfrm>
-          <a:prstGeom prst="line">
-            <a:avLst/>
-          </a:prstGeom>
-          <a:ln w="31750">
-            <a:solidFill>
-              <a:srgbClr val="0E8A84"/>
-            </a:solidFill>
-            <a:tailEnd type="triangle"/>
-          </a:ln>
-        </p:spPr>
-        <p:style>
-          <a:lnRef idx="2">
-            <a:schemeClr val="accent1"/>
-          </a:lnRef>
-          <a:fillRef idx="0">
-            <a:schemeClr val="accent1"/>
-          </a:fillRef>
-          <a:effectRef idx="1">
-            <a:schemeClr val="accent1"/>
-          </a:effectRef>
-          <a:fontRef idx="minor">
-            <a:schemeClr val="tx1"/>
-          </a:fontRef>
-        </p:style>
-      </p:cxnSp>
-      <p:sp>
-        <p:nvSpPr>
-          <p:cNvPr id="16" name="Arch3"/>
-          <p:cNvSpPr/>
-          <p:nvPr/>
-        </p:nvSpPr>
-        <p:spPr>
-          <a:xfrm>
-            <a:off x="6281928" y="2057400"/>
-            <a:ext cx="1664208" cy="2331720"/>
-          </a:xfrm>
-          <a:prstGeom prst="roundRect">
-            <a:avLst>
-              <a:gd name="adj" fmla="val 6000"/>
-            </a:avLst>
-          </a:prstGeom>
-          <a:solidFill>
-            <a:srgbClr val="EEF4F6"/>
-          </a:solidFill>
-          <a:ln>
-            <a:noFill/>
-          </a:ln>
-          <a:effectLst/>
-        </p:spPr>
-        <p:style>
-          <a:lnRef idx="1">
-            <a:schemeClr val="accent1"/>
-          </a:lnRef>
-          <a:fillRef idx="3">
-            <a:schemeClr val="accent1"/>
-          </a:fillRef>
-          <a:effectRef idx="2">
-            <a:schemeClr val="accent1"/>
-          </a:effectRef>
-          <a:fontRef idx="minor">
-            <a:schemeClr val="lt1"/>
-          </a:fontRef>
-        </p:style>
-        <p:txBody>
-          <a:bodyPr rtlCol="0" anchor="ctr"/>
-          <a:lstStyle/>
-          <a:p>
-            <a:pPr algn="ctr"/>
-          </a:p>
-        </p:txBody>
-      </p:sp>
-      <p:sp>
-        <p:nvSpPr>
-          <p:cNvPr id="17" name="TextBox 16"/>
-          <p:cNvSpPr txBox="1"/>
-          <p:nvPr/>
-        </p:nvSpPr>
-        <p:spPr>
-          <a:xfrm>
-            <a:off x="6419088" y="2240280"/>
-            <a:ext cx="1389888" cy="457200"/>
-          </a:xfrm>
-          <a:prstGeom prst="rect">
-            <a:avLst/>
-          </a:prstGeom>
-          <a:noFill/>
-        </p:spPr>
-        <p:txBody>
-          <a:bodyPr wrap="square" anchor="t" lIns="0" rIns="0" tIns="0" bIns="0">
-            <a:spAutoFit/>
-          </a:bodyPr>
-          <a:lstStyle/>
-          <a:p>
-            <a:pPr algn="l"/>
-            <a:r>
-              <a:rPr sz="1900" b="1" i="0">
-                <a:solidFill>
-                  <a:srgbClr val="1F2A44"/>
-                </a:solidFill>
-                <a:latin typeface="Calibri"/>
-              </a:rPr>
-              <a:t>Signals</a:t>
-            </a:r>
-          </a:p>
-        </p:txBody>
-      </p:sp>
-      <p:sp>
-        <p:nvSpPr>
-          <p:cNvPr id="18" name="TextBox 17"/>
-          <p:cNvSpPr txBox="1"/>
-          <p:nvPr/>
-        </p:nvSpPr>
-        <p:spPr>
-          <a:xfrm>
-            <a:off x="6419088" y="2788920"/>
-            <a:ext cx="1389888" cy="1554480"/>
-          </a:xfrm>
-          <a:prstGeom prst="rect">
-            <a:avLst/>
-          </a:prstGeom>
-          <a:noFill/>
-        </p:spPr>
-        <p:txBody>
-          <a:bodyPr wrap="square" anchor="t" lIns="0" rIns="0" tIns="0" bIns="0">
-            <a:spAutoFit/>
-          </a:bodyPr>
-          <a:lstStyle/>
-          <a:p>
-            <a:pPr algn="l"/>
-            <a:r>
-              <a:rPr sz="1800" b="0" i="0">
-                <a:solidFill>
-                  <a:srgbClr val="1A1A1A"/>
-                </a:solidFill>
-                <a:latin typeface="Calibri"/>
-              </a:rPr>
-              <a:t>SQLite, bus, REST, SSE, JSONL</a:t>
-            </a:r>
-          </a:p>
-        </p:txBody>
-      </p:sp>
-      <p:cxnSp>
-        <p:nvCxnSpPr>
-          <p:cNvPr id="19" name="Connector 18"/>
-          <p:cNvCxnSpPr/>
-          <p:nvPr/>
-        </p:nvCxnSpPr>
-        <p:spPr>
-          <a:xfrm>
-            <a:off x="7964424" y="3218688"/>
-            <a:ext cx="210312" cy="0"/>
-          </a:xfrm>
-          <a:prstGeom prst="line">
-            <a:avLst/>
-          </a:prstGeom>
-          <a:ln w="31750">
-            <a:solidFill>
-              <a:srgbClr val="0E8A84"/>
-            </a:solidFill>
-            <a:tailEnd type="triangle"/>
-          </a:ln>
-        </p:spPr>
-        <p:style>
-          <a:lnRef idx="2">
-            <a:schemeClr val="accent1"/>
-          </a:lnRef>
-          <a:fillRef idx="0">
-            <a:schemeClr val="accent1"/>
-          </a:fillRef>
-          <a:effectRef idx="1">
-            <a:schemeClr val="accent1"/>
-          </a:effectRef>
-          <a:fontRef idx="minor">
-            <a:schemeClr val="tx1"/>
-          </a:fontRef>
-        </p:style>
-      </p:cxnSp>
-      <p:sp>
-        <p:nvSpPr>
-          <p:cNvPr id="20" name="Arch4"/>
-          <p:cNvSpPr/>
-          <p:nvPr/>
-        </p:nvSpPr>
-        <p:spPr>
-          <a:xfrm>
-            <a:off x="8193024" y="2057400"/>
-            <a:ext cx="1664208" cy="2331720"/>
-          </a:xfrm>
-          <a:prstGeom prst="roundRect">
-            <a:avLst>
-              <a:gd name="adj" fmla="val 6000"/>
-            </a:avLst>
-          </a:prstGeom>
-          <a:solidFill>
-            <a:srgbClr val="1F2A44"/>
-          </a:solidFill>
-          <a:ln>
-            <a:noFill/>
-          </a:ln>
-          <a:effectLst/>
-        </p:spPr>
-        <p:style>
-          <a:lnRef idx="1">
-            <a:schemeClr val="accent1"/>
-          </a:lnRef>
-          <a:fillRef idx="3">
-            <a:schemeClr val="accent1"/>
-          </a:fillRef>
-          <a:effectRef idx="2">
-            <a:schemeClr val="accent1"/>
-          </a:effectRef>
-          <a:fontRef idx="minor">
-            <a:schemeClr val="lt1"/>
-          </a:fontRef>
-        </p:style>
-        <p:txBody>
-          <a:bodyPr rtlCol="0" anchor="ctr"/>
-          <a:lstStyle/>
-          <a:p>
-            <a:pPr algn="ctr"/>
-          </a:p>
-        </p:txBody>
-      </p:sp>
-      <p:sp>
-        <p:nvSpPr>
-          <p:cNvPr id="21" name="TextBox 20"/>
-          <p:cNvSpPr txBox="1"/>
-          <p:nvPr/>
-        </p:nvSpPr>
-        <p:spPr>
-          <a:xfrm>
-            <a:off x="8330184" y="2240280"/>
-            <a:ext cx="1389888" cy="457200"/>
-          </a:xfrm>
-          <a:prstGeom prst="rect">
-            <a:avLst/>
-          </a:prstGeom>
-          <a:noFill/>
-        </p:spPr>
-        <p:txBody>
-          <a:bodyPr wrap="square" anchor="t" lIns="0" rIns="0" tIns="0" bIns="0">
-            <a:spAutoFit/>
-          </a:bodyPr>
-          <a:lstStyle/>
-          <a:p>
-            <a:pPr algn="l"/>
-            <a:r>
-              <a:rPr sz="1900" b="1" i="0">
-                <a:solidFill>
-                  <a:srgbClr val="FFFFFF"/>
-                </a:solidFill>
-                <a:latin typeface="Calibri"/>
-              </a:rPr>
-              <a:t>Stress engine</a:t>
-            </a:r>
-          </a:p>
-        </p:txBody>
-      </p:sp>
-      <p:sp>
-        <p:nvSpPr>
-          <p:cNvPr id="22" name="TextBox 21"/>
-          <p:cNvSpPr txBox="1"/>
-          <p:nvPr/>
-        </p:nvSpPr>
-        <p:spPr>
-          <a:xfrm>
-            <a:off x="8330184" y="2788920"/>
-            <a:ext cx="1389888" cy="1554480"/>
-          </a:xfrm>
-          <a:prstGeom prst="rect">
-            <a:avLst/>
-          </a:prstGeom>
-          <a:noFill/>
-        </p:spPr>
-        <p:txBody>
-          <a:bodyPr wrap="square" anchor="t" lIns="0" rIns="0" tIns="0" bIns="0">
-            <a:spAutoFit/>
-          </a:bodyPr>
-          <a:lstStyle/>
-          <a:p>
-            <a:pPr algn="l"/>
-            <a:r>
-              <a:rPr sz="1800" b="0" i="0">
-                <a:solidFill>
-                  <a:srgbClr val="FFFFFF"/>
-                </a:solidFill>
-                <a:latin typeface="Calibri"/>
-              </a:rPr>
-              <a:t>Module B triggers and pricers</a:t>
-            </a:r>
-          </a:p>
-        </p:txBody>
-      </p:sp>
-      <p:cxnSp>
-        <p:nvCxnSpPr>
-          <p:cNvPr id="23" name="Connector 22"/>
-          <p:cNvCxnSpPr/>
-          <p:nvPr/>
-        </p:nvCxnSpPr>
-        <p:spPr>
-          <a:xfrm>
-            <a:off x="9875520" y="3218688"/>
-            <a:ext cx="210312" cy="0"/>
-          </a:xfrm>
-          <a:prstGeom prst="line">
-            <a:avLst/>
-          </a:prstGeom>
-          <a:ln w="31750">
-            <a:solidFill>
-              <a:srgbClr val="0E8A84"/>
-            </a:solidFill>
-            <a:tailEnd type="triangle"/>
-          </a:ln>
-        </p:spPr>
-        <p:style>
-          <a:lnRef idx="2">
-            <a:schemeClr val="accent1"/>
-          </a:lnRef>
-          <a:fillRef idx="0">
-            <a:schemeClr val="accent1"/>
-          </a:fillRef>
-          <a:effectRef idx="1">
-            <a:schemeClr val="accent1"/>
-          </a:effectRef>
-          <a:fontRef idx="minor">
-            <a:schemeClr val="tx1"/>
-          </a:fontRef>
-        </p:style>
-      </p:cxnSp>
-      <p:sp>
-        <p:nvSpPr>
-          <p:cNvPr id="24" name="Arch5"/>
-          <p:cNvSpPr/>
-          <p:nvPr/>
-        </p:nvSpPr>
-        <p:spPr>
-          <a:xfrm>
-            <a:off x="10104120" y="2057400"/>
-            <a:ext cx="1664208" cy="2331720"/>
-          </a:xfrm>
-          <a:prstGeom prst="roundRect">
-            <a:avLst>
-              <a:gd name="adj" fmla="val 6000"/>
-            </a:avLst>
-          </a:prstGeom>
-          <a:solidFill>
-            <a:srgbClr val="EEF4F6"/>
-          </a:solidFill>
-          <a:ln>
-            <a:noFill/>
-          </a:ln>
-          <a:effectLst/>
-        </p:spPr>
-        <p:style>
-          <a:lnRef idx="1">
-            <a:schemeClr val="accent1"/>
-          </a:lnRef>
-          <a:fillRef idx="3">
-            <a:schemeClr val="accent1"/>
-          </a:fillRef>
-          <a:effectRef idx="2">
-            <a:schemeClr val="accent1"/>
-          </a:effectRef>
-          <a:fontRef idx="minor">
-            <a:schemeClr val="lt1"/>
-          </a:fontRef>
-        </p:style>
-        <p:txBody>
-          <a:bodyPr rtlCol="0" anchor="ctr"/>
-          <a:lstStyle/>
-          <a:p>
-            <a:pPr algn="ctr"/>
-          </a:p>
-        </p:txBody>
-      </p:sp>
-      <p:sp>
-        <p:nvSpPr>
-          <p:cNvPr id="25" name="TextBox 24"/>
-          <p:cNvSpPr txBox="1"/>
-          <p:nvPr/>
-        </p:nvSpPr>
-        <p:spPr>
-          <a:xfrm>
-            <a:off x="10241280" y="2240280"/>
-            <a:ext cx="1389888" cy="457200"/>
-          </a:xfrm>
-          <a:prstGeom prst="rect">
-            <a:avLst/>
-          </a:prstGeom>
-          <a:noFill/>
-        </p:spPr>
-        <p:txBody>
-          <a:bodyPr wrap="square" anchor="t" lIns="0" rIns="0" tIns="0" bIns="0">
-            <a:spAutoFit/>
-          </a:bodyPr>
-          <a:lstStyle/>
-          <a:p>
-            <a:pPr algn="l"/>
-            <a:r>
-              <a:rPr sz="1900" b="1" i="0">
-                <a:solidFill>
-                  <a:srgbClr val="1F2A44"/>
-                </a:solidFill>
-                <a:latin typeface="Calibri"/>
-              </a:rPr>
-              <a:t>Dashboard</a:t>
-            </a:r>
-          </a:p>
-        </p:txBody>
-      </p:sp>
-      <p:sp>
-        <p:nvSpPr>
-          <p:cNvPr id="26" name="TextBox 25"/>
-          <p:cNvSpPr txBox="1"/>
-          <p:nvPr/>
-        </p:nvSpPr>
-        <p:spPr>
-          <a:xfrm>
-            <a:off x="10241280" y="2788920"/>
-            <a:ext cx="1389888" cy="1554480"/>
-          </a:xfrm>
-          <a:prstGeom prst="rect">
-            <a:avLst/>
-          </a:prstGeom>
-          <a:noFill/>
-        </p:spPr>
-        <p:txBody>
-          <a:bodyPr wrap="square" anchor="t" lIns="0" rIns="0" tIns="0" bIns="0">
-            <a:spAutoFit/>
-          </a:bodyPr>
-          <a:lstStyle/>
-          <a:p>
-            <a:pPr algn="l"/>
-            <a:r>
-              <a:rPr sz="1800" b="0" i="0">
-                <a:solidFill>
-                  <a:srgbClr val="1A1A1A"/>
-                </a:solidFill>
-                <a:latin typeface="Calibri"/>
-              </a:rPr>
-              <a:t>watchlist, propagation, what-if, brief</a:t>
-            </a:r>
-          </a:p>
-        </p:txBody>
-      </p:sp>
-      <p:sp>
-        <p:nvSpPr>
-          <p:cNvPr id="27" name="TextBox 26"/>
-          <p:cNvSpPr txBox="1"/>
-          <p:nvPr/>
-        </p:nvSpPr>
-        <p:spPr>
-          <a:xfrm>
-            <a:off x="548640" y="4709160"/>
-            <a:ext cx="11094415" cy="411480"/>
-          </a:xfrm>
-          <a:prstGeom prst="rect">
-            <a:avLst/>
-          </a:prstGeom>
-          <a:noFill/>
-        </p:spPr>
-        <p:txBody>
-          <a:bodyPr wrap="square" anchor="t" lIns="0" rIns="0" tIns="0" bIns="0">
-            <a:spAutoFit/>
-          </a:bodyPr>
-          <a:lstStyle/>
-          <a:p>
-            <a:pPr algn="l"/>
-            <a:r>
-              <a:rPr sz="2000" b="1" i="0">
-                <a:solidFill>
-                  <a:srgbClr val="1F2A44"/>
-                </a:solidFill>
-                <a:latin typeface="Calibri"/>
-              </a:rPr>
-              <a:t>Every record carries its provenance</a:t>
-            </a:r>
-          </a:p>
-        </p:txBody>
-      </p:sp>
-      <p:sp>
-        <p:nvSpPr>
-          <p:cNvPr id="28" name="Rounded Rectangle 27"/>
-          <p:cNvSpPr/>
-          <p:nvPr/>
-        </p:nvSpPr>
-        <p:spPr>
-          <a:xfrm>
-            <a:off x="548640" y="5166360"/>
-            <a:ext cx="2834640" cy="685800"/>
-          </a:xfrm>
-          <a:prstGeom prst="roundRect">
-            <a:avLst>
-              <a:gd name="adj" fmla="val 6000"/>
-            </a:avLst>
-          </a:prstGeom>
-          <a:solidFill>
-            <a:srgbClr val="FFFFFF"/>
-          </a:solidFill>
-          <a:ln w="15875">
+              <a:t>One NLP pipeline for live, replayed, scripted and API input</a:t>
+            </a:r>
+          </a:p>
+        </p:txBody>
+      </p:sp>
+      <p:pic>
+        <p:nvPicPr>
+          <p:cNvPr id="4" name="Picture 3" descr="architecture.png"/>
+          <p:cNvPicPr>
+            <a:picLocks noChangeAspect="1"/>
+          </p:cNvPicPr>
+          <p:nvPr/>
+        </p:nvPicPr>
+        <p:blipFill>
+          <a:blip r:embed="rId2"/>
+          <a:stretch>
+            <a:fillRect/>
+          </a:stretch>
+        </p:blipFill>
+        <p:spPr>
+          <a:xfrm>
+            <a:off x="1297615" y="1417320"/>
+            <a:ext cx="9596464" cy="4343400"/>
+          </a:xfrm>
+          <a:prstGeom prst="rect">
+            <a:avLst/>
+          </a:prstGeom>
+          <a:ln w="12700">
             <a:solidFill>
               <a:srgbClr val="C9D3DB"/>
             </a:solidFill>
           </a:ln>
-          <a:effectLst/>
-        </p:spPr>
-        <p:style>
-          <a:lnRef idx="1">
-            <a:schemeClr val="accent1"/>
-          </a:lnRef>
-          <a:fillRef idx="3">
-            <a:schemeClr val="accent1"/>
-          </a:fillRef>
-          <a:effectRef idx="2">
-            <a:schemeClr val="accent1"/>
-          </a:effectRef>
-          <a:fontRef idx="minor">
-            <a:schemeClr val="lt1"/>
-          </a:fontRef>
-        </p:style>
-        <p:txBody>
-          <a:bodyPr rtlCol="0" anchor="ctr"/>
-          <a:lstStyle/>
-          <a:p>
-            <a:pPr algn="ctr"/>
-          </a:p>
-        </p:txBody>
-      </p:sp>
-      <p:sp>
-        <p:nvSpPr>
-          <p:cNvPr id="29" name="TextBox 28"/>
+        </p:spPr>
+      </p:pic>
+      <p:sp>
+        <p:nvSpPr>
+          <p:cNvPr id="5" name="TextBox 4"/>
           <p:cNvSpPr txBox="1"/>
           <p:nvPr/>
         </p:nvSpPr>
         <p:spPr>
           <a:xfrm>
-            <a:off x="731520" y="5166360"/>
-            <a:ext cx="2560320" cy="685800"/>
-          </a:xfrm>
-          <a:prstGeom prst="rect">
-            <a:avLst/>
-          </a:prstGeom>
-          <a:noFill/>
-        </p:spPr>
-        <p:txBody>
-          <a:bodyPr wrap="square" anchor="ctr" lIns="0" rIns="0" tIns="0" bIns="0">
-            <a:spAutoFit/>
-          </a:bodyPr>
-          <a:lstStyle/>
-          <a:p>
-            <a:pPr algn="l"/>
-            <a:r>
-              <a:rPr sz="1800" b="1" i="0">
-                <a:solidFill>
-                  <a:srgbClr val="0E8A84"/>
-                </a:solidFill>
-                <a:latin typeface="Calibri"/>
-              </a:rPr>
-              <a:t>LIVE  </a:t>
-            </a:r>
-            <a:r>
-              <a:rPr sz="1800" b="0" i="0">
-                <a:solidFill>
-                  <a:srgbClr val="1A1A1A"/>
-                </a:solidFill>
-                <a:latin typeface="Calibri"/>
-              </a:rPr>
-              <a:t>fetched now</a:t>
-            </a:r>
-          </a:p>
-        </p:txBody>
-      </p:sp>
-      <p:sp>
-        <p:nvSpPr>
-          <p:cNvPr id="30" name="Rounded Rectangle 29"/>
-          <p:cNvSpPr/>
-          <p:nvPr/>
-        </p:nvSpPr>
-        <p:spPr>
-          <a:xfrm>
-            <a:off x="3566160" y="5166360"/>
-            <a:ext cx="3886200" cy="685800"/>
-          </a:xfrm>
-          <a:prstGeom prst="roundRect">
-            <a:avLst>
-              <a:gd name="adj" fmla="val 6000"/>
-            </a:avLst>
-          </a:prstGeom>
-          <a:solidFill>
-            <a:srgbClr val="FFFFFF"/>
-          </a:solidFill>
-          <a:ln w="15875">
-            <a:solidFill>
-              <a:srgbClr val="C9D3DB"/>
-            </a:solidFill>
-          </a:ln>
-          <a:effectLst/>
-        </p:spPr>
-        <p:style>
-          <a:lnRef idx="1">
-            <a:schemeClr val="accent1"/>
-          </a:lnRef>
-          <a:fillRef idx="3">
-            <a:schemeClr val="accent1"/>
-          </a:fillRef>
-          <a:effectRef idx="2">
-            <a:schemeClr val="accent1"/>
-          </a:effectRef>
-          <a:fontRef idx="minor">
-            <a:schemeClr val="lt1"/>
-          </a:fontRef>
-        </p:style>
-        <p:txBody>
-          <a:bodyPr rtlCol="0" anchor="ctr"/>
-          <a:lstStyle/>
-          <a:p>
-            <a:pPr algn="ctr"/>
-          </a:p>
-        </p:txBody>
-      </p:sp>
-      <p:sp>
-        <p:nvSpPr>
-          <p:cNvPr id="31" name="TextBox 30"/>
-          <p:cNvSpPr txBox="1"/>
-          <p:nvPr/>
-        </p:nvSpPr>
-        <p:spPr>
-          <a:xfrm>
-            <a:off x="3749040" y="5166360"/>
-            <a:ext cx="3611880" cy="685800"/>
-          </a:xfrm>
-          <a:prstGeom prst="rect">
-            <a:avLst/>
-          </a:prstGeom>
-          <a:noFill/>
-        </p:spPr>
-        <p:txBody>
-          <a:bodyPr wrap="square" anchor="ctr" lIns="0" rIns="0" tIns="0" bIns="0">
-            <a:spAutoFit/>
-          </a:bodyPr>
-          <a:lstStyle/>
-          <a:p>
-            <a:pPr algn="l"/>
-            <a:r>
-              <a:rPr sz="1800" b="1" i="0">
-                <a:solidFill>
-                  <a:srgbClr val="0E8A84"/>
-                </a:solidFill>
-                <a:latin typeface="Calibri"/>
-              </a:rPr>
-              <a:t>CACHED_REAL  </a:t>
-            </a:r>
-            <a:r>
-              <a:rPr sz="1800" b="0" i="0">
-                <a:solidFill>
-                  <a:srgbClr val="1A1A1A"/>
-                </a:solidFill>
-                <a:latin typeface="Calibri"/>
-              </a:rPr>
-              <a:t>real, captured earlier</a:t>
-            </a:r>
-          </a:p>
-        </p:txBody>
-      </p:sp>
-      <p:sp>
-        <p:nvSpPr>
-          <p:cNvPr id="32" name="Rounded Rectangle 31"/>
-          <p:cNvSpPr/>
-          <p:nvPr/>
-        </p:nvSpPr>
-        <p:spPr>
-          <a:xfrm>
-            <a:off x="7635240" y="5166360"/>
-            <a:ext cx="4005072" cy="685800"/>
-          </a:xfrm>
-          <a:prstGeom prst="roundRect">
-            <a:avLst>
-              <a:gd name="adj" fmla="val 6000"/>
-            </a:avLst>
-          </a:prstGeom>
-          <a:solidFill>
-            <a:srgbClr val="FFFFFF"/>
-          </a:solidFill>
-          <a:ln w="15875">
-            <a:solidFill>
-              <a:srgbClr val="C9D3DB"/>
-            </a:solidFill>
-          </a:ln>
-          <a:effectLst/>
-        </p:spPr>
-        <p:style>
-          <a:lnRef idx="1">
-            <a:schemeClr val="accent1"/>
-          </a:lnRef>
-          <a:fillRef idx="3">
-            <a:schemeClr val="accent1"/>
-          </a:fillRef>
-          <a:effectRef idx="2">
-            <a:schemeClr val="accent1"/>
-          </a:effectRef>
-          <a:fontRef idx="minor">
-            <a:schemeClr val="lt1"/>
-          </a:fontRef>
-        </p:style>
-        <p:txBody>
-          <a:bodyPr rtlCol="0" anchor="ctr"/>
-          <a:lstStyle/>
-          <a:p>
-            <a:pPr algn="ctr"/>
-          </a:p>
-        </p:txBody>
-      </p:sp>
-      <p:sp>
-        <p:nvSpPr>
-          <p:cNvPr id="33" name="TextBox 32"/>
-          <p:cNvSpPr txBox="1"/>
-          <p:nvPr/>
-        </p:nvSpPr>
-        <p:spPr>
-          <a:xfrm>
-            <a:off x="7818120" y="5166360"/>
-            <a:ext cx="3730752" cy="685800"/>
-          </a:xfrm>
-          <a:prstGeom prst="rect">
-            <a:avLst/>
-          </a:prstGeom>
-          <a:noFill/>
-        </p:spPr>
-        <p:txBody>
-          <a:bodyPr wrap="square" anchor="ctr" lIns="0" rIns="0" tIns="0" bIns="0">
-            <a:spAutoFit/>
-          </a:bodyPr>
-          <a:lstStyle/>
-          <a:p>
-            <a:pPr algn="l"/>
-            <a:r>
-              <a:rPr sz="1800" b="1" i="0">
-                <a:solidFill>
-                  <a:srgbClr val="0E8A84"/>
-                </a:solidFill>
-                <a:latin typeface="Calibri"/>
-              </a:rPr>
-              <a:t>SYNTHETIC  </a:t>
-            </a:r>
-            <a:r>
-              <a:rPr sz="1800" b="0" i="0">
-                <a:solidFill>
-                  <a:srgbClr val="1A1A1A"/>
-                </a:solidFill>
-                <a:latin typeface="Calibri"/>
-              </a:rPr>
-              <a:t>demo, user text, portfolio</a:t>
-            </a:r>
-          </a:p>
-        </p:txBody>
-      </p:sp>
-      <p:sp>
-        <p:nvSpPr>
-          <p:cNvPr id="34" name="Footer"/>
-          <p:cNvSpPr txBox="1"/>
-          <p:nvPr/>
-        </p:nvSpPr>
-        <p:spPr>
-          <a:xfrm>
-            <a:off x="548640" y="6446520"/>
-            <a:ext cx="8686800" cy="274320"/>
+            <a:off x="1297615" y="5806440"/>
+            <a:ext cx="9596464" cy="274320"/>
           </a:xfrm>
           <a:prstGeom prst="rect">
             <a:avLst/>
@@ -6514,6 +5324,41 @@
           <a:p>
             <a:pPr algn="l"/>
             <a:r>
+              <a:rPr sz="1200" b="0" i="1">
+                <a:solidFill>
+                  <a:srgbClr val="555B66"/>
+                </a:solidFill>
+                <a:latin typeface="Calibri"/>
+              </a:rPr>
+              <a:t>Sources → ingestion → NLP → RiskSignal store and API → stress engine and dashboard · every record labelled LIVE / CACHED_REAL / SYNTHETIC (docs/architecture.png)</a:t>
+            </a:r>
+          </a:p>
+        </p:txBody>
+      </p:sp>
+      <p:sp>
+        <p:nvSpPr>
+          <p:cNvPr id="6" name="Footer"/>
+          <p:cNvSpPr txBox="1"/>
+          <p:nvPr/>
+        </p:nvSpPr>
+        <p:spPr>
+          <a:xfrm>
+            <a:off x="548640" y="6446520"/>
+            <a:ext cx="8686800" cy="274320"/>
+          </a:xfrm>
+          <a:prstGeom prst="rect">
+            <a:avLst/>
+          </a:prstGeom>
+          <a:noFill/>
+        </p:spPr>
+        <p:txBody>
+          <a:bodyPr wrap="square" anchor="t" lIns="0" rIns="0" tIns="0" bIns="0">
+            <a:spAutoFit/>
+          </a:bodyPr>
+          <a:lstStyle/>
+          <a:p>
+            <a:pPr algn="l"/>
+            <a:r>
               <a:rPr sz="1100" b="0" i="0">
                 <a:solidFill>
                   <a:srgbClr val="555B66"/>
@@ -6527,7 +5372,7 @@
       </p:sp>
       <p:sp>
         <p:nvSpPr>
-          <p:cNvPr id="35" name="SlideNo"/>
+          <p:cNvPr id="7" name="SlideNo"/>
           <p:cNvSpPr txBox="1"/>
           <p:nvPr/>
         </p:nvSpPr>
@@ -6608,7 +5453,7 @@
                 </a:solidFill>
                 <a:latin typeface="Calibri"/>
               </a:rPr>
-              <a:t>NLP risk engine</a:t>
+              <a:t>Implementation highlights</a:t>
             </a:r>
           </a:p>
         </p:txBody>
@@ -6656,8 +5501,8 @@
         </p:nvSpPr>
         <p:spPr>
           <a:xfrm>
-            <a:off x="548640" y="1508760"/>
-            <a:ext cx="4754880" cy="4572000"/>
+            <a:off x="548640" y="1463040"/>
+            <a:ext cx="4937760" cy="4754880"/>
           </a:xfrm>
           <a:prstGeom prst="rect">
             <a:avLst/>
@@ -6672,7 +5517,7 @@
           <a:p>
             <a:pPr marL="274320" indent="-274320">
               <a:spcAft>
-                <a:spcPts val="1400"/>
+                <a:spcPts val="900"/>
               </a:spcAft>
               <a:buClr>
                 <a:srgbClr val="0E8A84"/>
@@ -6681,28 +5526,28 @@
               <a:buChar char="•"/>
             </a:pPr>
             <a:r>
-              <a:rPr sz="2000" b="1" i="0">
+              <a:rPr sz="1700" b="1" i="0">
                 <a:solidFill>
                   <a:srgbClr val="1A1A1A"/>
                 </a:solidFill>
                 <a:latin typeface="Calibri"/>
               </a:rPr>
-              <a:t>Entities: </a:t>
-            </a:r>
-            <a:r>
-              <a:rPr sz="2000" b="0" i="0">
+              <a:t>NLP: </a:t>
+            </a:r>
+            <a:r>
+              <a:rPr sz="1700" b="0" i="0">
                 <a:solidFill>
                   <a:srgbClr val="1A1A1A"/>
                 </a:solidFill>
                 <a:latin typeface="Calibri"/>
               </a:rPr>
-              <a:t>cashtags → aliases → spaCy → guarded fuzzy → MARKET</a:t>
+              <a:t>entities (cashtags, aliases, spaCy, guarded fuzzy), FinBERT sentiment, 11-class event rules with evidence; optional fine-tuned models in a hybrid</a:t>
             </a:r>
           </a:p>
           <a:p>
             <a:pPr marL="274320" indent="-274320">
               <a:spcAft>
-                <a:spcPts val="1400"/>
+                <a:spcPts val="900"/>
               </a:spcAft>
               <a:buClr>
                 <a:srgbClr val="0E8A84"/>
@@ -6711,28 +5556,28 @@
               <a:buChar char="•"/>
             </a:pPr>
             <a:r>
-              <a:rPr sz="2000" b="1" i="0">
+              <a:rPr sz="1700" b="1" i="0">
                 <a:solidFill>
                   <a:srgbClr val="1A1A1A"/>
                 </a:solidFill>
                 <a:latin typeface="Calibri"/>
               </a:rPr>
-              <a:t>Sentiment: </a:t>
-            </a:r>
-            <a:r>
-              <a:rPr sz="2000" b="0" i="0">
+              <a:t>Stress engine: </a:t>
+            </a:r>
+            <a:r>
+              <a:rPr sz="1700" b="0" i="0">
                 <a:solidFill>
                   <a:srgbClr val="1A1A1A"/>
                 </a:solidFill>
                 <a:latin typeface="Calibri"/>
               </a:rPr>
-              <a:t>FinBERT, s = P(pos) − P(neg), lexicon fallback</a:t>
+              <a:t>news-only systemic and issuer triggers with cooldown; pricers for bonds, loans, IRS, CDS, FX, equity; what-if sliders</a:t>
             </a:r>
           </a:p>
           <a:p>
             <a:pPr marL="274320" indent="-274320">
               <a:spcAft>
-                <a:spcPts val="1400"/>
+                <a:spcPts val="900"/>
               </a:spcAft>
               <a:buClr>
                 <a:srgbClr val="0E8A84"/>
@@ -6741,28 +5586,28 @@
               <a:buChar char="•"/>
             </a:pPr>
             <a:r>
-              <a:rPr sz="2000" b="1" i="0">
+              <a:rPr sz="1700" b="1" i="0">
                 <a:solidFill>
                   <a:srgbClr val="1A1A1A"/>
                 </a:solidFill>
                 <a:latin typeface="Calibri"/>
               </a:rPr>
-              <a:t>Events: </a:t>
-            </a:r>
-            <a:r>
-              <a:rPr sz="2000" b="0" i="0">
+              <a:t>Credit views: </a:t>
+            </a:r>
+            <a:r>
+              <a:rPr sz="1700" b="0" i="0">
                 <a:solidFill>
                   <a:srgbClr val="1A1A1A"/>
                 </a:solidFill>
                 <a:latin typeface="Calibri"/>
               </a:rPr>
-              <a:t>11-class rules with evidence phrases; zero-shot tested, kept off</a:t>
+              <a:t>watchlist, propagation over 16 curated links, one-click credit brief</a:t>
             </a:r>
           </a:p>
           <a:p>
             <a:pPr marL="274320" indent="-274320">
               <a:spcAft>
-                <a:spcPts val="1400"/>
+                <a:spcPts val="900"/>
               </a:spcAft>
               <a:buClr>
                 <a:srgbClr val="0E8A84"/>
@@ -6771,66 +5616,100 @@
               <a:buChar char="•"/>
             </a:pPr>
             <a:r>
-              <a:rPr sz="2000" b="1" i="0">
+              <a:rPr sz="1700" b="1" i="0">
                 <a:solidFill>
                   <a:srgbClr val="1A1A1A"/>
                 </a:solidFill>
                 <a:latin typeface="Calibri"/>
               </a:rPr>
-              <a:t>Explainability: </a:t>
-            </a:r>
-            <a:r>
-              <a:rPr sz="2000" b="0" i="0">
+              <a:t>Engineering: </a:t>
+            </a:r>
+            <a:r>
+              <a:rPr sz="1700" b="0" i="0">
                 <a:solidFill>
                   <a:srgbClr val="1A1A1A"/>
                 </a:solidFill>
                 <a:latin typeface="Calibri"/>
               </a:rPr>
-              <a:t>probabilities, evidence, factors, reason, business implication</a:t>
-            </a:r>
-          </a:p>
-          <a:p>
-            <a:pPr marL="274320" indent="-274320">
-              <a:spcAft>
-                <a:spcPts val="1400"/>
-              </a:spcAft>
-              <a:buClr>
-                <a:srgbClr val="0E8A84"/>
-              </a:buClr>
-              <a:buFont typeface="Arial"/>
-              <a:buChar char="•"/>
-            </a:pPr>
-            <a:r>
-              <a:rPr sz="2000" b="1" i="0">
-                <a:solidFill>
-                  <a:srgbClr val="1A1A1A"/>
-                </a:solidFill>
-                <a:latin typeface="Calibri"/>
-              </a:rPr>
-              <a:t>Output: </a:t>
-            </a:r>
-            <a:r>
-              <a:rPr sz="2000" b="0" i="0">
-                <a:solidFill>
-                  <a:srgbClr val="1A1A1A"/>
-                </a:solidFill>
-                <a:latin typeface="Calibri"/>
-              </a:rPr>
-              <a:t>RiskSignal JSON via REST, SSE stream, JSONL export</a:t>
-            </a:r>
-          </a:p>
-        </p:txBody>
-      </p:sp>
-      <p:sp>
-        <p:nvSpPr>
-          <p:cNvPr id="5" name="Rounded Rectangle 4"/>
+              <a:t>one pipeline for every input, offline demo, time machine over real data, audit trail</a:t>
+            </a:r>
+          </a:p>
+        </p:txBody>
+      </p:sp>
+      <p:pic>
+        <p:nvPicPr>
+          <p:cNvPr id="5" name="Picture 4" descr="explain_factors.png"/>
+          <p:cNvPicPr>
+            <a:picLocks noChangeAspect="1"/>
+          </p:cNvPicPr>
+          <p:nvPr/>
+        </p:nvPicPr>
+        <p:blipFill>
+          <a:blip r:embed="rId2"/>
+          <a:stretch>
+            <a:fillRect/>
+          </a:stretch>
+        </p:blipFill>
+        <p:spPr>
+          <a:xfrm>
+            <a:off x="5623560" y="1371600"/>
+            <a:ext cx="6035040" cy="1670413"/>
+          </a:xfrm>
+          <a:prstGeom prst="rect">
+            <a:avLst/>
+          </a:prstGeom>
+          <a:ln w="12700">
+            <a:solidFill>
+              <a:srgbClr val="C9D3DB"/>
+            </a:solidFill>
+          </a:ln>
+        </p:spPr>
+      </p:pic>
+      <p:sp>
+        <p:nvSpPr>
+          <p:cNvPr id="6" name="TextBox 5"/>
+          <p:cNvSpPr txBox="1"/>
+          <p:nvPr/>
+        </p:nvSpPr>
+        <p:spPr>
+          <a:xfrm>
+            <a:off x="5623560" y="3106021"/>
+            <a:ext cx="6035040" cy="274320"/>
+          </a:xfrm>
+          <a:prstGeom prst="rect">
+            <a:avLst/>
+          </a:prstGeom>
+          <a:noFill/>
+        </p:spPr>
+        <p:txBody>
+          <a:bodyPr wrap="square" anchor="t" lIns="0" rIns="0" tIns="0" bIns="0">
+            <a:spAutoFit/>
+          </a:bodyPr>
+          <a:lstStyle/>
+          <a:p>
+            <a:pPr algn="l"/>
+            <a:r>
+              <a:rPr sz="1200" b="0" i="1">
+                <a:solidFill>
+                  <a:srgbClr val="555B66"/>
+                </a:solidFill>
+                <a:latin typeface="Calibri"/>
+              </a:rPr>
+              <a:t>Dashboard explainability: factor contributions for a SYNTHETIC demo signal</a:t>
+            </a:r>
+          </a:p>
+        </p:txBody>
+      </p:sp>
+      <p:sp>
+        <p:nvSpPr>
+          <p:cNvPr id="7" name="Rounded Rectangle 6"/>
           <p:cNvSpPr/>
           <p:nvPr/>
         </p:nvSpPr>
         <p:spPr>
           <a:xfrm>
-            <a:off x="5623560" y="4023360"/>
-            <a:ext cx="6035040" cy="1691640"/>
+            <a:off x="5623560" y="3499213"/>
+            <a:ext cx="6035040" cy="1508760"/>
           </a:xfrm>
           <a:prstGeom prst="roundRect">
             <a:avLst>
@@ -6871,14 +5750,14 @@
       </p:sp>
       <p:sp>
         <p:nvSpPr>
-          <p:cNvPr id="6" name="TextBox 5"/>
+          <p:cNvPr id="8" name="TextBox 7"/>
           <p:cNvSpPr txBox="1"/>
           <p:nvPr/>
         </p:nvSpPr>
         <p:spPr>
           <a:xfrm>
-            <a:off x="5852160" y="4187952"/>
-            <a:ext cx="5577840" cy="1783080"/>
+            <a:off x="5852160" y="3636373"/>
+            <a:ext cx="5577840" cy="1280160"/>
           </a:xfrm>
           <a:prstGeom prst="rect">
             <a:avLst/>
@@ -6893,7 +5772,7 @@
           <a:p>
             <a:pPr algn="l"/>
             <a:r>
-              <a:rPr sz="1900" b="1" i="0">
+              <a:rPr sz="1800" b="1" i="0">
                 <a:solidFill>
                   <a:srgbClr val="1F2A44"/>
                 </a:solidFill>
@@ -6902,7 +5781,7 @@
               <a:t>Impact = 1 + 9 × Q × (</a:t>
             </a:r>
             <a:r>
-              <a:rPr sz="1900" b="1" i="0">
+              <a:rPr sz="1800" b="1" i="0">
                 <a:solidFill>
                   <a:srgbClr val="0E8A84"/>
                 </a:solidFill>
@@ -6911,7 +5790,7 @@
               <a:t>0.40·E + 0.25·M + 0.20·X + 0.15·R</a:t>
             </a:r>
             <a:r>
-              <a:rPr sz="1900" b="1" i="0">
+              <a:rPr sz="1800" b="1" i="0">
                 <a:solidFill>
                   <a:srgbClr val="1F2A44"/>
                 </a:solidFill>
@@ -6923,7 +5802,7 @@
           <a:p>
             <a:pPr algn="l"/>
             <a:r>
-              <a:rPr sz="1800" b="0" i="0">
+              <a:rPr sz="1500" b="0" i="0">
                 <a:solidFill>
                   <a:srgbClr val="1A1A1A"/>
                 </a:solidFill>
@@ -6935,77 +5814,13 @@
           <a:p>
             <a:pPr algn="l"/>
             <a:r>
-              <a:rPr sz="1800" b="0" i="0">
+              <a:rPr sz="1500" b="0" i="0">
                 <a:solidFill>
                   <a:srgbClr val="555B66"/>
                 </a:solidFill>
                 <a:latin typeface="Calibri"/>
               </a:rPr>
               <a:t>Expert-set priors, not calibrated</a:t>
-            </a:r>
-          </a:p>
-        </p:txBody>
-      </p:sp>
-      <p:pic>
-        <p:nvPicPr>
-          <p:cNvPr id="7" name="Picture 6" descr="explain_factors.png"/>
-          <p:cNvPicPr>
-            <a:picLocks noChangeAspect="1"/>
-          </p:cNvPicPr>
-          <p:nvPr/>
-        </p:nvPicPr>
-        <p:blipFill>
-          <a:blip r:embed="rId2"/>
-          <a:stretch>
-            <a:fillRect/>
-          </a:stretch>
-        </p:blipFill>
-        <p:spPr>
-          <a:xfrm>
-            <a:off x="5623560" y="1371600"/>
-            <a:ext cx="6035040" cy="1670413"/>
-          </a:xfrm>
-          <a:prstGeom prst="rect">
-            <a:avLst/>
-          </a:prstGeom>
-          <a:ln w="12700">
-            <a:solidFill>
-              <a:srgbClr val="C9D3DB"/>
-            </a:solidFill>
-          </a:ln>
-        </p:spPr>
-      </p:pic>
-      <p:sp>
-        <p:nvSpPr>
-          <p:cNvPr id="8" name="TextBox 7"/>
-          <p:cNvSpPr txBox="1"/>
-          <p:nvPr/>
-        </p:nvSpPr>
-        <p:spPr>
-          <a:xfrm>
-            <a:off x="5623560" y="3106021"/>
-            <a:ext cx="6035040" cy="274320"/>
-          </a:xfrm>
-          <a:prstGeom prst="rect">
-            <a:avLst/>
-          </a:prstGeom>
-          <a:noFill/>
-        </p:spPr>
-        <p:txBody>
-          <a:bodyPr wrap="square" anchor="t" lIns="0" rIns="0" tIns="0" bIns="0">
-            <a:spAutoFit/>
-          </a:bodyPr>
-          <a:lstStyle/>
-          <a:p>
-            <a:pPr algn="l"/>
-            <a:r>
-              <a:rPr sz="1200" b="0" i="1">
-                <a:solidFill>
-                  <a:srgbClr val="555B66"/>
-                </a:solidFill>
-                <a:latin typeface="Calibri"/>
-              </a:rPr>
-              <a:t>Dashboard explainability: factor contributions for a SYNTHETIC demo signal</a:t>
             </a:r>
           </a:p>
         </p:txBody>
@@ -7128,7 +5943,7 @@
                 </a:solidFill>
                 <a:latin typeface="Calibri"/>
               </a:rPr>
-              <a:t>Stress testing (Module B)</a:t>
+              <a:t>Key results and metrics</a:t>
             </a:r>
           </a:p>
         </p:txBody>
@@ -7163,134 +5978,29 @@
                 </a:solidFill>
                 <a:latin typeface="Calibri"/>
               </a:rPr>
-              <a:t>High-impact news triggers a stress test of the book</a:t>
-            </a:r>
-          </a:p>
-        </p:txBody>
-      </p:sp>
-      <p:sp>
-        <p:nvSpPr>
-          <p:cNvPr id="4" name="TextBox 3"/>
-          <p:cNvSpPr txBox="1"/>
-          <p:nvPr/>
-        </p:nvSpPr>
-        <p:spPr>
-          <a:xfrm>
-            <a:off x="548640" y="1463040"/>
-            <a:ext cx="4343400" cy="2651760"/>
-          </a:xfrm>
-          <a:prstGeom prst="rect">
-            <a:avLst/>
-          </a:prstGeom>
-          <a:noFill/>
-        </p:spPr>
-        <p:txBody>
-          <a:bodyPr wrap="square" lIns="0" rIns="0" tIns="0" bIns="0">
-            <a:spAutoFit/>
-          </a:bodyPr>
-          <a:lstStyle/>
-          <a:p>
-            <a:pPr marL="274320" indent="-274320">
-              <a:spcAft>
-                <a:spcPts val="800"/>
-              </a:spcAft>
-              <a:buClr>
-                <a:srgbClr val="0E8A84"/>
-              </a:buClr>
-              <a:buFont typeface="Arial"/>
-              <a:buChar char="•"/>
-            </a:pPr>
-            <a:r>
-              <a:rPr sz="1700" b="0" i="0">
-                <a:solidFill>
-                  <a:srgbClr val="1A1A1A"/>
-                </a:solidFill>
-                <a:latin typeface="Calibri"/>
-              </a:rPr>
-              <a:t>49 positions, $830m funded: loans, bonds, IRS, CDS hedges, FX, equity</a:t>
-            </a:r>
-          </a:p>
-          <a:p>
-            <a:pPr marL="274320" indent="-274320">
-              <a:spcAft>
-                <a:spcPts val="800"/>
-              </a:spcAft>
-              <a:buClr>
-                <a:srgbClr val="0E8A84"/>
-              </a:buClr>
-              <a:buFont typeface="Arial"/>
-              <a:buChar char="•"/>
-            </a:pPr>
-            <a:r>
-              <a:rPr sz="1700" b="0" i="0">
-                <a:solidFill>
-                  <a:srgbClr val="1A1A1A"/>
-                </a:solidFill>
-                <a:latin typeface="Calibri"/>
-              </a:rPr>
-              <a:t>Systemic: market-wide or corroborated, news-sourced, impact ≥ 7</a:t>
-            </a:r>
-          </a:p>
-          <a:p>
-            <a:pPr marL="274320" indent="-274320">
-              <a:spcAft>
-                <a:spcPts val="800"/>
-              </a:spcAft>
-              <a:buClr>
-                <a:srgbClr val="0E8A84"/>
-              </a:buClr>
-              <a:buFont typeface="Arial"/>
-              <a:buChar char="•"/>
-            </a:pPr>
-            <a:r>
-              <a:rPr sz="1700" b="0" i="0">
-                <a:solidFill>
-                  <a:srgbClr val="1A1A1A"/>
-                </a:solidFill>
-                <a:latin typeface="Calibri"/>
-              </a:rPr>
-              <a:t>Issuer: credit/regulatory/legal, held issuer, negative news</a:t>
-            </a:r>
-          </a:p>
-          <a:p>
-            <a:pPr marL="274320" indent="-274320">
-              <a:spcAft>
-                <a:spcPts val="800"/>
-              </a:spcAft>
-              <a:buClr>
-                <a:srgbClr val="0E8A84"/>
-              </a:buClr>
-              <a:buFont typeface="Arial"/>
-              <a:buChar char="•"/>
-            </a:pPr>
-            <a:r>
-              <a:rPr sz="1700" b="0" i="0">
-                <a:solidFill>
-                  <a:srgbClr val="1A1A1A"/>
-                </a:solidFill>
-                <a:latin typeface="Calibri"/>
-              </a:rPr>
-              <a:t>What-if sliders reprice the book instantly</a:t>
-            </a:r>
-          </a:p>
-        </p:txBody>
-      </p:sp>
-      <p:sp>
-        <p:nvSpPr>
-          <p:cNvPr id="5" name="Oval 4"/>
+              <a:t>Accuracy: preliminary (labels pending human review)</a:t>
+            </a:r>
+          </a:p>
+        </p:txBody>
+      </p:sp>
+      <p:sp>
+        <p:nvSpPr>
+          <p:cNvPr id="4" name="Rounded Rectangle 3"/>
           <p:cNvSpPr/>
           <p:nvPr/>
         </p:nvSpPr>
         <p:spPr>
           <a:xfrm>
-            <a:off x="548640" y="4251960"/>
-            <a:ext cx="237744" cy="237744"/>
-          </a:xfrm>
-          <a:prstGeom prst="ellipse">
-            <a:avLst/>
+            <a:off x="548640" y="1417320"/>
+            <a:ext cx="2103120" cy="1325880"/>
+          </a:xfrm>
+          <a:prstGeom prst="roundRect">
+            <a:avLst>
+              <a:gd name="adj" fmla="val 6000"/>
+            </a:avLst>
           </a:prstGeom>
           <a:solidFill>
-            <a:srgbClr val="0CA30C"/>
+            <a:srgbClr val="EEF4F6"/>
           </a:solidFill>
           <a:ln>
             <a:noFill/>
@@ -7321,14 +6031,49 @@
       </p:sp>
       <p:sp>
         <p:nvSpPr>
+          <p:cNvPr id="5" name="TextBox 4"/>
+          <p:cNvSpPr txBox="1"/>
+          <p:nvPr/>
+        </p:nvSpPr>
+        <p:spPr>
+          <a:xfrm>
+            <a:off x="713232" y="1490472"/>
+            <a:ext cx="1828800" cy="548640"/>
+          </a:xfrm>
+          <a:prstGeom prst="rect">
+            <a:avLst/>
+          </a:prstGeom>
+          <a:noFill/>
+        </p:spPr>
+        <p:txBody>
+          <a:bodyPr wrap="square" anchor="t" lIns="0" rIns="0" tIns="0" bIns="0">
+            <a:spAutoFit/>
+          </a:bodyPr>
+          <a:lstStyle/>
+          <a:p>
+            <a:pPr algn="l"/>
+            <a:r>
+              <a:rPr sz="2800" b="1" i="0">
+                <a:solidFill>
+                  <a:srgbClr val="1F2A44"/>
+                </a:solidFill>
+                <a:latin typeface="Calibri"/>
+              </a:rPr>
+              <a:t>0.653</a:t>
+            </a:r>
+          </a:p>
+        </p:txBody>
+      </p:sp>
+      <p:sp>
+        <p:nvSpPr>
           <p:cNvPr id="6" name="TextBox 5"/>
           <p:cNvSpPr txBox="1"/>
           <p:nvPr/>
         </p:nvSpPr>
         <p:spPr>
           <a:xfrm>
-            <a:off x="932688" y="4160520"/>
-            <a:ext cx="3931920" cy="420624"/>
+            <a:off x="713232" y="2020824"/>
+            <a:ext cx="1828800" cy="365760"/>
           </a:xfrm>
           <a:prstGeom prst="rect">
             <a:avLst/>
@@ -7336,7 +6081,7 @@
           <a:noFill/>
         </p:spPr>
         <p:txBody>
-          <a:bodyPr wrap="square" anchor="ctr" lIns="0" rIns="0" tIns="0" bIns="0">
+          <a:bodyPr wrap="square" anchor="t" lIns="0" rIns="0" tIns="0" bIns="0">
             <a:spAutoFit/>
           </a:bodyPr>
           <a:lstStyle/>
@@ -7345,40 +6090,68 @@
             <a:r>
               <a:rPr sz="1800" b="1" i="0">
                 <a:solidFill>
-                  <a:srgbClr val="0CA30C"/>
-                </a:solidFill>
-                <a:latin typeface="Calibri"/>
-              </a:rPr>
-              <a:t>0.41% GREEN  </a:t>
-            </a:r>
-            <a:r>
-              <a:rPr sz="1700" b="0" i="0">
-                <a:solidFill>
                   <a:srgbClr val="1A1A1A"/>
                 </a:solidFill>
                 <a:latin typeface="Calibri"/>
               </a:rPr>
-              <a:t>Tata Motors downgrade</a:t>
-            </a:r>
-          </a:p>
-        </p:txBody>
-      </p:sp>
-      <p:sp>
-        <p:nvSpPr>
-          <p:cNvPr id="7" name="Oval 6"/>
+              <a:t>Sentiment</a:t>
+            </a:r>
+          </a:p>
+        </p:txBody>
+      </p:sp>
+      <p:sp>
+        <p:nvSpPr>
+          <p:cNvPr id="7" name="TextBox 6"/>
+          <p:cNvSpPr txBox="1"/>
+          <p:nvPr/>
+        </p:nvSpPr>
+        <p:spPr>
+          <a:xfrm>
+            <a:off x="713232" y="2331720"/>
+            <a:ext cx="1828800" cy="320040"/>
+          </a:xfrm>
+          <a:prstGeom prst="rect">
+            <a:avLst/>
+          </a:prstGeom>
+          <a:noFill/>
+        </p:spPr>
+        <p:txBody>
+          <a:bodyPr wrap="square" anchor="t" lIns="0" rIns="0" tIns="0" bIns="0">
+            <a:spAutoFit/>
+          </a:bodyPr>
+          <a:lstStyle/>
+          <a:p>
+            <a:pPr algn="l"/>
+            <a:r>
+              <a:rPr sz="1200" b="0" i="0">
+                <a:solidFill>
+                  <a:srgbClr val="555B66"/>
+                </a:solidFill>
+                <a:latin typeface="Calibri"/>
+              </a:rPr>
+              <a:t>accuracy · FinBERT · n = 147</a:t>
+            </a:r>
+          </a:p>
+        </p:txBody>
+      </p:sp>
+      <p:sp>
+        <p:nvSpPr>
+          <p:cNvPr id="8" name="Rounded Rectangle 7"/>
           <p:cNvSpPr/>
           <p:nvPr/>
         </p:nvSpPr>
         <p:spPr>
           <a:xfrm>
-            <a:off x="548640" y="4709160"/>
-            <a:ext cx="237744" cy="237744"/>
-          </a:xfrm>
-          <a:prstGeom prst="ellipse">
-            <a:avLst/>
+            <a:off x="2770632" y="1417320"/>
+            <a:ext cx="2103120" cy="1325880"/>
+          </a:xfrm>
+          <a:prstGeom prst="roundRect">
+            <a:avLst>
+              <a:gd name="adj" fmla="val 6000"/>
+            </a:avLst>
           </a:prstGeom>
           <a:solidFill>
-            <a:srgbClr val="C98A00"/>
+            <a:srgbClr val="EEF4F6"/>
           </a:solidFill>
           <a:ln>
             <a:noFill/>
@@ -7409,14 +6182,14 @@
       </p:sp>
       <p:sp>
         <p:nvSpPr>
-          <p:cNvPr id="8" name="TextBox 7"/>
+          <p:cNvPr id="9" name="TextBox 8"/>
           <p:cNvSpPr txBox="1"/>
           <p:nvPr/>
         </p:nvSpPr>
         <p:spPr>
           <a:xfrm>
-            <a:off x="932688" y="4617720"/>
-            <a:ext cx="3931920" cy="420624"/>
+            <a:off x="2935224" y="1490472"/>
+            <a:ext cx="1828800" cy="548640"/>
           </a:xfrm>
           <a:prstGeom prst="rect">
             <a:avLst/>
@@ -7424,49 +6197,112 @@
           <a:noFill/>
         </p:spPr>
         <p:txBody>
-          <a:bodyPr wrap="square" anchor="ctr" lIns="0" rIns="0" tIns="0" bIns="0">
+          <a:bodyPr wrap="square" anchor="t" lIns="0" rIns="0" tIns="0" bIns="0">
             <a:spAutoFit/>
           </a:bodyPr>
           <a:lstStyle/>
           <a:p>
             <a:pPr algn="l"/>
             <a:r>
+              <a:rPr sz="2800" b="1" i="0">
+                <a:solidFill>
+                  <a:srgbClr val="1F2A44"/>
+                </a:solidFill>
+                <a:latin typeface="Calibri"/>
+              </a:rPr>
+              <a:t>0.81</a:t>
+            </a:r>
+          </a:p>
+        </p:txBody>
+      </p:sp>
+      <p:sp>
+        <p:nvSpPr>
+          <p:cNvPr id="10" name="TextBox 9"/>
+          <p:cNvSpPr txBox="1"/>
+          <p:nvPr/>
+        </p:nvSpPr>
+        <p:spPr>
+          <a:xfrm>
+            <a:off x="2935224" y="2020824"/>
+            <a:ext cx="1828800" cy="365760"/>
+          </a:xfrm>
+          <a:prstGeom prst="rect">
+            <a:avLst/>
+          </a:prstGeom>
+          <a:noFill/>
+        </p:spPr>
+        <p:txBody>
+          <a:bodyPr wrap="square" anchor="t" lIns="0" rIns="0" tIns="0" bIns="0">
+            <a:spAutoFit/>
+          </a:bodyPr>
+          <a:lstStyle/>
+          <a:p>
+            <a:pPr algn="l"/>
+            <a:r>
               <a:rPr sz="1800" b="1" i="0">
                 <a:solidFill>
-                  <a:srgbClr val="C98A00"/>
-                </a:solidFill>
-                <a:latin typeface="Calibri"/>
-              </a:rPr>
-              <a:t>1.32% AMBER  </a:t>
-            </a:r>
-            <a:r>
-              <a:rPr sz="1700" b="0" i="0">
-                <a:solidFill>
                   <a:srgbClr val="1A1A1A"/>
                 </a:solidFill>
                 <a:latin typeface="Calibri"/>
               </a:rPr>
-              <a:t>Invasion (1 source)</a:t>
-            </a:r>
-          </a:p>
-        </p:txBody>
-      </p:sp>
-      <p:sp>
-        <p:nvSpPr>
-          <p:cNvPr id="9" name="Oval 8"/>
+              <a:t>Events</a:t>
+            </a:r>
+          </a:p>
+        </p:txBody>
+      </p:sp>
+      <p:sp>
+        <p:nvSpPr>
+          <p:cNvPr id="11" name="TextBox 10"/>
+          <p:cNvSpPr txBox="1"/>
+          <p:nvPr/>
+        </p:nvSpPr>
+        <p:spPr>
+          <a:xfrm>
+            <a:off x="2935224" y="2331720"/>
+            <a:ext cx="1828800" cy="320040"/>
+          </a:xfrm>
+          <a:prstGeom prst="rect">
+            <a:avLst/>
+          </a:prstGeom>
+          <a:noFill/>
+        </p:spPr>
+        <p:txBody>
+          <a:bodyPr wrap="square" anchor="t" lIns="0" rIns="0" tIns="0" bIns="0">
+            <a:spAutoFit/>
+          </a:bodyPr>
+          <a:lstStyle/>
+          <a:p>
+            <a:pPr algn="l"/>
+            <a:r>
+              <a:rPr sz="1200" b="0" i="0">
+                <a:solidFill>
+                  <a:srgbClr val="555B66"/>
+                </a:solidFill>
+                <a:latin typeface="Calibri"/>
+              </a:rPr>
+              <a:t>accuracy · rules · n = 147</a:t>
+            </a:r>
+          </a:p>
+        </p:txBody>
+      </p:sp>
+      <p:sp>
+        <p:nvSpPr>
+          <p:cNvPr id="12" name="Rounded Rectangle 11"/>
           <p:cNvSpPr/>
           <p:nvPr/>
         </p:nvSpPr>
         <p:spPr>
           <a:xfrm>
-            <a:off x="548640" y="5166360"/>
-            <a:ext cx="237744" cy="237744"/>
-          </a:xfrm>
-          <a:prstGeom prst="ellipse">
-            <a:avLst/>
+            <a:off x="4992624" y="1417320"/>
+            <a:ext cx="2103120" cy="1325880"/>
+          </a:xfrm>
+          <a:prstGeom prst="roundRect">
+            <a:avLst>
+              <a:gd name="adj" fmla="val 6000"/>
+            </a:avLst>
           </a:prstGeom>
           <a:solidFill>
-            <a:srgbClr val="D03B3B"/>
+            <a:srgbClr val="EEF4F6"/>
           </a:solidFill>
           <a:ln>
             <a:noFill/>
@@ -7497,14 +6333,535 @@
       </p:sp>
       <p:sp>
         <p:nvSpPr>
-          <p:cNvPr id="10" name="TextBox 9"/>
+          <p:cNvPr id="13" name="TextBox 12"/>
           <p:cNvSpPr txBox="1"/>
           <p:nvPr/>
         </p:nvSpPr>
         <p:spPr>
           <a:xfrm>
-            <a:off x="932688" y="5074920"/>
-            <a:ext cx="3931920" cy="420624"/>
+            <a:off x="5157216" y="1490472"/>
+            <a:ext cx="1828800" cy="548640"/>
+          </a:xfrm>
+          <a:prstGeom prst="rect">
+            <a:avLst/>
+          </a:prstGeom>
+          <a:noFill/>
+        </p:spPr>
+        <p:txBody>
+          <a:bodyPr wrap="square" anchor="t" lIns="0" rIns="0" tIns="0" bIns="0">
+            <a:spAutoFit/>
+          </a:bodyPr>
+          <a:lstStyle/>
+          <a:p>
+            <a:pPr algn="l"/>
+            <a:r>
+              <a:rPr sz="2800" b="1" i="0">
+                <a:solidFill>
+                  <a:srgbClr val="1F2A44"/>
+                </a:solidFill>
+                <a:latin typeface="Calibri"/>
+              </a:rPr>
+              <a:t>0.898</a:t>
+            </a:r>
+          </a:p>
+        </p:txBody>
+      </p:sp>
+      <p:sp>
+        <p:nvSpPr>
+          <p:cNvPr id="14" name="TextBox 13"/>
+          <p:cNvSpPr txBox="1"/>
+          <p:nvPr/>
+        </p:nvSpPr>
+        <p:spPr>
+          <a:xfrm>
+            <a:off x="5157216" y="2020824"/>
+            <a:ext cx="1828800" cy="365760"/>
+          </a:xfrm>
+          <a:prstGeom prst="rect">
+            <a:avLst/>
+          </a:prstGeom>
+          <a:noFill/>
+        </p:spPr>
+        <p:txBody>
+          <a:bodyPr wrap="square" anchor="t" lIns="0" rIns="0" tIns="0" bIns="0">
+            <a:spAutoFit/>
+          </a:bodyPr>
+          <a:lstStyle/>
+          <a:p>
+            <a:pPr algn="l"/>
+            <a:r>
+              <a:rPr sz="1800" b="1" i="0">
+                <a:solidFill>
+                  <a:srgbClr val="1A1A1A"/>
+                </a:solidFill>
+                <a:latin typeface="Calibri"/>
+              </a:rPr>
+              <a:t>Entities</a:t>
+            </a:r>
+          </a:p>
+        </p:txBody>
+      </p:sp>
+      <p:sp>
+        <p:nvSpPr>
+          <p:cNvPr id="15" name="TextBox 14"/>
+          <p:cNvSpPr txBox="1"/>
+          <p:nvPr/>
+        </p:nvSpPr>
+        <p:spPr>
+          <a:xfrm>
+            <a:off x="5157216" y="2331720"/>
+            <a:ext cx="1828800" cy="320040"/>
+          </a:xfrm>
+          <a:prstGeom prst="rect">
+            <a:avLst/>
+          </a:prstGeom>
+          <a:noFill/>
+        </p:spPr>
+        <p:txBody>
+          <a:bodyPr wrap="square" anchor="t" lIns="0" rIns="0" tIns="0" bIns="0">
+            <a:spAutoFit/>
+          </a:bodyPr>
+          <a:lstStyle/>
+          <a:p>
+            <a:pPr algn="l"/>
+            <a:r>
+              <a:rPr sz="1200" b="0" i="0">
+                <a:solidFill>
+                  <a:srgbClr val="555B66"/>
+                </a:solidFill>
+                <a:latin typeface="Calibri"/>
+              </a:rPr>
+              <a:t>accuracy · n = 147</a:t>
+            </a:r>
+          </a:p>
+        </p:txBody>
+      </p:sp>
+      <p:sp>
+        <p:nvSpPr>
+          <p:cNvPr id="16" name="Rounded Rectangle 15"/>
+          <p:cNvSpPr/>
+          <p:nvPr/>
+        </p:nvSpPr>
+        <p:spPr>
+          <a:xfrm>
+            <a:off x="7214616" y="1417320"/>
+            <a:ext cx="2103120" cy="1325880"/>
+          </a:xfrm>
+          <a:prstGeom prst="roundRect">
+            <a:avLst>
+              <a:gd name="adj" fmla="val 6000"/>
+            </a:avLst>
+          </a:prstGeom>
+          <a:solidFill>
+            <a:srgbClr val="EEF4F6"/>
+          </a:solidFill>
+          <a:ln>
+            <a:noFill/>
+          </a:ln>
+          <a:effectLst/>
+        </p:spPr>
+        <p:style>
+          <a:lnRef idx="1">
+            <a:schemeClr val="accent1"/>
+          </a:lnRef>
+          <a:fillRef idx="3">
+            <a:schemeClr val="accent1"/>
+          </a:fillRef>
+          <a:effectRef idx="2">
+            <a:schemeClr val="accent1"/>
+          </a:effectRef>
+          <a:fontRef idx="minor">
+            <a:schemeClr val="lt1"/>
+          </a:fontRef>
+        </p:style>
+        <p:txBody>
+          <a:bodyPr rtlCol="0" anchor="ctr"/>
+          <a:lstStyle/>
+          <a:p>
+            <a:pPr algn="ctr"/>
+          </a:p>
+        </p:txBody>
+      </p:sp>
+      <p:sp>
+        <p:nvSpPr>
+          <p:cNvPr id="17" name="TextBox 16"/>
+          <p:cNvSpPr txBox="1"/>
+          <p:nvPr/>
+        </p:nvSpPr>
+        <p:spPr>
+          <a:xfrm>
+            <a:off x="7379208" y="1490472"/>
+            <a:ext cx="1828800" cy="548640"/>
+          </a:xfrm>
+          <a:prstGeom prst="rect">
+            <a:avLst/>
+          </a:prstGeom>
+          <a:noFill/>
+        </p:spPr>
+        <p:txBody>
+          <a:bodyPr wrap="square" anchor="t" lIns="0" rIns="0" tIns="0" bIns="0">
+            <a:spAutoFit/>
+          </a:bodyPr>
+          <a:lstStyle/>
+          <a:p>
+            <a:pPr algn="l"/>
+            <a:r>
+              <a:rPr sz="2800" b="1" i="0">
+                <a:solidFill>
+                  <a:srgbClr val="1F2A44"/>
+                </a:solidFill>
+                <a:latin typeface="Calibri"/>
+              </a:rPr>
+              <a:t>204.7 ms</a:t>
+            </a:r>
+          </a:p>
+        </p:txBody>
+      </p:sp>
+      <p:sp>
+        <p:nvSpPr>
+          <p:cNvPr id="18" name="TextBox 17"/>
+          <p:cNvSpPr txBox="1"/>
+          <p:nvPr/>
+        </p:nvSpPr>
+        <p:spPr>
+          <a:xfrm>
+            <a:off x="7379208" y="2020824"/>
+            <a:ext cx="1828800" cy="365760"/>
+          </a:xfrm>
+          <a:prstGeom prst="rect">
+            <a:avLst/>
+          </a:prstGeom>
+          <a:noFill/>
+        </p:spPr>
+        <p:txBody>
+          <a:bodyPr wrap="square" anchor="t" lIns="0" rIns="0" tIns="0" bIns="0">
+            <a:spAutoFit/>
+          </a:bodyPr>
+          <a:lstStyle/>
+          <a:p>
+            <a:pPr algn="l"/>
+            <a:r>
+              <a:rPr sz="1800" b="1" i="0">
+                <a:solidFill>
+                  <a:srgbClr val="1A1A1A"/>
+                </a:solidFill>
+                <a:latin typeface="Calibri"/>
+              </a:rPr>
+              <a:t>Median latency</a:t>
+            </a:r>
+          </a:p>
+        </p:txBody>
+      </p:sp>
+      <p:sp>
+        <p:nvSpPr>
+          <p:cNvPr id="19" name="TextBox 18"/>
+          <p:cNvSpPr txBox="1"/>
+          <p:nvPr/>
+        </p:nvSpPr>
+        <p:spPr>
+          <a:xfrm>
+            <a:off x="7379208" y="2331720"/>
+            <a:ext cx="1828800" cy="320040"/>
+          </a:xfrm>
+          <a:prstGeom prst="rect">
+            <a:avLst/>
+          </a:prstGeom>
+          <a:noFill/>
+        </p:spPr>
+        <p:txBody>
+          <a:bodyPr wrap="square" anchor="t" lIns="0" rIns="0" tIns="0" bIns="0">
+            <a:spAutoFit/>
+          </a:bodyPr>
+          <a:lstStyle/>
+          <a:p>
+            <a:pPr algn="l"/>
+            <a:r>
+              <a:rPr sz="1200" b="0" i="0">
+                <a:solidFill>
+                  <a:srgbClr val="555B66"/>
+                </a:solidFill>
+                <a:latin typeface="Calibri"/>
+              </a:rPr>
+              <a:t>p95 1085.2 ms · n = 200</a:t>
+            </a:r>
+          </a:p>
+        </p:txBody>
+      </p:sp>
+      <p:sp>
+        <p:nvSpPr>
+          <p:cNvPr id="20" name="Rounded Rectangle 19"/>
+          <p:cNvSpPr/>
+          <p:nvPr/>
+        </p:nvSpPr>
+        <p:spPr>
+          <a:xfrm>
+            <a:off x="9436608" y="1417320"/>
+            <a:ext cx="2103120" cy="1325880"/>
+          </a:xfrm>
+          <a:prstGeom prst="roundRect">
+            <a:avLst>
+              <a:gd name="adj" fmla="val 6000"/>
+            </a:avLst>
+          </a:prstGeom>
+          <a:solidFill>
+            <a:srgbClr val="EEF4F6"/>
+          </a:solidFill>
+          <a:ln>
+            <a:noFill/>
+          </a:ln>
+          <a:effectLst/>
+        </p:spPr>
+        <p:style>
+          <a:lnRef idx="1">
+            <a:schemeClr val="accent1"/>
+          </a:lnRef>
+          <a:fillRef idx="3">
+            <a:schemeClr val="accent1"/>
+          </a:fillRef>
+          <a:effectRef idx="2">
+            <a:schemeClr val="accent1"/>
+          </a:effectRef>
+          <a:fontRef idx="minor">
+            <a:schemeClr val="lt1"/>
+          </a:fontRef>
+        </p:style>
+        <p:txBody>
+          <a:bodyPr rtlCol="0" anchor="ctr"/>
+          <a:lstStyle/>
+          <a:p>
+            <a:pPr algn="ctr"/>
+          </a:p>
+        </p:txBody>
+      </p:sp>
+      <p:sp>
+        <p:nvSpPr>
+          <p:cNvPr id="21" name="TextBox 20"/>
+          <p:cNvSpPr txBox="1"/>
+          <p:nvPr/>
+        </p:nvSpPr>
+        <p:spPr>
+          <a:xfrm>
+            <a:off x="9601200" y="1490472"/>
+            <a:ext cx="1828800" cy="548640"/>
+          </a:xfrm>
+          <a:prstGeom prst="rect">
+            <a:avLst/>
+          </a:prstGeom>
+          <a:noFill/>
+        </p:spPr>
+        <p:txBody>
+          <a:bodyPr wrap="square" anchor="t" lIns="0" rIns="0" tIns="0" bIns="0">
+            <a:spAutoFit/>
+          </a:bodyPr>
+          <a:lstStyle/>
+          <a:p>
+            <a:pPr algn="l"/>
+            <a:r>
+              <a:rPr sz="2800" b="1" i="0">
+                <a:solidFill>
+                  <a:srgbClr val="1F2A44"/>
+                </a:solidFill>
+                <a:latin typeface="Calibri"/>
+              </a:rPr>
+              <a:t>84 → 50</a:t>
+            </a:r>
+          </a:p>
+        </p:txBody>
+      </p:sp>
+      <p:sp>
+        <p:nvSpPr>
+          <p:cNvPr id="22" name="TextBox 21"/>
+          <p:cNvSpPr txBox="1"/>
+          <p:nvPr/>
+        </p:nvSpPr>
+        <p:spPr>
+          <a:xfrm>
+            <a:off x="9601200" y="2020824"/>
+            <a:ext cx="1828800" cy="365760"/>
+          </a:xfrm>
+          <a:prstGeom prst="rect">
+            <a:avLst/>
+          </a:prstGeom>
+          <a:noFill/>
+        </p:spPr>
+        <p:txBody>
+          <a:bodyPr wrap="square" anchor="t" lIns="0" rIns="0" tIns="0" bIns="0">
+            <a:spAutoFit/>
+          </a:bodyPr>
+          <a:lstStyle/>
+          <a:p>
+            <a:pPr algn="l"/>
+            <a:r>
+              <a:rPr sz="1800" b="1" i="0">
+                <a:solidFill>
+                  <a:srgbClr val="1A1A1A"/>
+                </a:solidFill>
+                <a:latin typeface="Calibri"/>
+              </a:rPr>
+              <a:t>Stress runs</a:t>
+            </a:r>
+          </a:p>
+        </p:txBody>
+      </p:sp>
+      <p:sp>
+        <p:nvSpPr>
+          <p:cNvPr id="23" name="TextBox 22"/>
+          <p:cNvSpPr txBox="1"/>
+          <p:nvPr/>
+        </p:nvSpPr>
+        <p:spPr>
+          <a:xfrm>
+            <a:off x="9601200" y="2331720"/>
+            <a:ext cx="1828800" cy="320040"/>
+          </a:xfrm>
+          <a:prstGeom prst="rect">
+            <a:avLst/>
+          </a:prstGeom>
+          <a:noFill/>
+        </p:spPr>
+        <p:txBody>
+          <a:bodyPr wrap="square" anchor="t" lIns="0" rIns="0" tIns="0" bIns="0">
+            <a:spAutoFit/>
+          </a:bodyPr>
+          <a:lstStyle/>
+          <a:p>
+            <a:pPr algn="l"/>
+            <a:r>
+              <a:rPr sz="1200" b="0" i="0">
+                <a:solidFill>
+                  <a:srgbClr val="555B66"/>
+                </a:solidFill>
+                <a:latin typeface="Calibri"/>
+              </a:rPr>
+              <a:t>replay after fixes · n = 911</a:t>
+            </a:r>
+          </a:p>
+        </p:txBody>
+      </p:sp>
+      <p:sp>
+        <p:nvSpPr>
+          <p:cNvPr id="24" name="TextBox 23"/>
+          <p:cNvSpPr txBox="1"/>
+          <p:nvPr/>
+        </p:nvSpPr>
+        <p:spPr>
+          <a:xfrm>
+            <a:off x="548640" y="2788920"/>
+            <a:ext cx="10972800" cy="274320"/>
+          </a:xfrm>
+          <a:prstGeom prst="rect">
+            <a:avLst/>
+          </a:prstGeom>
+          <a:noFill/>
+        </p:spPr>
+        <p:txBody>
+          <a:bodyPr wrap="square" anchor="t" lIns="0" rIns="0" tIns="0" bIns="0">
+            <a:spAutoFit/>
+          </a:bodyPr>
+          <a:lstStyle/>
+          <a:p>
+            <a:pPr algn="l"/>
+            <a:r>
+              <a:rPr sz="1200" b="0" i="1">
+                <a:solidFill>
+                  <a:srgbClr val="555B66"/>
+                </a:solidFill>
+                <a:latin typeface="Calibri"/>
+              </a:rPr>
+              <a:t>Preliminary (labels pending human review): labels drafted by an AI assistant, which also wrote the event rules. Treat as a smoke test, not a benchmark.</a:t>
+            </a:r>
+          </a:p>
+        </p:txBody>
+      </p:sp>
+      <p:sp>
+        <p:nvSpPr>
+          <p:cNvPr id="25" name="TextBox 24"/>
+          <p:cNvSpPr txBox="1"/>
+          <p:nvPr/>
+        </p:nvSpPr>
+        <p:spPr>
+          <a:xfrm>
+            <a:off x="548640" y="3246120"/>
+            <a:ext cx="4480560" cy="365760"/>
+          </a:xfrm>
+          <a:prstGeom prst="rect">
+            <a:avLst/>
+          </a:prstGeom>
+          <a:noFill/>
+        </p:spPr>
+        <p:txBody>
+          <a:bodyPr wrap="square" anchor="t" lIns="0" rIns="0" tIns="0" bIns="0">
+            <a:spAutoFit/>
+          </a:bodyPr>
+          <a:lstStyle/>
+          <a:p>
+            <a:pPr algn="l"/>
+            <a:r>
+              <a:rPr sz="1900" b="1" i="0">
+                <a:solidFill>
+                  <a:srgbClr val="1F2A44"/>
+                </a:solidFill>
+                <a:latin typeface="Calibri"/>
+              </a:rPr>
+              <a:t>Scenario demo (simulated)</a:t>
+            </a:r>
+          </a:p>
+        </p:txBody>
+      </p:sp>
+      <p:sp>
+        <p:nvSpPr>
+          <p:cNvPr id="26" name="Oval 25"/>
+          <p:cNvSpPr/>
+          <p:nvPr/>
+        </p:nvSpPr>
+        <p:spPr>
+          <a:xfrm>
+            <a:off x="548640" y="3794760"/>
+            <a:ext cx="237744" cy="237744"/>
+          </a:xfrm>
+          <a:prstGeom prst="ellipse">
+            <a:avLst/>
+          </a:prstGeom>
+          <a:solidFill>
+            <a:srgbClr val="0CA30C"/>
+          </a:solidFill>
+          <a:ln>
+            <a:noFill/>
+          </a:ln>
+          <a:effectLst/>
+        </p:spPr>
+        <p:style>
+          <a:lnRef idx="1">
+            <a:schemeClr val="accent1"/>
+          </a:lnRef>
+          <a:fillRef idx="3">
+            <a:schemeClr val="accent1"/>
+          </a:fillRef>
+          <a:effectRef idx="2">
+            <a:schemeClr val="accent1"/>
+          </a:effectRef>
+          <a:fontRef idx="minor">
+            <a:schemeClr val="lt1"/>
+          </a:fontRef>
+        </p:style>
+        <p:txBody>
+          <a:bodyPr rtlCol="0" anchor="ctr"/>
+          <a:lstStyle/>
+          <a:p>
+            <a:pPr algn="ctr"/>
+          </a:p>
+        </p:txBody>
+      </p:sp>
+      <p:sp>
+        <p:nvSpPr>
+          <p:cNvPr id="27" name="TextBox 26"/>
+          <p:cNvSpPr txBox="1"/>
+          <p:nvPr/>
+        </p:nvSpPr>
+        <p:spPr>
+          <a:xfrm>
+            <a:off x="932688" y="3703320"/>
+            <a:ext cx="4023360" cy="420624"/>
           </a:xfrm>
           <a:prstGeom prst="rect">
             <a:avLst/>
@@ -7521,6 +6878,182 @@
             <a:r>
               <a:rPr sz="1800" b="1" i="0">
                 <a:solidFill>
+                  <a:srgbClr val="0CA30C"/>
+                </a:solidFill>
+                <a:latin typeface="Calibri"/>
+              </a:rPr>
+              <a:t>0.41% GREEN  </a:t>
+            </a:r>
+            <a:r>
+              <a:rPr sz="1700" b="0" i="0">
+                <a:solidFill>
+                  <a:srgbClr val="1A1A1A"/>
+                </a:solidFill>
+                <a:latin typeface="Calibri"/>
+              </a:rPr>
+              <a:t>Tata Motors downgrade</a:t>
+            </a:r>
+          </a:p>
+        </p:txBody>
+      </p:sp>
+      <p:sp>
+        <p:nvSpPr>
+          <p:cNvPr id="28" name="Oval 27"/>
+          <p:cNvSpPr/>
+          <p:nvPr/>
+        </p:nvSpPr>
+        <p:spPr>
+          <a:xfrm>
+            <a:off x="548640" y="4251960"/>
+            <a:ext cx="237744" cy="237744"/>
+          </a:xfrm>
+          <a:prstGeom prst="ellipse">
+            <a:avLst/>
+          </a:prstGeom>
+          <a:solidFill>
+            <a:srgbClr val="C98A00"/>
+          </a:solidFill>
+          <a:ln>
+            <a:noFill/>
+          </a:ln>
+          <a:effectLst/>
+        </p:spPr>
+        <p:style>
+          <a:lnRef idx="1">
+            <a:schemeClr val="accent1"/>
+          </a:lnRef>
+          <a:fillRef idx="3">
+            <a:schemeClr val="accent1"/>
+          </a:fillRef>
+          <a:effectRef idx="2">
+            <a:schemeClr val="accent1"/>
+          </a:effectRef>
+          <a:fontRef idx="minor">
+            <a:schemeClr val="lt1"/>
+          </a:fontRef>
+        </p:style>
+        <p:txBody>
+          <a:bodyPr rtlCol="0" anchor="ctr"/>
+          <a:lstStyle/>
+          <a:p>
+            <a:pPr algn="ctr"/>
+          </a:p>
+        </p:txBody>
+      </p:sp>
+      <p:sp>
+        <p:nvSpPr>
+          <p:cNvPr id="29" name="TextBox 28"/>
+          <p:cNvSpPr txBox="1"/>
+          <p:nvPr/>
+        </p:nvSpPr>
+        <p:spPr>
+          <a:xfrm>
+            <a:off x="932688" y="4160520"/>
+            <a:ext cx="4023360" cy="420624"/>
+          </a:xfrm>
+          <a:prstGeom prst="rect">
+            <a:avLst/>
+          </a:prstGeom>
+          <a:noFill/>
+        </p:spPr>
+        <p:txBody>
+          <a:bodyPr wrap="square" anchor="ctr" lIns="0" rIns="0" tIns="0" bIns="0">
+            <a:spAutoFit/>
+          </a:bodyPr>
+          <a:lstStyle/>
+          <a:p>
+            <a:pPr algn="l"/>
+            <a:r>
+              <a:rPr sz="1800" b="1" i="0">
+                <a:solidFill>
+                  <a:srgbClr val="C98A00"/>
+                </a:solidFill>
+                <a:latin typeface="Calibri"/>
+              </a:rPr>
+              <a:t>1.32% AMBER  </a:t>
+            </a:r>
+            <a:r>
+              <a:rPr sz="1700" b="0" i="0">
+                <a:solidFill>
+                  <a:srgbClr val="1A1A1A"/>
+                </a:solidFill>
+                <a:latin typeface="Calibri"/>
+              </a:rPr>
+              <a:t>Invasion (1 source)</a:t>
+            </a:r>
+          </a:p>
+        </p:txBody>
+      </p:sp>
+      <p:sp>
+        <p:nvSpPr>
+          <p:cNvPr id="30" name="Oval 29"/>
+          <p:cNvSpPr/>
+          <p:nvPr/>
+        </p:nvSpPr>
+        <p:spPr>
+          <a:xfrm>
+            <a:off x="548640" y="4709160"/>
+            <a:ext cx="237744" cy="237744"/>
+          </a:xfrm>
+          <a:prstGeom prst="ellipse">
+            <a:avLst/>
+          </a:prstGeom>
+          <a:solidFill>
+            <a:srgbClr val="D03B3B"/>
+          </a:solidFill>
+          <a:ln>
+            <a:noFill/>
+          </a:ln>
+          <a:effectLst/>
+        </p:spPr>
+        <p:style>
+          <a:lnRef idx="1">
+            <a:schemeClr val="accent1"/>
+          </a:lnRef>
+          <a:fillRef idx="3">
+            <a:schemeClr val="accent1"/>
+          </a:fillRef>
+          <a:effectRef idx="2">
+            <a:schemeClr val="accent1"/>
+          </a:effectRef>
+          <a:fontRef idx="minor">
+            <a:schemeClr val="lt1"/>
+          </a:fontRef>
+        </p:style>
+        <p:txBody>
+          <a:bodyPr rtlCol="0" anchor="ctr"/>
+          <a:lstStyle/>
+          <a:p>
+            <a:pPr algn="ctr"/>
+          </a:p>
+        </p:txBody>
+      </p:sp>
+      <p:sp>
+        <p:nvSpPr>
+          <p:cNvPr id="31" name="TextBox 30"/>
+          <p:cNvSpPr txBox="1"/>
+          <p:nvPr/>
+        </p:nvSpPr>
+        <p:spPr>
+          <a:xfrm>
+            <a:off x="932688" y="4617720"/>
+            <a:ext cx="4023360" cy="420624"/>
+          </a:xfrm>
+          <a:prstGeom prst="rect">
+            <a:avLst/>
+          </a:prstGeom>
+          <a:noFill/>
+        </p:spPr>
+        <p:txBody>
+          <a:bodyPr wrap="square" anchor="ctr" lIns="0" rIns="0" tIns="0" bIns="0">
+            <a:spAutoFit/>
+          </a:bodyPr>
+          <a:lstStyle/>
+          <a:p>
+            <a:pPr algn="l"/>
+            <a:r>
+              <a:rPr sz="1800" b="1" i="0">
+                <a:solidFill>
                   <a:srgbClr val="D03B3B"/>
                 </a:solidFill>
                 <a:latin typeface="Calibri"/>
@@ -7541,14 +7074,14 @@
       </p:sp>
       <p:sp>
         <p:nvSpPr>
-          <p:cNvPr id="11" name="TextBox 10"/>
+          <p:cNvPr id="32" name="TextBox 31"/>
           <p:cNvSpPr txBox="1"/>
           <p:nvPr/>
         </p:nvSpPr>
         <p:spPr>
           <a:xfrm>
-            <a:off x="548640" y="5577840"/>
-            <a:ext cx="4343400" cy="640080"/>
+            <a:off x="548640" y="5212080"/>
+            <a:ext cx="4480560" cy="1097280"/>
           </a:xfrm>
           <a:prstGeom prst="rect">
             <a:avLst/>
@@ -7563,7 +7096,51 @@
           <a:p>
             <a:pPr algn="l"/>
             <a:r>
-              <a:rPr sz="1300" b="1" i="0">
+              <a:rPr sz="1600" b="1" i="0">
+                <a:solidFill>
+                  <a:srgbClr val="1F2A44"/>
+                </a:solidFill>
+                <a:latin typeface="Calibri"/>
+              </a:rPr>
+              <a:t>REAL history: </a:t>
+            </a:r>
+            <a:r>
+              <a:rPr sz="1600" b="0" i="0">
+                <a:solidFill>
+                  <a:srgbClr val="1A1A1A"/>
+                </a:solidFill>
+                <a:latin typeface="Calibri"/>
+              </a:rPr>
+              <a:t>1,325 captured documents → 1,325 signals → 54 simulated stress runs</a:t>
+            </a:r>
+          </a:p>
+        </p:txBody>
+      </p:sp>
+      <p:sp>
+        <p:nvSpPr>
+          <p:cNvPr id="33" name="TextBox 32"/>
+          <p:cNvSpPr txBox="1"/>
+          <p:nvPr/>
+        </p:nvSpPr>
+        <p:spPr>
+          <a:xfrm>
+            <a:off x="548640" y="5897880"/>
+            <a:ext cx="4480560" cy="457200"/>
+          </a:xfrm>
+          <a:prstGeom prst="rect">
+            <a:avLst/>
+          </a:prstGeom>
+          <a:noFill/>
+        </p:spPr>
+        <p:txBody>
+          <a:bodyPr wrap="square" anchor="t" lIns="0" rIns="0" tIns="0" bIns="0">
+            <a:spAutoFit/>
+          </a:bodyPr>
+          <a:lstStyle/>
+          <a:p>
+            <a:pPr algn="l"/>
+            <a:r>
+              <a:rPr sz="1200" b="1" i="0">
                 <a:solidFill>
                   <a:srgbClr val="D03B3B"/>
                 </a:solidFill>
@@ -7576,7 +7153,7 @@
       </p:sp>
       <p:pic>
         <p:nvPicPr>
-          <p:cNvPr id="12" name="Picture 11" descr="stress_waterfall.png"/>
+          <p:cNvPr id="34" name="Picture 33" descr="stress_waterfall.png"/>
           <p:cNvPicPr>
             <a:picLocks noChangeAspect="1"/>
           </p:cNvPicPr>
@@ -7590,7 +7167,7 @@
         </p:blipFill>
         <p:spPr>
           <a:xfrm>
-            <a:off x="5120640" y="1417320"/>
+            <a:off x="5120640" y="3246120"/>
             <a:ext cx="6537960" cy="2451735"/>
           </a:xfrm>
           <a:prstGeom prst="rect">
@@ -7605,13 +7182,13 @@
       </p:pic>
       <p:sp>
         <p:nvSpPr>
-          <p:cNvPr id="13" name="TextBox 12"/>
+          <p:cNvPr id="35" name="TextBox 34"/>
           <p:cNvSpPr txBox="1"/>
           <p:nvPr/>
         </p:nvSpPr>
         <p:spPr>
           <a:xfrm>
-            <a:off x="5120640" y="3896487"/>
+            <a:off x="5120640" y="5725287"/>
             <a:ext cx="6537960" cy="274320"/>
           </a:xfrm>
           <a:prstGeom prst="rect">
@@ -7638,45 +7215,16 @@
           </a:p>
         </p:txBody>
       </p:sp>
-      <p:pic>
-        <p:nvPicPr>
-          <p:cNvPr id="14" name="Picture 13" descr="propagation_graph.png"/>
-          <p:cNvPicPr>
-            <a:picLocks noChangeAspect="1"/>
-          </p:cNvPicPr>
-          <p:nvPr/>
-        </p:nvPicPr>
-        <p:blipFill>
-          <a:blip r:embed="rId3"/>
-          <a:stretch>
-            <a:fillRect/>
-          </a:stretch>
-        </p:blipFill>
-        <p:spPr>
-          <a:xfrm>
-            <a:off x="5120640" y="4253103"/>
-            <a:ext cx="2769617" cy="2010537"/>
-          </a:xfrm>
-          <a:prstGeom prst="rect">
-            <a:avLst/>
-          </a:prstGeom>
-          <a:ln w="12700">
-            <a:solidFill>
-              <a:srgbClr val="C9D3DB"/>
-            </a:solidFill>
-          </a:ln>
-        </p:spPr>
-      </p:pic>
-      <p:sp>
-        <p:nvSpPr>
-          <p:cNvPr id="15" name="TextBox 14"/>
+      <p:sp>
+        <p:nvSpPr>
+          <p:cNvPr id="36" name="Footer"/>
           <p:cNvSpPr txBox="1"/>
           <p:nvPr/>
         </p:nvSpPr>
         <p:spPr>
           <a:xfrm>
-            <a:off x="8118857" y="4253103"/>
-            <a:ext cx="3539743" cy="2010537"/>
+            <a:off x="548640" y="6446520"/>
+            <a:ext cx="8686800" cy="274320"/>
           </a:xfrm>
           <a:prstGeom prst="rect">
             <a:avLst/>
@@ -7691,71 +7239,12 @@
           <a:p>
             <a:pPr algn="l"/>
             <a:r>
-              <a:rPr sz="1800" b="1" i="0">
-                <a:solidFill>
-                  <a:srgbClr val="1F2A44"/>
-                </a:solidFill>
-                <a:latin typeface="Calibri"/>
-              </a:rPr>
-              <a:t>Risk propagation</a:t>
-            </a:r>
-          </a:p>
-          <a:p>
-            <a:pPr algn="l"/>
-            <a:r>
-              <a:rPr sz="1500" b="0" i="0">
-                <a:solidFill>
-                  <a:srgbClr val="1A1A1A"/>
-                </a:solidFill>
-                <a:latin typeface="Calibri"/>
-              </a:rPr>
-              <a:t>Direct vs second-order exposure over 16 hand-curated links (supplier, parent, peer). Tata Motors: $41m held, $23m more via Ford and Tesla.</a:t>
-            </a:r>
-          </a:p>
-          <a:p>
-            <a:pPr algn="l"/>
-            <a:r>
-              <a:rPr sz="1300" b="0" i="0">
+              <a:rPr sz="1100" b="0" i="0">
                 <a:solidFill>
                   <a:srgbClr val="555B66"/>
                 </a:solidFill>
                 <a:latin typeface="Calibri"/>
               </a:rPr>
-              <a:t>Curated, not inferred; an attention measure, not a contagion model.</a:t>
-            </a:r>
-          </a:p>
-        </p:txBody>
-      </p:sp>
-      <p:sp>
-        <p:nvSpPr>
-          <p:cNvPr id="16" name="Footer"/>
-          <p:cNvSpPr txBox="1"/>
-          <p:nvPr/>
-        </p:nvSpPr>
-        <p:spPr>
-          <a:xfrm>
-            <a:off x="548640" y="6446520"/>
-            <a:ext cx="8686800" cy="274320"/>
-          </a:xfrm>
-          <a:prstGeom prst="rect">
-            <a:avLst/>
-          </a:prstGeom>
-          <a:noFill/>
-        </p:spPr>
-        <p:txBody>
-          <a:bodyPr wrap="square" anchor="t" lIns="0" rIns="0" tIns="0" bIns="0">
-            <a:spAutoFit/>
-          </a:bodyPr>
-          <a:lstStyle/>
-          <a:p>
-            <a:pPr algn="l"/>
-            <a:r>
-              <a:rPr sz="1100" b="0" i="0">
-                <a:solidFill>
-                  <a:srgbClr val="555B66"/>
-                </a:solidFill>
-                <a:latin typeface="Calibri"/>
-              </a:rPr>
               <a:t>Demo losses: simulated, illustrative model, synthetic portfolio · not investment advice</a:t>
             </a:r>
           </a:p>
@@ -7763,7 +7252,7 @@
       </p:sp>
       <p:sp>
         <p:nvSpPr>
-          <p:cNvPr id="17" name="SlideNo"/>
+          <p:cNvPr id="37" name="SlideNo"/>
           <p:cNvSpPr txBox="1"/>
           <p:nvPr/>
         </p:nvSpPr>
@@ -7844,7 +7333,7 @@
                 </a:solidFill>
                 <a:latin typeface="Calibri"/>
               </a:rPr>
-              <a:t>Results and dashboard</a:t>
+              <a:t>Domain impact and business value</a:t>
             </a:r>
           </a:p>
         </p:txBody>
@@ -7879,7 +7368,7 @@
                 </a:solidFill>
                 <a:latin typeface="Calibri"/>
               </a:rPr>
-              <a:t>Accuracy: preliminary (labels pending human review)</a:t>
+              <a:t>Decision support for credit and portfolio risk</a:t>
             </a:r>
           </a:p>
         </p:txBody>
@@ -7893,7 +7382,7 @@
         <p:spPr>
           <a:xfrm>
             <a:off x="548640" y="1417320"/>
-            <a:ext cx="2103120" cy="1325880"/>
+            <a:ext cx="3611880" cy="1188720"/>
           </a:xfrm>
           <a:prstGeom prst="roundRect">
             <a:avLst>
@@ -7938,8 +7427,8 @@
         </p:nvSpPr>
         <p:spPr>
           <a:xfrm>
-            <a:off x="713232" y="1490472"/>
-            <a:ext cx="1828800" cy="548640"/>
+            <a:off x="731520" y="1508760"/>
+            <a:ext cx="3291840" cy="411480"/>
           </a:xfrm>
           <a:prstGeom prst="rect">
             <a:avLst/>
@@ -7954,13 +7443,13 @@
           <a:p>
             <a:pPr algn="l"/>
             <a:r>
-              <a:rPr sz="2800" b="1" i="0">
+              <a:rPr sz="1900" b="1" i="0">
                 <a:solidFill>
                   <a:srgbClr val="1F2A44"/>
                 </a:solidFill>
                 <a:latin typeface="Calibri"/>
               </a:rPr>
-              <a:t>0.653</a:t>
+              <a:t>Credit analysts</a:t>
             </a:r>
           </a:p>
         </p:txBody>
@@ -7973,8 +7462,8 @@
         </p:nvSpPr>
         <p:spPr>
           <a:xfrm>
-            <a:off x="713232" y="2020824"/>
-            <a:ext cx="1828800" cy="365760"/>
+            <a:off x="731520" y="1920240"/>
+            <a:ext cx="3291840" cy="640080"/>
           </a:xfrm>
           <a:prstGeom prst="rect">
             <a:avLst/>
@@ -7989,62 +7478,27 @@
           <a:p>
             <a:pPr algn="l"/>
             <a:r>
-              <a:rPr sz="1800" b="1" i="0">
+              <a:rPr sz="1500" b="0" i="0">
                 <a:solidFill>
                   <a:srgbClr val="1A1A1A"/>
                 </a:solidFill>
                 <a:latin typeface="Calibri"/>
               </a:rPr>
-              <a:t>Sentiment</a:t>
-            </a:r>
-          </a:p>
-        </p:txBody>
-      </p:sp>
-      <p:sp>
-        <p:nvSpPr>
-          <p:cNvPr id="7" name="TextBox 6"/>
-          <p:cNvSpPr txBox="1"/>
-          <p:nvPr/>
-        </p:nvSpPr>
-        <p:spPr>
-          <a:xfrm>
-            <a:off x="713232" y="2331720"/>
-            <a:ext cx="1828800" cy="320040"/>
-          </a:xfrm>
-          <a:prstGeom prst="rect">
-            <a:avLst/>
-          </a:prstGeom>
-          <a:noFill/>
-        </p:spPr>
-        <p:txBody>
-          <a:bodyPr wrap="square" anchor="t" lIns="0" rIns="0" tIns="0" bIns="0">
-            <a:spAutoFit/>
-          </a:bodyPr>
-          <a:lstStyle/>
-          <a:p>
-            <a:pPr algn="l"/>
-            <a:r>
-              <a:rPr sz="1200" b="0" i="0">
-                <a:solidFill>
-                  <a:srgbClr val="555B66"/>
-                </a:solidFill>
-                <a:latin typeface="Calibri"/>
-              </a:rPr>
-              <a:t>accuracy · FinBERT · n = 147</a:t>
-            </a:r>
-          </a:p>
-        </p:txBody>
-      </p:sp>
-      <p:sp>
-        <p:nvSpPr>
-          <p:cNvPr id="8" name="Rounded Rectangle 7"/>
+              <a:t>see which held names need attention and the rule that fired</a:t>
+            </a:r>
+          </a:p>
+        </p:txBody>
+      </p:sp>
+      <p:sp>
+        <p:nvSpPr>
+          <p:cNvPr id="7" name="Rounded Rectangle 6"/>
           <p:cNvSpPr/>
           <p:nvPr/>
         </p:nvSpPr>
         <p:spPr>
           <a:xfrm>
-            <a:off x="2770632" y="1417320"/>
-            <a:ext cx="2103120" cy="1325880"/>
+            <a:off x="4270248" y="1417320"/>
+            <a:ext cx="3611880" cy="1188720"/>
           </a:xfrm>
           <a:prstGeom prst="roundRect">
             <a:avLst>
@@ -8083,14 +7537,14 @@
       </p:sp>
       <p:sp>
         <p:nvSpPr>
-          <p:cNvPr id="9" name="TextBox 8"/>
+          <p:cNvPr id="8" name="TextBox 7"/>
           <p:cNvSpPr txBox="1"/>
           <p:nvPr/>
         </p:nvSpPr>
         <p:spPr>
           <a:xfrm>
-            <a:off x="2935224" y="1490472"/>
-            <a:ext cx="1828800" cy="548640"/>
+            <a:off x="4453128" y="1508760"/>
+            <a:ext cx="3291840" cy="411480"/>
           </a:xfrm>
           <a:prstGeom prst="rect">
             <a:avLst/>
@@ -8105,27 +7559,27 @@
           <a:p>
             <a:pPr algn="l"/>
             <a:r>
-              <a:rPr sz="2800" b="1" i="0">
+              <a:rPr sz="1900" b="1" i="0">
                 <a:solidFill>
                   <a:srgbClr val="1F2A44"/>
                 </a:solidFill>
                 <a:latin typeface="Calibri"/>
               </a:rPr>
-              <a:t>0.81</a:t>
-            </a:r>
-          </a:p>
-        </p:txBody>
-      </p:sp>
-      <p:sp>
-        <p:nvSpPr>
-          <p:cNvPr id="10" name="TextBox 9"/>
+              <a:t>Risk managers</a:t>
+            </a:r>
+          </a:p>
+        </p:txBody>
+      </p:sp>
+      <p:sp>
+        <p:nvSpPr>
+          <p:cNvPr id="9" name="TextBox 8"/>
           <p:cNvSpPr txBox="1"/>
           <p:nvPr/>
         </p:nvSpPr>
         <p:spPr>
           <a:xfrm>
-            <a:off x="2935224" y="2020824"/>
-            <a:ext cx="1828800" cy="365760"/>
+            <a:off x="4453128" y="1920240"/>
+            <a:ext cx="3291840" cy="640080"/>
           </a:xfrm>
           <a:prstGeom prst="rect">
             <a:avLst/>
@@ -8140,62 +7594,27 @@
           <a:p>
             <a:pPr algn="l"/>
             <a:r>
-              <a:rPr sz="1800" b="1" i="0">
+              <a:rPr sz="1500" b="0" i="0">
                 <a:solidFill>
                   <a:srgbClr val="1A1A1A"/>
                 </a:solidFill>
                 <a:latin typeface="Calibri"/>
               </a:rPr>
-              <a:t>Events</a:t>
-            </a:r>
-          </a:p>
-        </p:txBody>
-      </p:sp>
-      <p:sp>
-        <p:nvSpPr>
-          <p:cNvPr id="11" name="TextBox 10"/>
-          <p:cNvSpPr txBox="1"/>
-          <p:nvPr/>
-        </p:nvSpPr>
-        <p:spPr>
-          <a:xfrm>
-            <a:off x="2935224" y="2331720"/>
-            <a:ext cx="1828800" cy="320040"/>
-          </a:xfrm>
-          <a:prstGeom prst="rect">
-            <a:avLst/>
-          </a:prstGeom>
-          <a:noFill/>
-        </p:spPr>
-        <p:txBody>
-          <a:bodyPr wrap="square" anchor="t" lIns="0" rIns="0" tIns="0" bIns="0">
-            <a:spAutoFit/>
-          </a:bodyPr>
-          <a:lstStyle/>
-          <a:p>
-            <a:pPr algn="l"/>
-            <a:r>
-              <a:rPr sz="1200" b="0" i="0">
-                <a:solidFill>
-                  <a:srgbClr val="555B66"/>
-                </a:solidFill>
-                <a:latin typeface="Calibri"/>
-              </a:rPr>
-              <a:t>accuracy · rules · n = 147</a:t>
-            </a:r>
-          </a:p>
-        </p:txBody>
-      </p:sp>
-      <p:sp>
-        <p:nvSpPr>
-          <p:cNvPr id="12" name="Rounded Rectangle 11"/>
+              <a:t>get an audited, simulated portfolio view when news breaks</a:t>
+            </a:r>
+          </a:p>
+        </p:txBody>
+      </p:sp>
+      <p:sp>
+        <p:nvSpPr>
+          <p:cNvPr id="10" name="Rounded Rectangle 9"/>
           <p:cNvSpPr/>
           <p:nvPr/>
         </p:nvSpPr>
         <p:spPr>
           <a:xfrm>
-            <a:off x="4992624" y="1417320"/>
-            <a:ext cx="2103120" cy="1325880"/>
+            <a:off x="7991856" y="1417320"/>
+            <a:ext cx="3611880" cy="1188720"/>
           </a:xfrm>
           <a:prstGeom prst="roundRect">
             <a:avLst>
@@ -8234,14 +7653,14 @@
       </p:sp>
       <p:sp>
         <p:nvSpPr>
-          <p:cNvPr id="13" name="TextBox 12"/>
+          <p:cNvPr id="11" name="TextBox 10"/>
           <p:cNvSpPr txBox="1"/>
           <p:nvPr/>
         </p:nvSpPr>
         <p:spPr>
           <a:xfrm>
-            <a:off x="5157216" y="1490472"/>
-            <a:ext cx="1828800" cy="548640"/>
+            <a:off x="8174736" y="1508760"/>
+            <a:ext cx="3291840" cy="411480"/>
           </a:xfrm>
           <a:prstGeom prst="rect">
             <a:avLst/>
@@ -8256,27 +7675,27 @@
           <a:p>
             <a:pPr algn="l"/>
             <a:r>
-              <a:rPr sz="2800" b="1" i="0">
+              <a:rPr sz="1900" b="1" i="0">
                 <a:solidFill>
                   <a:srgbClr val="1F2A44"/>
                 </a:solidFill>
                 <a:latin typeface="Calibri"/>
               </a:rPr>
-              <a:t>0.898</a:t>
-            </a:r>
-          </a:p>
-        </p:txBody>
-      </p:sp>
-      <p:sp>
-        <p:nvSpPr>
-          <p:cNvPr id="14" name="TextBox 13"/>
+              <a:t>Portfolio managers</a:t>
+            </a:r>
+          </a:p>
+        </p:txBody>
+      </p:sp>
+      <p:sp>
+        <p:nvSpPr>
+          <p:cNvPr id="12" name="TextBox 11"/>
           <p:cNvSpPr txBox="1"/>
           <p:nvPr/>
         </p:nvSpPr>
         <p:spPr>
           <a:xfrm>
-            <a:off x="5157216" y="2020824"/>
-            <a:ext cx="1828800" cy="365760"/>
+            <a:off x="8174736" y="1920240"/>
+            <a:ext cx="3291840" cy="640080"/>
           </a:xfrm>
           <a:prstGeom prst="rect">
             <a:avLst/>
@@ -8291,392 +7710,20 @@
           <a:p>
             <a:pPr algn="l"/>
             <a:r>
-              <a:rPr sz="1800" b="1" i="0">
+              <a:rPr sz="1500" b="0" i="0">
                 <a:solidFill>
                   <a:srgbClr val="1A1A1A"/>
                 </a:solidFill>
                 <a:latin typeface="Calibri"/>
               </a:rPr>
-              <a:t>Entities</a:t>
-            </a:r>
-          </a:p>
-        </p:txBody>
-      </p:sp>
-      <p:sp>
-        <p:nvSpPr>
-          <p:cNvPr id="15" name="TextBox 14"/>
-          <p:cNvSpPr txBox="1"/>
-          <p:nvPr/>
-        </p:nvSpPr>
-        <p:spPr>
-          <a:xfrm>
-            <a:off x="5157216" y="2331720"/>
-            <a:ext cx="1828800" cy="320040"/>
-          </a:xfrm>
-          <a:prstGeom prst="rect">
-            <a:avLst/>
-          </a:prstGeom>
-          <a:noFill/>
-        </p:spPr>
-        <p:txBody>
-          <a:bodyPr wrap="square" anchor="t" lIns="0" rIns="0" tIns="0" bIns="0">
-            <a:spAutoFit/>
-          </a:bodyPr>
-          <a:lstStyle/>
-          <a:p>
-            <a:pPr algn="l"/>
-            <a:r>
-              <a:rPr sz="1200" b="0" i="0">
-                <a:solidFill>
-                  <a:srgbClr val="555B66"/>
-                </a:solidFill>
-                <a:latin typeface="Calibri"/>
-              </a:rPr>
-              <a:t>accuracy · n = 147</a:t>
-            </a:r>
-          </a:p>
-        </p:txBody>
-      </p:sp>
-      <p:sp>
-        <p:nvSpPr>
-          <p:cNvPr id="16" name="Rounded Rectangle 15"/>
-          <p:cNvSpPr/>
-          <p:nvPr/>
-        </p:nvSpPr>
-        <p:spPr>
-          <a:xfrm>
-            <a:off x="7214616" y="1417320"/>
-            <a:ext cx="2103120" cy="1325880"/>
-          </a:xfrm>
-          <a:prstGeom prst="roundRect">
-            <a:avLst>
-              <a:gd name="adj" fmla="val 6000"/>
-            </a:avLst>
-          </a:prstGeom>
-          <a:solidFill>
-            <a:srgbClr val="EEF4F6"/>
-          </a:solidFill>
-          <a:ln>
-            <a:noFill/>
-          </a:ln>
-          <a:effectLst/>
-        </p:spPr>
-        <p:style>
-          <a:lnRef idx="1">
-            <a:schemeClr val="accent1"/>
-          </a:lnRef>
-          <a:fillRef idx="3">
-            <a:schemeClr val="accent1"/>
-          </a:fillRef>
-          <a:effectRef idx="2">
-            <a:schemeClr val="accent1"/>
-          </a:effectRef>
-          <a:fontRef idx="minor">
-            <a:schemeClr val="lt1"/>
-          </a:fontRef>
-        </p:style>
-        <p:txBody>
-          <a:bodyPr rtlCol="0" anchor="ctr"/>
-          <a:lstStyle/>
-          <a:p>
-            <a:pPr algn="ctr"/>
-          </a:p>
-        </p:txBody>
-      </p:sp>
-      <p:sp>
-        <p:nvSpPr>
-          <p:cNvPr id="17" name="TextBox 16"/>
-          <p:cNvSpPr txBox="1"/>
-          <p:nvPr/>
-        </p:nvSpPr>
-        <p:spPr>
-          <a:xfrm>
-            <a:off x="7379208" y="1490472"/>
-            <a:ext cx="1828800" cy="548640"/>
-          </a:xfrm>
-          <a:prstGeom prst="rect">
-            <a:avLst/>
-          </a:prstGeom>
-          <a:noFill/>
-        </p:spPr>
-        <p:txBody>
-          <a:bodyPr wrap="square" anchor="t" lIns="0" rIns="0" tIns="0" bIns="0">
-            <a:spAutoFit/>
-          </a:bodyPr>
-          <a:lstStyle/>
-          <a:p>
-            <a:pPr algn="l"/>
-            <a:r>
-              <a:rPr sz="2800" b="1" i="0">
-                <a:solidFill>
-                  <a:srgbClr val="1F2A44"/>
-                </a:solidFill>
-                <a:latin typeface="Calibri"/>
-              </a:rPr>
-              <a:t>204.7 ms</a:t>
-            </a:r>
-          </a:p>
-        </p:txBody>
-      </p:sp>
-      <p:sp>
-        <p:nvSpPr>
-          <p:cNvPr id="18" name="TextBox 17"/>
-          <p:cNvSpPr txBox="1"/>
-          <p:nvPr/>
-        </p:nvSpPr>
-        <p:spPr>
-          <a:xfrm>
-            <a:off x="7379208" y="2020824"/>
-            <a:ext cx="1828800" cy="365760"/>
-          </a:xfrm>
-          <a:prstGeom prst="rect">
-            <a:avLst/>
-          </a:prstGeom>
-          <a:noFill/>
-        </p:spPr>
-        <p:txBody>
-          <a:bodyPr wrap="square" anchor="t" lIns="0" rIns="0" tIns="0" bIns="0">
-            <a:spAutoFit/>
-          </a:bodyPr>
-          <a:lstStyle/>
-          <a:p>
-            <a:pPr algn="l"/>
-            <a:r>
-              <a:rPr sz="1800" b="1" i="0">
-                <a:solidFill>
-                  <a:srgbClr val="1A1A1A"/>
-                </a:solidFill>
-                <a:latin typeface="Calibri"/>
-              </a:rPr>
-              <a:t>Median latency</a:t>
-            </a:r>
-          </a:p>
-        </p:txBody>
-      </p:sp>
-      <p:sp>
-        <p:nvSpPr>
-          <p:cNvPr id="19" name="TextBox 18"/>
-          <p:cNvSpPr txBox="1"/>
-          <p:nvPr/>
-        </p:nvSpPr>
-        <p:spPr>
-          <a:xfrm>
-            <a:off x="7379208" y="2331720"/>
-            <a:ext cx="1828800" cy="320040"/>
-          </a:xfrm>
-          <a:prstGeom prst="rect">
-            <a:avLst/>
-          </a:prstGeom>
-          <a:noFill/>
-        </p:spPr>
-        <p:txBody>
-          <a:bodyPr wrap="square" anchor="t" lIns="0" rIns="0" tIns="0" bIns="0">
-            <a:spAutoFit/>
-          </a:bodyPr>
-          <a:lstStyle/>
-          <a:p>
-            <a:pPr algn="l"/>
-            <a:r>
-              <a:rPr sz="1200" b="0" i="0">
-                <a:solidFill>
-                  <a:srgbClr val="555B66"/>
-                </a:solidFill>
-                <a:latin typeface="Calibri"/>
-              </a:rPr>
-              <a:t>p95 1085.2 ms · n = 200</a:t>
-            </a:r>
-          </a:p>
-        </p:txBody>
-      </p:sp>
-      <p:sp>
-        <p:nvSpPr>
-          <p:cNvPr id="20" name="Rounded Rectangle 19"/>
-          <p:cNvSpPr/>
-          <p:nvPr/>
-        </p:nvSpPr>
-        <p:spPr>
-          <a:xfrm>
-            <a:off x="9436608" y="1417320"/>
-            <a:ext cx="2103120" cy="1325880"/>
-          </a:xfrm>
-          <a:prstGeom prst="roundRect">
-            <a:avLst>
-              <a:gd name="adj" fmla="val 6000"/>
-            </a:avLst>
-          </a:prstGeom>
-          <a:solidFill>
-            <a:srgbClr val="EEF4F6"/>
-          </a:solidFill>
-          <a:ln>
-            <a:noFill/>
-          </a:ln>
-          <a:effectLst/>
-        </p:spPr>
-        <p:style>
-          <a:lnRef idx="1">
-            <a:schemeClr val="accent1"/>
-          </a:lnRef>
-          <a:fillRef idx="3">
-            <a:schemeClr val="accent1"/>
-          </a:fillRef>
-          <a:effectRef idx="2">
-            <a:schemeClr val="accent1"/>
-          </a:effectRef>
-          <a:fontRef idx="minor">
-            <a:schemeClr val="lt1"/>
-          </a:fontRef>
-        </p:style>
-        <p:txBody>
-          <a:bodyPr rtlCol="0" anchor="ctr"/>
-          <a:lstStyle/>
-          <a:p>
-            <a:pPr algn="ctr"/>
-          </a:p>
-        </p:txBody>
-      </p:sp>
-      <p:sp>
-        <p:nvSpPr>
-          <p:cNvPr id="21" name="TextBox 20"/>
-          <p:cNvSpPr txBox="1"/>
-          <p:nvPr/>
-        </p:nvSpPr>
-        <p:spPr>
-          <a:xfrm>
-            <a:off x="9601200" y="1490472"/>
-            <a:ext cx="1828800" cy="548640"/>
-          </a:xfrm>
-          <a:prstGeom prst="rect">
-            <a:avLst/>
-          </a:prstGeom>
-          <a:noFill/>
-        </p:spPr>
-        <p:txBody>
-          <a:bodyPr wrap="square" anchor="t" lIns="0" rIns="0" tIns="0" bIns="0">
-            <a:spAutoFit/>
-          </a:bodyPr>
-          <a:lstStyle/>
-          <a:p>
-            <a:pPr algn="l"/>
-            <a:r>
-              <a:rPr sz="2800" b="1" i="0">
-                <a:solidFill>
-                  <a:srgbClr val="1F2A44"/>
-                </a:solidFill>
-                <a:latin typeface="Calibri"/>
-              </a:rPr>
-              <a:t>84 → 50</a:t>
-            </a:r>
-          </a:p>
-        </p:txBody>
-      </p:sp>
-      <p:sp>
-        <p:nvSpPr>
-          <p:cNvPr id="22" name="TextBox 21"/>
-          <p:cNvSpPr txBox="1"/>
-          <p:nvPr/>
-        </p:nvSpPr>
-        <p:spPr>
-          <a:xfrm>
-            <a:off x="9601200" y="2020824"/>
-            <a:ext cx="1828800" cy="365760"/>
-          </a:xfrm>
-          <a:prstGeom prst="rect">
-            <a:avLst/>
-          </a:prstGeom>
-          <a:noFill/>
-        </p:spPr>
-        <p:txBody>
-          <a:bodyPr wrap="square" anchor="t" lIns="0" rIns="0" tIns="0" bIns="0">
-            <a:spAutoFit/>
-          </a:bodyPr>
-          <a:lstStyle/>
-          <a:p>
-            <a:pPr algn="l"/>
-            <a:r>
-              <a:rPr sz="1800" b="1" i="0">
-                <a:solidFill>
-                  <a:srgbClr val="1A1A1A"/>
-                </a:solidFill>
-                <a:latin typeface="Calibri"/>
-              </a:rPr>
-              <a:t>Stress runs</a:t>
-            </a:r>
-          </a:p>
-        </p:txBody>
-      </p:sp>
-      <p:sp>
-        <p:nvSpPr>
-          <p:cNvPr id="23" name="TextBox 22"/>
-          <p:cNvSpPr txBox="1"/>
-          <p:nvPr/>
-        </p:nvSpPr>
-        <p:spPr>
-          <a:xfrm>
-            <a:off x="9601200" y="2331720"/>
-            <a:ext cx="1828800" cy="320040"/>
-          </a:xfrm>
-          <a:prstGeom prst="rect">
-            <a:avLst/>
-          </a:prstGeom>
-          <a:noFill/>
-        </p:spPr>
-        <p:txBody>
-          <a:bodyPr wrap="square" anchor="t" lIns="0" rIns="0" tIns="0" bIns="0">
-            <a:spAutoFit/>
-          </a:bodyPr>
-          <a:lstStyle/>
-          <a:p>
-            <a:pPr algn="l"/>
-            <a:r>
-              <a:rPr sz="1200" b="0" i="0">
-                <a:solidFill>
-                  <a:srgbClr val="555B66"/>
-                </a:solidFill>
-                <a:latin typeface="Calibri"/>
-              </a:rPr>
-              <a:t>replay after fixes · n = 911</a:t>
-            </a:r>
-          </a:p>
-        </p:txBody>
-      </p:sp>
-      <p:sp>
-        <p:nvSpPr>
-          <p:cNvPr id="24" name="TextBox 23"/>
-          <p:cNvSpPr txBox="1"/>
-          <p:nvPr/>
-        </p:nvSpPr>
-        <p:spPr>
-          <a:xfrm>
-            <a:off x="548640" y="2788920"/>
-            <a:ext cx="10972800" cy="274320"/>
-          </a:xfrm>
-          <a:prstGeom prst="rect">
-            <a:avLst/>
-          </a:prstGeom>
-          <a:noFill/>
-        </p:spPr>
-        <p:txBody>
-          <a:bodyPr wrap="square" anchor="t" lIns="0" rIns="0" tIns="0" bIns="0">
-            <a:spAutoFit/>
-          </a:bodyPr>
-          <a:lstStyle/>
-          <a:p>
-            <a:pPr algn="l"/>
-            <a:r>
-              <a:rPr sz="1200" b="0" i="1">
-                <a:solidFill>
-                  <a:srgbClr val="555B66"/>
-                </a:solidFill>
-                <a:latin typeface="Calibri"/>
-              </a:rPr>
-              <a:t>Preliminary (labels pending human review): labels drafted by an AI assistant, which also wrote the event rules. Treat as a smoke test, not a benchmark.</a:t>
+              <a:t>see linked exposure and test their own shocks instantly</a:t>
             </a:r>
           </a:p>
         </p:txBody>
       </p:sp>
       <p:pic>
         <p:nvPicPr>
-          <p:cNvPr id="25" name="Picture 24" descr="watchlist.png"/>
+          <p:cNvPr id="13" name="Picture 12" descr="watchlist.png"/>
           <p:cNvPicPr>
             <a:picLocks noChangeAspect="1"/>
           </p:cNvPicPr>
@@ -8690,8 +7737,8 @@
         </p:blipFill>
         <p:spPr>
           <a:xfrm>
-            <a:off x="548640" y="3200400"/>
-            <a:ext cx="4523232" cy="2423160"/>
+            <a:off x="548640" y="2834640"/>
+            <a:ext cx="3840480" cy="2057400"/>
           </a:xfrm>
           <a:prstGeom prst="rect">
             <a:avLst/>
@@ -8705,7 +7752,7 @@
       </p:pic>
       <p:pic>
         <p:nvPicPr>
-          <p:cNvPr id="26" name="Picture 25" descr="credit_brief.png"/>
+          <p:cNvPr id="14" name="Picture 13" descr="credit_brief.png"/>
           <p:cNvPicPr>
             <a:picLocks noChangeAspect="1"/>
           </p:cNvPicPr>
@@ -8719,8 +7766,8 @@
         </p:blipFill>
         <p:spPr>
           <a:xfrm>
-            <a:off x="5254752" y="3200400"/>
-            <a:ext cx="4621312" cy="2423160"/>
+            <a:off x="4526280" y="2834640"/>
+            <a:ext cx="3923756" cy="2057400"/>
           </a:xfrm>
           <a:prstGeom prst="rect">
             <a:avLst/>
@@ -8732,16 +7779,45 @@
           </a:ln>
         </p:spPr>
       </p:pic>
-      <p:sp>
-        <p:nvSpPr>
-          <p:cNvPr id="27" name="TextBox 26"/>
+      <p:pic>
+        <p:nvPicPr>
+          <p:cNvPr id="15" name="Picture 14" descr="propagation_graph.png"/>
+          <p:cNvPicPr>
+            <a:picLocks noChangeAspect="1"/>
+          </p:cNvPicPr>
+          <p:nvPr/>
+        </p:nvPicPr>
+        <p:blipFill>
+          <a:blip r:embed="rId4"/>
+          <a:stretch>
+            <a:fillRect/>
+          </a:stretch>
+        </p:blipFill>
+        <p:spPr>
+          <a:xfrm>
+            <a:off x="8587196" y="2834640"/>
+            <a:ext cx="3055859" cy="2218327"/>
+          </a:xfrm>
+          <a:prstGeom prst="rect">
+            <a:avLst/>
+          </a:prstGeom>
+          <a:ln w="12700">
+            <a:solidFill>
+              <a:srgbClr val="C9D3DB"/>
+            </a:solidFill>
+          </a:ln>
+        </p:spPr>
+      </p:pic>
+      <p:sp>
+        <p:nvSpPr>
+          <p:cNvPr id="16" name="TextBox 15"/>
           <p:cNvSpPr txBox="1"/>
           <p:nvPr/>
         </p:nvSpPr>
         <p:spPr>
           <a:xfrm>
-            <a:off x="548640" y="5660136"/>
-            <a:ext cx="4523232" cy="274320"/>
+            <a:off x="548640" y="4928616"/>
+            <a:ext cx="3840480" cy="274320"/>
           </a:xfrm>
           <a:prstGeom prst="rect">
             <a:avLst/>
@@ -8762,21 +7838,21 @@
                 </a:solidFill>
                 <a:latin typeface="Calibri"/>
               </a:rPr>
-              <a:t>Early-warning watchlist (real data + SYNTHETIC story)</a:t>
-            </a:r>
-          </a:p>
-        </p:txBody>
-      </p:sp>
-      <p:sp>
-        <p:nvSpPr>
-          <p:cNvPr id="28" name="TextBox 27"/>
+              <a:t>Early-warning watchlist on real news</a:t>
+            </a:r>
+          </a:p>
+        </p:txBody>
+      </p:sp>
+      <p:sp>
+        <p:nvSpPr>
+          <p:cNvPr id="17" name="TextBox 16"/>
           <p:cNvSpPr txBox="1"/>
           <p:nvPr/>
         </p:nvSpPr>
         <p:spPr>
           <a:xfrm>
-            <a:off x="5254752" y="5660136"/>
-            <a:ext cx="4621312" cy="274320"/>
+            <a:off x="4526280" y="4928616"/>
+            <a:ext cx="3923756" cy="274320"/>
           </a:xfrm>
           <a:prstGeom prst="rect">
             <a:avLst/>
@@ -8804,14 +7880,14 @@
       </p:sp>
       <p:sp>
         <p:nvSpPr>
-          <p:cNvPr id="29" name="TextBox 28"/>
+          <p:cNvPr id="18" name="TextBox 17"/>
           <p:cNvSpPr txBox="1"/>
           <p:nvPr/>
         </p:nvSpPr>
         <p:spPr>
           <a:xfrm>
-            <a:off x="10104664" y="3200400"/>
-            <a:ext cx="1538391" cy="365760"/>
+            <a:off x="8587196" y="5089543"/>
+            <a:ext cx="3055859" cy="274320"/>
           </a:xfrm>
           <a:prstGeom prst="rect">
             <a:avLst/>
@@ -8826,106 +7902,20 @@
           <a:p>
             <a:pPr algn="l"/>
             <a:r>
-              <a:rPr sz="1800" b="1" i="0">
-                <a:solidFill>
-                  <a:srgbClr val="1F2A44"/>
-                </a:solidFill>
-                <a:latin typeface="Calibri"/>
-              </a:rPr>
-              <a:t>Business impact</a:t>
-            </a:r>
-          </a:p>
-        </p:txBody>
-      </p:sp>
-      <p:sp>
-        <p:nvSpPr>
-          <p:cNvPr id="30" name="TextBox 29"/>
-          <p:cNvSpPr txBox="1"/>
-          <p:nvPr/>
-        </p:nvSpPr>
-        <p:spPr>
-          <a:xfrm>
-            <a:off x="10104664" y="3611880"/>
-            <a:ext cx="1538391" cy="2011680"/>
-          </a:xfrm>
-          <a:prstGeom prst="rect">
-            <a:avLst/>
-          </a:prstGeom>
-          <a:noFill/>
-        </p:spPr>
-        <p:txBody>
-          <a:bodyPr wrap="square" lIns="0" rIns="0" tIns="0" bIns="0">
-            <a:spAutoFit/>
-          </a:bodyPr>
-          <a:lstStyle/>
-          <a:p>
-            <a:pPr marL="274320" indent="-274320">
-              <a:spcAft>
-                <a:spcPts val="800"/>
-              </a:spcAft>
-              <a:buClr>
-                <a:srgbClr val="0E8A84"/>
-              </a:buClr>
-              <a:buFont typeface="Arial"/>
-              <a:buChar char="•"/>
-            </a:pPr>
-            <a:r>
-              <a:rPr sz="1400" b="0" i="0">
-                <a:solidFill>
-                  <a:srgbClr val="1A1A1A"/>
-                </a:solidFill>
-                <a:latin typeface="Calibri"/>
-              </a:rPr>
-              <a:t>Earlier warning on held names</a:t>
-            </a:r>
-          </a:p>
-          <a:p>
-            <a:pPr marL="274320" indent="-274320">
-              <a:spcAft>
-                <a:spcPts val="800"/>
-              </a:spcAft>
-              <a:buClr>
-                <a:srgbClr val="0E8A84"/>
-              </a:buClr>
-              <a:buFont typeface="Arial"/>
-              <a:buChar char="•"/>
-            </a:pPr>
-            <a:r>
-              <a:rPr sz="1400" b="0" i="0">
-                <a:solidFill>
-                  <a:srgbClr val="1A1A1A"/>
-                </a:solidFill>
-                <a:latin typeface="Calibri"/>
-              </a:rPr>
-              <a:t>Triage by materiality, rule shown</a:t>
-            </a:r>
-          </a:p>
-          <a:p>
-            <a:pPr marL="274320" indent="-274320">
-              <a:spcAft>
-                <a:spcPts val="800"/>
-              </a:spcAft>
-              <a:buClr>
-                <a:srgbClr val="0E8A84"/>
-              </a:buClr>
-              <a:buFont typeface="Arial"/>
-              <a:buChar char="•"/>
-            </a:pPr>
-            <a:r>
-              <a:rPr sz="1400" b="0" i="0">
-                <a:solidFill>
-                  <a:srgbClr val="1A1A1A"/>
-                </a:solidFill>
-                <a:latin typeface="Calibri"/>
-              </a:rPr>
-              <a:t>Audited portfolio view in seconds</a:t>
-            </a:r>
-          </a:p>
-        </p:txBody>
-      </p:sp>
-      <p:sp>
-        <p:nvSpPr>
-          <p:cNvPr id="31" name="Footer"/>
+              <a:rPr sz="1200" b="0" i="1">
+                <a:solidFill>
+                  <a:srgbClr val="555B66"/>
+                </a:solidFill>
+                <a:latin typeface="Calibri"/>
+              </a:rPr>
+              <a:t>Propagation over curated links</a:t>
+            </a:r>
+          </a:p>
+        </p:txBody>
+      </p:sp>
+      <p:sp>
+        <p:nvSpPr>
+          <p:cNvPr id="19" name="Footer"/>
           <p:cNvSpPr txBox="1"/>
           <p:nvPr/>
         </p:nvSpPr>
@@ -8960,7 +7950,7 @@
       </p:sp>
       <p:sp>
         <p:nvSpPr>
-          <p:cNvPr id="32" name="SlideNo"/>
+          <p:cNvPr id="20" name="SlideNo"/>
           <p:cNvSpPr txBox="1"/>
           <p:nvPr/>
         </p:nvSpPr>
@@ -9041,7 +8031,7 @@
                 </a:solidFill>
                 <a:latin typeface="Calibri"/>
               </a:rPr>
-              <a:t>What is new, what is not, what is next</a:t>
+              <a:t>Limitations and future work</a:t>
             </a:r>
           </a:p>
         </p:txBody>
@@ -9055,7 +8045,7 @@
         <p:spPr>
           <a:xfrm>
             <a:off x="548640" y="1188720"/>
-            <a:ext cx="3566160" cy="3520440"/>
+            <a:ext cx="3566160" cy="3611880"/>
           </a:xfrm>
           <a:prstGeom prst="roundRect">
             <a:avLst>
@@ -9118,11 +8108,11 @@
             <a:r>
               <a:rPr sz="2200" b="1" i="0">
                 <a:solidFill>
-                  <a:srgbClr val="0E8A84"/>
-                </a:solidFill>
-                <a:latin typeface="Calibri"/>
-              </a:rPr>
-              <a:t>Innovation</a:t>
+                  <a:srgbClr val="1F2A44"/>
+                </a:solidFill>
+                <a:latin typeface="Calibri"/>
+              </a:rPr>
+              <a:t>Limitations</a:t>
             </a:r>
           </a:p>
         </p:txBody>
@@ -9136,7 +8126,7 @@
         <p:spPr>
           <a:xfrm>
             <a:off x="822960" y="1920240"/>
-            <a:ext cx="3063240" cy="2651760"/>
+            <a:ext cx="3063240" cy="2743200"/>
           </a:xfrm>
           <a:prstGeom prst="rect">
             <a:avLst/>
@@ -9160,13 +8150,13 @@
               <a:buChar char="•"/>
             </a:pPr>
             <a:r>
-              <a:rPr sz="1800" b="0" i="0">
+              <a:rPr sz="1700" b="0" i="0">
                 <a:solidFill>
                   <a:srgbClr val="1A1A1A"/>
                 </a:solidFill>
                 <a:latin typeface="Calibri"/>
               </a:rPr>
-              <a:t>Provenance on every record</a:t>
+              <a:t>Impact weights are uncalibrated priors</a:t>
             </a:r>
           </a:p>
           <a:p>
@@ -9181,13 +8171,13 @@
               <a:buChar char="•"/>
             </a:pPr>
             <a:r>
-              <a:rPr sz="1800" b="0" i="0">
+              <a:rPr sz="1700" b="0" i="0">
                 <a:solidFill>
                   <a:srgbClr val="1A1A1A"/>
                 </a:solidFill>
                 <a:latin typeface="Calibri"/>
               </a:rPr>
-              <a:t>One pipeline for live, replay and demo</a:t>
+              <a:t>Keyword rules still misfire on real data</a:t>
             </a:r>
           </a:p>
           <a:p>
@@ -9202,13 +8192,13 @@
               <a:buChar char="•"/>
             </a:pPr>
             <a:r>
-              <a:rPr sz="1800" b="0" i="0">
+              <a:rPr sz="1700" b="0" i="0">
                 <a:solidFill>
                   <a:srgbClr val="1A1A1A"/>
                 </a:solidFill>
                 <a:latin typeface="Calibri"/>
               </a:rPr>
-              <a:t>Corroboration escalates severity</a:t>
+              <a:t>Headline-only news text</a:t>
             </a:r>
           </a:p>
           <a:p>
@@ -9223,13 +8213,34 @@
               <a:buChar char="•"/>
             </a:pPr>
             <a:r>
-              <a:rPr sz="1800" b="0" i="0">
+              <a:rPr sz="1700" b="0" i="0">
                 <a:solidFill>
                   <a:srgbClr val="1A1A1A"/>
                 </a:solidFill>
                 <a:latin typeface="Calibri"/>
               </a:rPr>
-              <a:t>Trigger audit trail with the cause</a:t>
+              <a:t>Small AI-labelled evaluation set</a:t>
+            </a:r>
+          </a:p>
+          <a:p>
+            <a:pPr marL="274320" indent="-274320">
+              <a:spcAft>
+                <a:spcPts val="600"/>
+              </a:spcAft>
+              <a:buClr>
+                <a:srgbClr val="0E8A84"/>
+              </a:buClr>
+              <a:buFont typeface="Arial"/>
+              <a:buChar char="•"/>
+            </a:pPr>
+            <a:r>
+              <a:rPr sz="1700" b="0" i="0">
+                <a:solidFill>
+                  <a:srgbClr val="1A1A1A"/>
+                </a:solidFill>
+                <a:latin typeface="Calibri"/>
+              </a:rPr>
+              <a:t>Illustrative stress model, synthetic portfolio</a:t>
             </a:r>
           </a:p>
         </p:txBody>
@@ -9243,7 +8254,7 @@
         <p:spPr>
           <a:xfrm>
             <a:off x="4270248" y="1188720"/>
-            <a:ext cx="3566160" cy="3520440"/>
+            <a:ext cx="3566160" cy="3611880"/>
           </a:xfrm>
           <a:prstGeom prst="roundRect">
             <a:avLst>
@@ -9306,11 +8317,11 @@
             <a:r>
               <a:rPr sz="2200" b="1" i="0">
                 <a:solidFill>
-                  <a:srgbClr val="1F2A44"/>
-                </a:solidFill>
-                <a:latin typeface="Calibri"/>
-              </a:rPr>
-              <a:t>Limitations</a:t>
+                  <a:srgbClr val="0E8A84"/>
+                </a:solidFill>
+                <a:latin typeface="Calibri"/>
+              </a:rPr>
+              <a:t>Future work</a:t>
             </a:r>
           </a:p>
         </p:txBody>
@@ -9324,7 +8335,7 @@
         <p:spPr>
           <a:xfrm>
             <a:off x="4544568" y="1920240"/>
-            <a:ext cx="3063240" cy="2651760"/>
+            <a:ext cx="3063240" cy="2743200"/>
           </a:xfrm>
           <a:prstGeom prst="rect">
             <a:avLst/>
@@ -9348,13 +8359,13 @@
               <a:buChar char="•"/>
             </a:pPr>
             <a:r>
-              <a:rPr sz="1800" b="0" i="0">
+              <a:rPr sz="1700" b="0" i="0">
                 <a:solidFill>
                   <a:srgbClr val="1A1A1A"/>
                 </a:solidFill>
                 <a:latin typeface="Calibri"/>
               </a:rPr>
-              <a:t>Weights are uncalibrated priors</a:t>
+              <a:t>Calibrate impact on market moves</a:t>
             </a:r>
           </a:p>
           <a:p>
@@ -9369,13 +8380,13 @@
               <a:buChar char="•"/>
             </a:pPr>
             <a:r>
-              <a:rPr sz="1800" b="0" i="0">
+              <a:rPr sz="1700" b="0" i="0">
                 <a:solidFill>
                   <a:srgbClr val="1A1A1A"/>
                 </a:solidFill>
                 <a:latin typeface="Calibri"/>
               </a:rPr>
-              <a:t>Keyword rules still misfire</a:t>
+              <a:t>Licensed full-text news</a:t>
             </a:r>
           </a:p>
           <a:p>
@@ -9390,13 +8401,13 @@
               <a:buChar char="•"/>
             </a:pPr>
             <a:r>
-              <a:rPr sz="1800" b="0" i="0">
+              <a:rPr sz="1700" b="0" i="0">
                 <a:solidFill>
                   <a:srgbClr val="1A1A1A"/>
                 </a:solidFill>
                 <a:latin typeface="Calibri"/>
               </a:rPr>
-              <a:t>Headline-only news text</a:t>
+              <a:t>Fine-tuned models on public labels (notebook ready)</a:t>
             </a:r>
           </a:p>
           <a:p>
@@ -9411,13 +8422,13 @@
               <a:buChar char="•"/>
             </a:pPr>
             <a:r>
-              <a:rPr sz="1800" b="0" i="0">
+              <a:rPr sz="1700" b="0" i="0">
                 <a:solidFill>
                   <a:srgbClr val="1A1A1A"/>
                 </a:solidFill>
                 <a:latin typeface="Calibri"/>
               </a:rPr>
-              <a:t>Small AI-labelled eval set</a:t>
+              <a:t>Kafka streaming</a:t>
             </a:r>
           </a:p>
           <a:p>
@@ -9432,13 +8443,13 @@
               <a:buChar char="•"/>
             </a:pPr>
             <a:r>
-              <a:rPr sz="1800" b="0" i="0">
+              <a:rPr sz="1700" b="0" i="0">
                 <a:solidFill>
                   <a:srgbClr val="1A1A1A"/>
                 </a:solidFill>
                 <a:latin typeface="Calibri"/>
               </a:rPr>
-              <a:t>Illustrative stress model</a:t>
+              <a:t>Backtesting and full revaluation</a:t>
             </a:r>
           </a:p>
         </p:txBody>
@@ -9452,7 +8463,7 @@
         <p:spPr>
           <a:xfrm>
             <a:off x="7991856" y="1188720"/>
-            <a:ext cx="3566160" cy="3520440"/>
+            <a:ext cx="3566160" cy="3611880"/>
           </a:xfrm>
           <a:prstGeom prst="roundRect">
             <a:avLst>
@@ -9519,7 +8530,7 @@
                 </a:solidFill>
                 <a:latin typeface="Calibri"/>
               </a:rPr>
-              <a:t>Next</a:t>
+              <a:t>What already works</a:t>
             </a:r>
           </a:p>
         </p:txBody>
@@ -9533,7 +8544,7 @@
         <p:spPr>
           <a:xfrm>
             <a:off x="8266176" y="1920240"/>
-            <a:ext cx="3063240" cy="2651760"/>
+            <a:ext cx="3063240" cy="2743200"/>
           </a:xfrm>
           <a:prstGeom prst="rect">
             <a:avLst/>
@@ -9557,13 +8568,13 @@
               <a:buChar char="•"/>
             </a:pPr>
             <a:r>
-              <a:rPr sz="1800" b="0" i="0">
+              <a:rPr sz="1700" b="0" i="0">
                 <a:solidFill>
                   <a:srgbClr val="1A1A1A"/>
                 </a:solidFill>
                 <a:latin typeface="Calibri"/>
               </a:rPr>
-              <a:t>Kafka streaming</a:t>
+              <a:t>Provenance on every record</a:t>
             </a:r>
           </a:p>
           <a:p>
@@ -9578,13 +8589,13 @@
               <a:buChar char="•"/>
             </a:pPr>
             <a:r>
-              <a:rPr sz="1800" b="0" i="0">
+              <a:rPr sz="1700" b="0" i="0">
                 <a:solidFill>
                   <a:srgbClr val="1A1A1A"/>
                 </a:solidFill>
                 <a:latin typeface="Calibri"/>
               </a:rPr>
-              <a:t>Calibrate impact on market moves</a:t>
+              <a:t>One pipeline for every input</a:t>
             </a:r>
           </a:p>
           <a:p>
@@ -9599,13 +8610,13 @@
               <a:buChar char="•"/>
             </a:pPr>
             <a:r>
-              <a:rPr sz="1800" b="0" i="0">
+              <a:rPr sz="1700" b="0" i="0">
                 <a:solidFill>
                   <a:srgbClr val="1A1A1A"/>
                 </a:solidFill>
                 <a:latin typeface="Calibri"/>
               </a:rPr>
-              <a:t>Licensed full-text news</a:t>
+              <a:t>Real-data time machine</a:t>
             </a:r>
           </a:p>
           <a:p>
@@ -9620,13 +8631,34 @@
               <a:buChar char="•"/>
             </a:pPr>
             <a:r>
-              <a:rPr sz="1800" b="0" i="0">
+              <a:rPr sz="1700" b="0" i="0">
                 <a:solidFill>
                   <a:srgbClr val="1A1A1A"/>
                 </a:solidFill>
                 <a:latin typeface="Calibri"/>
               </a:rPr>
-              <a:t>Backtesting, full revaluation</a:t>
+              <a:t>Trigger audit trail</a:t>
+            </a:r>
+          </a:p>
+          <a:p>
+            <a:pPr marL="274320" indent="-274320">
+              <a:spcAft>
+                <a:spcPts val="600"/>
+              </a:spcAft>
+              <a:buClr>
+                <a:srgbClr val="0E8A84"/>
+              </a:buClr>
+              <a:buFont typeface="Arial"/>
+              <a:buChar char="•"/>
+            </a:pPr>
+            <a:r>
+              <a:rPr sz="1700" b="0" i="0">
+                <a:solidFill>
+                  <a:srgbClr val="1A1A1A"/>
+                </a:solidFill>
+                <a:latin typeface="Calibri"/>
+              </a:rPr>
+              <a:t>Offline demo on a laptop</a:t>
             </a:r>
           </a:p>
         </p:txBody>
@@ -9639,8 +8671,8 @@
         </p:nvSpPr>
         <p:spPr>
           <a:xfrm>
-            <a:off x="548640" y="4983480"/>
-            <a:ext cx="11094415" cy="1097280"/>
+            <a:off x="548640" y="5029200"/>
+            <a:ext cx="11094415" cy="1051560"/>
           </a:xfrm>
           <a:prstGeom prst="roundRect">
             <a:avLst>
@@ -9685,8 +8717,8 @@
         </p:nvSpPr>
         <p:spPr>
           <a:xfrm>
-            <a:off x="914400" y="4983480"/>
-            <a:ext cx="10362895" cy="1097280"/>
+            <a:off x="914400" y="5029200"/>
+            <a:ext cx="10362895" cy="1051560"/>
           </a:xfrm>
           <a:prstGeom prst="rect">
             <a:avLst/>

--- a/docs/presentation/Risk_Signal_Engine.pptx
+++ b/docs/presentation/Risk_Signal_Engine.pptx
@@ -508,7 +508,7 @@
           <a:lstStyle/>
           <a:p>
             <a:r>
-              <a:t>Every number in this deck is produced by a script in the repository or labelled as simulated or synthetic. One sentence: we turn news and social text into explainable risk signals and stress the portfolio when something material happens.</a:t>
+              <a:t>(30 s) Hello, I am Apeksha Jain from ABV-IIITM Gwalior. This is Risk Signal Engine, my individual submission for Module B, strategic portfolio stress testing. In one sentence: it reads news and social posts, turns each item into an explainable risk signal, and stress-tests the portfolio the moment something material happens. Every number I show comes from a script in the repository, or is labelled simulated.</a:t>
             </a:r>
           </a:p>
         </p:txBody>
@@ -578,7 +578,7 @@
           <a:lstStyle/>
           <a:p>
             <a:r>
-              <a:t>Frame it as decision support for risk managers, credit analysts and portfolio managers. We make no ROI or time-saved claim; the only speed number is the measured per-document latency.</a:t>
+              <a:t>(40 s) Credit risk shows up in text before it shows up in prices or ratings data: downgrades, regulatory probes, sanctions, rate surprises. Today an analyst reads the headline, decides whether it matters, and someone runs a stress test later, by hand. Nothing links the headline to the book's exposure in the moment. My approach: an NLP engine scores every item for sentiment, event type and a 1-to-10 impact, and an event-driven stress engine reprices the portfolio when a rule fires. The only speed claim I make is the measured one: a median of 204.7 milliseconds per document on a CPU laptop.</a:t>
             </a:r>
           </a:p>
         </p:txBody>
@@ -648,7 +648,7 @@
           <a:lstStyle/>
           <a:p>
             <a:r>
-              <a:t>Sources are only claimed after our probe script passed. Adapters never crash the app. The stress engine is a subscriber on the event bus. Everything runs offline after a one-time model download.</a:t>
+              <a:t>(45 s) Left to right. Real sources, Google News, Reddit and Mastodon, are used only because they passed our probe script; the others are skipped cleanly, and no adapter can crash the app. Everything, live, replayed, scripted or sent to the API, goes through one pipeline: cleaning and deduplication, entity resolution, FinBERT sentiment, event rules with evidence, and the impact score. Signals are stored and published on an event bus; the stress engine is a subscriber, and the FastAPI service and the Streamlit dashboard sit on top. Every record carries a provenance badge, and after a one-time model download the whole system runs offline.</a:t>
             </a:r>
           </a:p>
         </p:txBody>
@@ -718,7 +718,7 @@
           <a:lstStyle/>
           <a:p>
             <a:r>
-              <a:t>Walk through the formula with the example: event severity and strong negative sentiment dominate, the signal is market-wide, and two sources corroborate it. Weights are published at /methodology.</a:t>
+              <a:t>(45 s) Three highlights. First, explainability: every score is decomposed. The impact formula is on the slide with the published weights: event severity, sentiment magnitude, exposure and source credibility, scaled by confidence. They are expert priors, not calibrated, and the dashboard says so. Second, the stress engine: news-only triggers, systemic or issuer-specific, with cooldown and corroboration, and simple pricers for bonds, loans, swaps, CDS, FX and equity. Third, credit views: an early-warning watchlist, propagation over curated links, a one-click credit brief, and a time machine over the real captured history.</a:t>
             </a:r>
           </a:p>
         </p:txBody>
@@ -788,7 +788,7 @@
           <a:lstStyle/>
           <a:p>
             <a:r>
-              <a:t>State the caveat plainly: the evaluation labels were drafted by an AI assistant and are pending human review, and the same assistant wrote the rules, so those numbers are a smoke test. Replaying 911 real captured documents, our false-trigger fixes cut simulated stress runs from 84 to 50. Read the disclaimer aloud.</a:t>
+              <a:t>(60 s) Results, with n for every number. On 147 headlines and posts, FinBERT sentiment accuracy is 0.653, event classification 0.81, entity resolution 0.898. These labels were drafted by an AI assistant and are pending human review, so treat them as a smoke test. Median latency is 204.7 ms per document, p95 1085.2 ms, over 200 documents. Replaying 911 real captured documents, my false-trigger fixes cut simulated stress runs from 84 to 50. In the scripted demo, a Tata Motors downgrade gives 0.41% GREEN thanks to a CDS hedge; an invasion headline gives 1.32% AMBER; a second source corroborates it: 2.45% RED. These losses are simulated on a synthetic portfolio with an illustrative model, not investment advice.</a:t>
             </a:r>
           </a:p>
         </p:txBody>
@@ -858,7 +858,7 @@
           <a:lstStyle/>
           <a:p>
             <a:r>
-              <a:t>Business value without invented numbers: earlier attention on held names, triage by materiality with the reason shown, and an immediate, audited portfolio view. Linked exposure is an attention measure, not a contagion model.</a:t>
+              <a:t>(40 s) Who uses it. Credit analysts see which held names need attention and exactly which rule fired. Risk managers get an audited, simulated portfolio view when news breaks, instead of waiting for the next scheduled run. Portfolio managers see linked exposure and test their own shocks with the what-if sliders. I make no ROI or time-saved claim. The value is earlier attention, triage by materiality with the reason shown, and an audit trail from every stress run back to the headline that triggered it. Linked exposure is an attention measure, not a contagion model.</a:t>
             </a:r>
           </a:p>
         </p:txBody>
@@ -928,7 +928,7 @@
           <a:lstStyle/>
           <a:p>
             <a:r>
-              <a:t>Close on the takeaway. If asked about weaknesses, the limitations column is the honest list; docs/judge_qa.md has the answers.</a:t>
+              <a:t>(40 s) Honest limitations: the impact weights are uncalibrated priors, keyword rules still misfire on some real headlines, news is headline-only, the evaluation set is small and AI-labelled, and the stress model is illustrative on a synthetic portfolio. Next: calibrate impact on market moves, licensed full-text news, fine-tuned models from the ready training notebook, streaming and backtesting. What already works: provenance on every record, one pipeline for every input, and an offline demo on a laptop. Thank you, I am happy to take questions.</a:t>
             </a:r>
           </a:p>
         </p:txBody>
@@ -4074,13 +4074,13 @@
           <a:p>
             <a:pPr algn="l"/>
             <a:r>
-              <a:rPr sz="1700" b="0" i="0">
+              <a:rPr sz="1800" b="0" i="0">
                 <a:solidFill>
                   <a:srgbClr val="FFFFFF"/>
                 </a:solidFill>
                 <a:latin typeface="Calibri"/>
               </a:rPr>
-              <a:t>S&amp;P Global × CRISIL · Code to Connect Hackathon 2026 · Module B: Strategic Portfolio Stress Testing</a:t>
+              <a:t>S&amp;P Global × CRISIL · Code to Connect 2026 · Module B: Strategic Portfolio Stress Testing</a:t>
             </a:r>
           </a:p>
         </p:txBody>
@@ -4319,13 +4319,13 @@
           <a:p>
             <a:pPr algn="l"/>
             <a:r>
-              <a:rPr sz="1500" b="0" i="0">
+              <a:rPr sz="1800" b="0" i="0">
                 <a:solidFill>
                   <a:srgbClr val="555B66"/>
                 </a:solidFill>
                 <a:latin typeface="Calibri"/>
               </a:rPr>
-              <a:t>Individual submission · decision-support prototype, not investment advice</a:t>
+              <a:t>Apeksha Jain · ABV-IIITM Gwalior · individual submission · decision support, not investment advice</a:t>
             </a:r>
           </a:p>
         </p:txBody>
@@ -4613,7 +4613,7 @@
           <a:p>
             <a:pPr algn="ctr"/>
             <a:r>
-              <a:rPr sz="1700" b="1" i="0">
+              <a:rPr sz="1800" b="1" i="0">
                 <a:solidFill>
                   <a:srgbClr val="1F2A44"/>
                 </a:solidFill>
@@ -4704,7 +4704,7 @@
           <a:p>
             <a:pPr algn="ctr"/>
             <a:r>
-              <a:rPr sz="1700" b="1" i="0">
+              <a:rPr sz="1800" b="1" i="0">
                 <a:solidFill>
                   <a:srgbClr val="1F2A44"/>
                 </a:solidFill>
@@ -4795,7 +4795,7 @@
           <a:p>
             <a:pPr algn="ctr"/>
             <a:r>
-              <a:rPr sz="1700" b="1" i="0">
+              <a:rPr sz="1800" b="1" i="0">
                 <a:solidFill>
                   <a:srgbClr val="1F2A44"/>
                 </a:solidFill>
@@ -4885,7 +4885,7 @@
           <a:p>
             <a:pPr algn="ctr"/>
             <a:r>
-              <a:rPr sz="1700" b="1" i="0">
+              <a:rPr sz="1800" b="1" i="0">
                 <a:solidFill>
                   <a:srgbClr val="FFFFFF"/>
                 </a:solidFill>
@@ -4976,7 +4976,7 @@
           <a:p>
             <a:pPr algn="ctr"/>
             <a:r>
-              <a:rPr sz="1700" b="1" i="0">
+              <a:rPr sz="1800" b="1" i="0">
                 <a:solidFill>
                   <a:srgbClr val="FFFFFF"/>
                 </a:solidFill>
@@ -5067,7 +5067,7 @@
           <a:p>
             <a:pPr algn="ctr"/>
             <a:r>
-              <a:rPr sz="1700" b="1" i="0">
+              <a:rPr sz="1800" b="1" i="0">
                 <a:solidFill>
                   <a:srgbClr val="FFFFFF"/>
                 </a:solidFill>
@@ -5087,7 +5087,7 @@
         <p:spPr>
           <a:xfrm>
             <a:off x="6126480" y="5440680"/>
-            <a:ext cx="5486400" cy="274320"/>
+            <a:ext cx="5486400" cy="320040"/>
           </a:xfrm>
           <a:prstGeom prst="rect">
             <a:avLst/>
@@ -5102,13 +5102,13 @@
           <a:p>
             <a:pPr algn="l"/>
             <a:r>
-              <a:rPr sz="1200" b="0" i="1">
+              <a:rPr sz="1800" b="0" i="1">
                 <a:solidFill>
                   <a:srgbClr val="555B66"/>
                 </a:solidFill>
                 <a:latin typeface="Calibri"/>
               </a:rPr>
-              <a:t>Measured pipeline latency: median 204.7 ms per document (n = 200, CPU laptop)</a:t>
+              <a:t>Measured: median 204.7 ms per document (n = 200)</a:t>
             </a:r>
           </a:p>
         </p:txBody>
@@ -5137,13 +5137,13 @@
           <a:p>
             <a:pPr algn="l"/>
             <a:r>
-              <a:rPr sz="1100" b="0" i="0">
+              <a:rPr sz="1800" b="0" i="0">
                 <a:solidFill>
                   <a:srgbClr val="555B66"/>
                 </a:solidFill>
                 <a:latin typeface="Calibri"/>
               </a:rPr>
-              <a:t>Risk Signal Engine · Code to Connect 2026 · decision-support prototype, not investment advice</a:t>
+              <a:t>Risk Signal Engine · decision support, not investment advice</a:t>
             </a:r>
           </a:p>
         </p:txBody>
@@ -5172,7 +5172,7 @@
           <a:p>
             <a:pPr algn="r"/>
             <a:r>
-              <a:rPr sz="1100" b="0" i="0">
+              <a:rPr sz="1800" b="0" i="0">
                 <a:solidFill>
                   <a:srgbClr val="555B66"/>
                 </a:solidFill>
@@ -5287,8 +5287,8 @@
         </p:blipFill>
         <p:spPr>
           <a:xfrm>
-            <a:off x="1297615" y="1417320"/>
-            <a:ext cx="9596464" cy="4343400"/>
+            <a:off x="742030" y="1371600"/>
+            <a:ext cx="10707634" cy="4846320"/>
           </a:xfrm>
           <a:prstGeom prst="rect">
             <a:avLst/>
@@ -5302,14 +5302,14 @@
       </p:pic>
       <p:sp>
         <p:nvSpPr>
-          <p:cNvPr id="5" name="TextBox 4"/>
+          <p:cNvPr id="5" name="Footer"/>
           <p:cNvSpPr txBox="1"/>
           <p:nvPr/>
         </p:nvSpPr>
         <p:spPr>
           <a:xfrm>
-            <a:off x="1297615" y="5806440"/>
-            <a:ext cx="9596464" cy="274320"/>
+            <a:off x="548640" y="6446520"/>
+            <a:ext cx="8686800" cy="274320"/>
           </a:xfrm>
           <a:prstGeom prst="rect">
             <a:avLst/>
@@ -5324,27 +5324,27 @@
           <a:p>
             <a:pPr algn="l"/>
             <a:r>
-              <a:rPr sz="1200" b="0" i="1">
+              <a:rPr sz="1800" b="0" i="0">
                 <a:solidFill>
                   <a:srgbClr val="555B66"/>
                 </a:solidFill>
                 <a:latin typeface="Calibri"/>
               </a:rPr>
-              <a:t>Sources → ingestion → NLP → RiskSignal store and API → stress engine and dashboard · every record labelled LIVE / CACHED_REAL / SYNTHETIC (docs/architecture.png)</a:t>
-            </a:r>
-          </a:p>
-        </p:txBody>
-      </p:sp>
-      <p:sp>
-        <p:nvSpPr>
-          <p:cNvPr id="6" name="Footer"/>
+              <a:t>Risk Signal Engine · decision support, not investment advice</a:t>
+            </a:r>
+          </a:p>
+        </p:txBody>
+      </p:sp>
+      <p:sp>
+        <p:nvSpPr>
+          <p:cNvPr id="6" name="SlideNo"/>
           <p:cNvSpPr txBox="1"/>
           <p:nvPr/>
         </p:nvSpPr>
         <p:spPr>
           <a:xfrm>
-            <a:off x="548640" y="6446520"/>
-            <a:ext cx="8686800" cy="274320"/>
+            <a:off x="10911535" y="6446520"/>
+            <a:ext cx="731520" cy="274320"/>
           </a:xfrm>
           <a:prstGeom prst="rect">
             <a:avLst/>
@@ -5357,44 +5357,9 @@
           </a:bodyPr>
           <a:lstStyle/>
           <a:p>
-            <a:pPr algn="l"/>
-            <a:r>
-              <a:rPr sz="1100" b="0" i="0">
-                <a:solidFill>
-                  <a:srgbClr val="555B66"/>
-                </a:solidFill>
-                <a:latin typeface="Calibri"/>
-              </a:rPr>
-              <a:t>Risk Signal Engine · Code to Connect 2026 · decision-support prototype, not investment advice</a:t>
-            </a:r>
-          </a:p>
-        </p:txBody>
-      </p:sp>
-      <p:sp>
-        <p:nvSpPr>
-          <p:cNvPr id="7" name="SlideNo"/>
-          <p:cNvSpPr txBox="1"/>
-          <p:nvPr/>
-        </p:nvSpPr>
-        <p:spPr>
-          <a:xfrm>
-            <a:off x="10911535" y="6446520"/>
-            <a:ext cx="731520" cy="274320"/>
-          </a:xfrm>
-          <a:prstGeom prst="rect">
-            <a:avLst/>
-          </a:prstGeom>
-          <a:noFill/>
-        </p:spPr>
-        <p:txBody>
-          <a:bodyPr wrap="square" anchor="t" lIns="0" rIns="0" tIns="0" bIns="0">
-            <a:spAutoFit/>
-          </a:bodyPr>
-          <a:lstStyle/>
-          <a:p>
             <a:pPr algn="r"/>
             <a:r>
-              <a:rPr sz="1100" b="0" i="0">
+              <a:rPr sz="1800" b="0" i="0">
                 <a:solidFill>
                   <a:srgbClr val="555B66"/>
                 </a:solidFill>
@@ -5517,7 +5482,7 @@
           <a:p>
             <a:pPr marL="274320" indent="-274320">
               <a:spcAft>
-                <a:spcPts val="900"/>
+                <a:spcPts val="1600"/>
               </a:spcAft>
               <a:buClr>
                 <a:srgbClr val="0E8A84"/>
@@ -5526,7 +5491,7 @@
               <a:buChar char="•"/>
             </a:pPr>
             <a:r>
-              <a:rPr sz="1700" b="1" i="0">
+              <a:rPr sz="1800" b="1" i="0">
                 <a:solidFill>
                   <a:srgbClr val="1A1A1A"/>
                 </a:solidFill>
@@ -5535,19 +5500,19 @@
               <a:t>NLP: </a:t>
             </a:r>
             <a:r>
-              <a:rPr sz="1700" b="0" i="0">
+              <a:rPr sz="1800" b="0" i="0">
                 <a:solidFill>
                   <a:srgbClr val="1A1A1A"/>
                 </a:solidFill>
                 <a:latin typeface="Calibri"/>
               </a:rPr>
-              <a:t>entities (cashtags, aliases, spaCy, guarded fuzzy), FinBERT sentiment, 11-class event rules with evidence; optional fine-tuned models in a hybrid</a:t>
+              <a:t>entities, FinBERT sentiment, 11 event classes with evidence</a:t>
             </a:r>
           </a:p>
           <a:p>
             <a:pPr marL="274320" indent="-274320">
               <a:spcAft>
-                <a:spcPts val="900"/>
+                <a:spcPts val="1600"/>
               </a:spcAft>
               <a:buClr>
                 <a:srgbClr val="0E8A84"/>
@@ -5556,7 +5521,7 @@
               <a:buChar char="•"/>
             </a:pPr>
             <a:r>
-              <a:rPr sz="1700" b="1" i="0">
+              <a:rPr sz="1800" b="1" i="0">
                 <a:solidFill>
                   <a:srgbClr val="1A1A1A"/>
                 </a:solidFill>
@@ -5565,19 +5530,19 @@
               <a:t>Stress engine: </a:t>
             </a:r>
             <a:r>
-              <a:rPr sz="1700" b="0" i="0">
+              <a:rPr sz="1800" b="0" i="0">
                 <a:solidFill>
                   <a:srgbClr val="1A1A1A"/>
                 </a:solidFill>
                 <a:latin typeface="Calibri"/>
               </a:rPr>
-              <a:t>news-only systemic and issuer triggers with cooldown; pricers for bonds, loans, IRS, CDS, FX, equity; what-if sliders</a:t>
+              <a:t>news triggers with cooldown; bonds, loans, swaps, CDS, FX, equity</a:t>
             </a:r>
           </a:p>
           <a:p>
             <a:pPr marL="274320" indent="-274320">
               <a:spcAft>
-                <a:spcPts val="900"/>
+                <a:spcPts val="1600"/>
               </a:spcAft>
               <a:buClr>
                 <a:srgbClr val="0E8A84"/>
@@ -5586,7 +5551,7 @@
               <a:buChar char="•"/>
             </a:pPr>
             <a:r>
-              <a:rPr sz="1700" b="1" i="0">
+              <a:rPr sz="1800" b="1" i="0">
                 <a:solidFill>
                   <a:srgbClr val="1A1A1A"/>
                 </a:solidFill>
@@ -5595,19 +5560,19 @@
               <a:t>Credit views: </a:t>
             </a:r>
             <a:r>
-              <a:rPr sz="1700" b="0" i="0">
+              <a:rPr sz="1800" b="0" i="0">
                 <a:solidFill>
                   <a:srgbClr val="1A1A1A"/>
                 </a:solidFill>
                 <a:latin typeface="Calibri"/>
               </a:rPr>
-              <a:t>watchlist, propagation over 16 curated links, one-click credit brief</a:t>
+              <a:t>watchlist, propagation, one-click credit brief</a:t>
             </a:r>
           </a:p>
           <a:p>
             <a:pPr marL="274320" indent="-274320">
               <a:spcAft>
-                <a:spcPts val="900"/>
+                <a:spcPts val="1600"/>
               </a:spcAft>
               <a:buClr>
                 <a:srgbClr val="0E8A84"/>
@@ -5616,7 +5581,7 @@
               <a:buChar char="•"/>
             </a:pPr>
             <a:r>
-              <a:rPr sz="1700" b="1" i="0">
+              <a:rPr sz="1800" b="1" i="0">
                 <a:solidFill>
                   <a:srgbClr val="1A1A1A"/>
                 </a:solidFill>
@@ -5625,13 +5590,13 @@
               <a:t>Engineering: </a:t>
             </a:r>
             <a:r>
-              <a:rPr sz="1700" b="0" i="0">
+              <a:rPr sz="1800" b="0" i="0">
                 <a:solidFill>
                   <a:srgbClr val="1A1A1A"/>
                 </a:solidFill>
                 <a:latin typeface="Calibri"/>
               </a:rPr>
-              <a:t>one pipeline for every input, offline demo, time machine over real data, audit trail</a:t>
+              <a:t>one pipeline for every input, offline demo, time machine, audit trail</a:t>
             </a:r>
           </a:p>
         </p:txBody>
@@ -5674,7 +5639,7 @@
         <p:spPr>
           <a:xfrm>
             <a:off x="5623560" y="3106021"/>
-            <a:ext cx="6035040" cy="274320"/>
+            <a:ext cx="6035040" cy="320040"/>
           </a:xfrm>
           <a:prstGeom prst="rect">
             <a:avLst/>
@@ -5689,13 +5654,13 @@
           <a:p>
             <a:pPr algn="l"/>
             <a:r>
-              <a:rPr sz="1200" b="0" i="1">
+              <a:rPr sz="1800" b="0" i="1">
                 <a:solidFill>
                   <a:srgbClr val="555B66"/>
                 </a:solidFill>
                 <a:latin typeface="Calibri"/>
               </a:rPr>
-              <a:t>Dashboard explainability: factor contributions for a SYNTHETIC demo signal</a:t>
+              <a:t>Factor contributions for a SYNTHETIC demo signal</a:t>
             </a:r>
           </a:p>
         </p:txBody>
@@ -5708,8 +5673,8 @@
         </p:nvSpPr>
         <p:spPr>
           <a:xfrm>
-            <a:off x="5623560" y="3499213"/>
-            <a:ext cx="6035040" cy="1508760"/>
+            <a:off x="548640" y="4754880"/>
+            <a:ext cx="11094415" cy="1051560"/>
           </a:xfrm>
           <a:prstGeom prst="roundRect">
             <a:avLst>
@@ -5756,8 +5721,8 @@
         </p:nvSpPr>
         <p:spPr>
           <a:xfrm>
-            <a:off x="5852160" y="3636373"/>
-            <a:ext cx="5577840" cy="1280160"/>
+            <a:off x="822960" y="4910328"/>
+            <a:ext cx="10545775" cy="1005840"/>
           </a:xfrm>
           <a:prstGeom prst="rect">
             <a:avLst/>
@@ -5772,7 +5737,7 @@
           <a:p>
             <a:pPr algn="l"/>
             <a:r>
-              <a:rPr sz="1800" b="1" i="0">
+              <a:rPr sz="2400" b="1" i="0">
                 <a:solidFill>
                   <a:srgbClr val="1F2A44"/>
                 </a:solidFill>
@@ -5781,7 +5746,7 @@
               <a:t>Impact = 1 + 9 × Q × (</a:t>
             </a:r>
             <a:r>
-              <a:rPr sz="1800" b="1" i="0">
+              <a:rPr sz="2400" b="1" i="0">
                 <a:solidFill>
                   <a:srgbClr val="0E8A84"/>
                 </a:solidFill>
@@ -5790,7 +5755,7 @@
               <a:t>0.40·E + 0.25·M + 0.20·X + 0.15·R</a:t>
             </a:r>
             <a:r>
-              <a:rPr sz="1800" b="1" i="0">
+              <a:rPr sz="2400" b="1" i="0">
                 <a:solidFill>
                   <a:srgbClr val="1F2A44"/>
                 </a:solidFill>
@@ -5802,25 +5767,22 @@
           <a:p>
             <a:pPr algn="l"/>
             <a:r>
-              <a:rPr sz="1500" b="0" i="0">
+              <a:rPr sz="1800" b="0" i="0">
                 <a:solidFill>
                   <a:srgbClr val="1A1A1A"/>
                 </a:solidFill>
                 <a:latin typeface="Calibri"/>
               </a:rPr>
-              <a:t>E event severity · M sentiment magnitude · X exposure · R credibility + corroboration · Q confidence</a:t>
-            </a:r>
-          </a:p>
-          <a:p>
-            <a:pPr algn="l"/>
-            <a:r>
-              <a:rPr sz="1500" b="0" i="0">
+              <a:t>E severity · M sentiment · X exposure · R credibility · Q confidence · </a:t>
+            </a:r>
+            <a:r>
+              <a:rPr sz="1800" b="0" i="0">
                 <a:solidFill>
                   <a:srgbClr val="555B66"/>
                 </a:solidFill>
                 <a:latin typeface="Calibri"/>
               </a:rPr>
-              <a:t>Expert-set priors, not calibrated</a:t>
+              <a:t>uncalibrated expert priors</a:t>
             </a:r>
           </a:p>
         </p:txBody>
@@ -5849,13 +5811,13 @@
           <a:p>
             <a:pPr algn="l"/>
             <a:r>
-              <a:rPr sz="1100" b="0" i="0">
+              <a:rPr sz="1800" b="0" i="0">
                 <a:solidFill>
                   <a:srgbClr val="555B66"/>
                 </a:solidFill>
                 <a:latin typeface="Calibri"/>
               </a:rPr>
-              <a:t>Risk Signal Engine · Code to Connect 2026 · decision-support prototype, not investment advice</a:t>
+              <a:t>Risk Signal Engine · decision support, not investment advice</a:t>
             </a:r>
           </a:p>
         </p:txBody>
@@ -5884,7 +5846,7 @@
           <a:p>
             <a:pPr algn="r"/>
             <a:r>
-              <a:rPr sz="1100" b="0" i="0">
+              <a:rPr sz="1800" b="0" i="0">
                 <a:solidFill>
                   <a:srgbClr val="555B66"/>
                 </a:solidFill>
@@ -5992,7 +5954,7 @@
         <p:spPr>
           <a:xfrm>
             <a:off x="548640" y="1417320"/>
-            <a:ext cx="2103120" cy="1325880"/>
+            <a:ext cx="2103120" cy="1371600"/>
           </a:xfrm>
           <a:prstGeom prst="roundRect">
             <a:avLst>
@@ -6107,8 +6069,8 @@
         </p:nvSpPr>
         <p:spPr>
           <a:xfrm>
-            <a:off x="713232" y="2331720"/>
-            <a:ext cx="1828800" cy="320040"/>
+            <a:off x="713232" y="2359152"/>
+            <a:ext cx="1828800" cy="365760"/>
           </a:xfrm>
           <a:prstGeom prst="rect">
             <a:avLst/>
@@ -6123,13 +6085,13 @@
           <a:p>
             <a:pPr algn="l"/>
             <a:r>
-              <a:rPr sz="1200" b="0" i="0">
+              <a:rPr sz="1800" b="0" i="0">
                 <a:solidFill>
                   <a:srgbClr val="555B66"/>
                 </a:solidFill>
                 <a:latin typeface="Calibri"/>
               </a:rPr>
-              <a:t>accuracy · FinBERT · n = 147</a:t>
+              <a:t>FinBERT · n = 147</a:t>
             </a:r>
           </a:p>
         </p:txBody>
@@ -6143,7 +6105,7 @@
         <p:spPr>
           <a:xfrm>
             <a:off x="2770632" y="1417320"/>
-            <a:ext cx="2103120" cy="1325880"/>
+            <a:ext cx="2103120" cy="1371600"/>
           </a:xfrm>
           <a:prstGeom prst="roundRect">
             <a:avLst>
@@ -6258,8 +6220,8 @@
         </p:nvSpPr>
         <p:spPr>
           <a:xfrm>
-            <a:off x="2935224" y="2331720"/>
-            <a:ext cx="1828800" cy="320040"/>
+            <a:off x="2935224" y="2359152"/>
+            <a:ext cx="1828800" cy="365760"/>
           </a:xfrm>
           <a:prstGeom prst="rect">
             <a:avLst/>
@@ -6274,13 +6236,13 @@
           <a:p>
             <a:pPr algn="l"/>
             <a:r>
-              <a:rPr sz="1200" b="0" i="0">
+              <a:rPr sz="1800" b="0" i="0">
                 <a:solidFill>
                   <a:srgbClr val="555B66"/>
                 </a:solidFill>
                 <a:latin typeface="Calibri"/>
               </a:rPr>
-              <a:t>accuracy · rules · n = 147</a:t>
+              <a:t>rules · n = 147</a:t>
             </a:r>
           </a:p>
         </p:txBody>
@@ -6294,7 +6256,7 @@
         <p:spPr>
           <a:xfrm>
             <a:off x="4992624" y="1417320"/>
-            <a:ext cx="2103120" cy="1325880"/>
+            <a:ext cx="2103120" cy="1371600"/>
           </a:xfrm>
           <a:prstGeom prst="roundRect">
             <a:avLst>
@@ -6409,8 +6371,8 @@
         </p:nvSpPr>
         <p:spPr>
           <a:xfrm>
-            <a:off x="5157216" y="2331720"/>
-            <a:ext cx="1828800" cy="320040"/>
+            <a:off x="5157216" y="2359152"/>
+            <a:ext cx="1828800" cy="365760"/>
           </a:xfrm>
           <a:prstGeom prst="rect">
             <a:avLst/>
@@ -6425,13 +6387,13 @@
           <a:p>
             <a:pPr algn="l"/>
             <a:r>
-              <a:rPr sz="1200" b="0" i="0">
+              <a:rPr sz="1800" b="0" i="0">
                 <a:solidFill>
                   <a:srgbClr val="555B66"/>
                 </a:solidFill>
                 <a:latin typeface="Calibri"/>
               </a:rPr>
-              <a:t>accuracy · n = 147</a:t>
+              <a:t>n = 147</a:t>
             </a:r>
           </a:p>
         </p:txBody>
@@ -6445,7 +6407,7 @@
         <p:spPr>
           <a:xfrm>
             <a:off x="7214616" y="1417320"/>
-            <a:ext cx="2103120" cy="1325880"/>
+            <a:ext cx="2103120" cy="1371600"/>
           </a:xfrm>
           <a:prstGeom prst="roundRect">
             <a:avLst>
@@ -6560,8 +6522,8 @@
         </p:nvSpPr>
         <p:spPr>
           <a:xfrm>
-            <a:off x="7379208" y="2331720"/>
-            <a:ext cx="1828800" cy="320040"/>
+            <a:off x="7379208" y="2359152"/>
+            <a:ext cx="1828800" cy="365760"/>
           </a:xfrm>
           <a:prstGeom prst="rect">
             <a:avLst/>
@@ -6576,13 +6538,13 @@
           <a:p>
             <a:pPr algn="l"/>
             <a:r>
-              <a:rPr sz="1200" b="0" i="0">
+              <a:rPr sz="1800" b="0" i="0">
                 <a:solidFill>
                   <a:srgbClr val="555B66"/>
                 </a:solidFill>
                 <a:latin typeface="Calibri"/>
               </a:rPr>
-              <a:t>p95 1085.2 ms · n = 200</a:t>
+              <a:t>n = 200 docs</a:t>
             </a:r>
           </a:p>
         </p:txBody>
@@ -6596,7 +6558,7 @@
         <p:spPr>
           <a:xfrm>
             <a:off x="9436608" y="1417320"/>
-            <a:ext cx="2103120" cy="1325880"/>
+            <a:ext cx="2103120" cy="1371600"/>
           </a:xfrm>
           <a:prstGeom prst="roundRect">
             <a:avLst>
@@ -6711,8 +6673,8 @@
         </p:nvSpPr>
         <p:spPr>
           <a:xfrm>
-            <a:off x="9601200" y="2331720"/>
-            <a:ext cx="1828800" cy="320040"/>
+            <a:off x="9601200" y="2359152"/>
+            <a:ext cx="1828800" cy="365760"/>
           </a:xfrm>
           <a:prstGeom prst="rect">
             <a:avLst/>
@@ -6727,13 +6689,13 @@
           <a:p>
             <a:pPr algn="l"/>
             <a:r>
-              <a:rPr sz="1200" b="0" i="0">
+              <a:rPr sz="1800" b="0" i="0">
                 <a:solidFill>
                   <a:srgbClr val="555B66"/>
                 </a:solidFill>
                 <a:latin typeface="Calibri"/>
               </a:rPr>
-              <a:t>replay after fixes · n = 911</a:t>
+              <a:t>n = 911 real docs</a:t>
             </a:r>
           </a:p>
         </p:txBody>
@@ -6746,8 +6708,8 @@
         </p:nvSpPr>
         <p:spPr>
           <a:xfrm>
-            <a:off x="548640" y="2788920"/>
-            <a:ext cx="10972800" cy="274320"/>
+            <a:off x="548640" y="2834640"/>
+            <a:ext cx="10972800" cy="320040"/>
           </a:xfrm>
           <a:prstGeom prst="rect">
             <a:avLst/>
@@ -6762,13 +6724,13 @@
           <a:p>
             <a:pPr algn="l"/>
             <a:r>
-              <a:rPr sz="1200" b="0" i="1">
+              <a:rPr sz="1800" b="0" i="1">
                 <a:solidFill>
                   <a:srgbClr val="555B66"/>
                 </a:solidFill>
                 <a:latin typeface="Calibri"/>
               </a:rPr>
-              <a:t>Preliminary (labels pending human review): labels drafted by an AI assistant, which also wrote the event rules. Treat as a smoke test, not a benchmark.</a:t>
+              <a:t>AI-drafted labels: a smoke test, not a benchmark.</a:t>
             </a:r>
           </a:p>
         </p:txBody>
@@ -6781,7 +6743,7 @@
         </p:nvSpPr>
         <p:spPr>
           <a:xfrm>
-            <a:off x="548640" y="3246120"/>
+            <a:off x="548640" y="3291839"/>
             <a:ext cx="4480560" cy="365760"/>
           </a:xfrm>
           <a:prstGeom prst="rect">
@@ -6816,7 +6778,7 @@
         </p:nvSpPr>
         <p:spPr>
           <a:xfrm>
-            <a:off x="548640" y="3794760"/>
+            <a:off x="548640" y="3840479"/>
             <a:ext cx="237744" cy="237744"/>
           </a:xfrm>
           <a:prstGeom prst="ellipse">
@@ -6860,7 +6822,7 @@
         </p:nvSpPr>
         <p:spPr>
           <a:xfrm>
-            <a:off x="932688" y="3703320"/>
+            <a:off x="932688" y="3749039"/>
             <a:ext cx="4023360" cy="420624"/>
           </a:xfrm>
           <a:prstGeom prst="rect">
@@ -6885,7 +6847,7 @@
               <a:t>0.41% GREEN  </a:t>
             </a:r>
             <a:r>
-              <a:rPr sz="1700" b="0" i="0">
+              <a:rPr sz="1800" b="0" i="0">
                 <a:solidFill>
                   <a:srgbClr val="1A1A1A"/>
                 </a:solidFill>
@@ -6904,7 +6866,7 @@
         </p:nvSpPr>
         <p:spPr>
           <a:xfrm>
-            <a:off x="548640" y="4251960"/>
+            <a:off x="548640" y="4297679"/>
             <a:ext cx="237744" cy="237744"/>
           </a:xfrm>
           <a:prstGeom prst="ellipse">
@@ -6948,7 +6910,7 @@
         </p:nvSpPr>
         <p:spPr>
           <a:xfrm>
-            <a:off x="932688" y="4160520"/>
+            <a:off x="932688" y="4206239"/>
             <a:ext cx="4023360" cy="420624"/>
           </a:xfrm>
           <a:prstGeom prst="rect">
@@ -6973,7 +6935,7 @@
               <a:t>1.32% AMBER  </a:t>
             </a:r>
             <a:r>
-              <a:rPr sz="1700" b="0" i="0">
+              <a:rPr sz="1800" b="0" i="0">
                 <a:solidFill>
                   <a:srgbClr val="1A1A1A"/>
                 </a:solidFill>
@@ -6992,7 +6954,7 @@
         </p:nvSpPr>
         <p:spPr>
           <a:xfrm>
-            <a:off x="548640" y="4709160"/>
+            <a:off x="548640" y="4754879"/>
             <a:ext cx="237744" cy="237744"/>
           </a:xfrm>
           <a:prstGeom prst="ellipse">
@@ -7036,7 +6998,7 @@
         </p:nvSpPr>
         <p:spPr>
           <a:xfrm>
-            <a:off x="932688" y="4617720"/>
+            <a:off x="932688" y="4663439"/>
             <a:ext cx="4023360" cy="420624"/>
           </a:xfrm>
           <a:prstGeom prst="rect">
@@ -7061,7 +7023,7 @@
               <a:t>2.45% RED  </a:t>
             </a:r>
             <a:r>
-              <a:rPr sz="1700" b="0" i="0">
+              <a:rPr sz="1800" b="0" i="0">
                 <a:solidFill>
                   <a:srgbClr val="1A1A1A"/>
                 </a:solidFill>
@@ -7080,8 +7042,8 @@
         </p:nvSpPr>
         <p:spPr>
           <a:xfrm>
-            <a:off x="548640" y="5212080"/>
-            <a:ext cx="4480560" cy="1097280"/>
+            <a:off x="548640" y="5212079"/>
+            <a:ext cx="4480560" cy="731520"/>
           </a:xfrm>
           <a:prstGeom prst="rect">
             <a:avLst/>
@@ -7096,7 +7058,7 @@
           <a:p>
             <a:pPr algn="l"/>
             <a:r>
-              <a:rPr sz="1600" b="1" i="0">
+              <a:rPr sz="1800" b="1" i="0">
                 <a:solidFill>
                   <a:srgbClr val="1F2A44"/>
                 </a:solidFill>
@@ -7105,55 +7067,20 @@
               <a:t>REAL history: </a:t>
             </a:r>
             <a:r>
-              <a:rPr sz="1600" b="0" i="0">
+              <a:rPr sz="1800" b="0" i="0">
                 <a:solidFill>
                   <a:srgbClr val="1A1A1A"/>
                 </a:solidFill>
                 <a:latin typeface="Calibri"/>
               </a:rPr>
-              <a:t>1,325 captured documents → 1,325 signals → 54 simulated stress runs</a:t>
-            </a:r>
-          </a:p>
-        </p:txBody>
-      </p:sp>
-      <p:sp>
-        <p:nvSpPr>
-          <p:cNvPr id="33" name="TextBox 32"/>
-          <p:cNvSpPr txBox="1"/>
-          <p:nvPr/>
-        </p:nvSpPr>
-        <p:spPr>
-          <a:xfrm>
-            <a:off x="548640" y="5897880"/>
-            <a:ext cx="4480560" cy="457200"/>
-          </a:xfrm>
-          <a:prstGeom prst="rect">
-            <a:avLst/>
-          </a:prstGeom>
-          <a:noFill/>
-        </p:spPr>
-        <p:txBody>
-          <a:bodyPr wrap="square" anchor="t" lIns="0" rIns="0" tIns="0" bIns="0">
-            <a:spAutoFit/>
-          </a:bodyPr>
-          <a:lstStyle/>
-          <a:p>
-            <a:pPr algn="l"/>
-            <a:r>
-              <a:rPr sz="1200" b="1" i="0">
-                <a:solidFill>
-                  <a:srgbClr val="D03B3B"/>
-                </a:solidFill>
-                <a:latin typeface="Calibri"/>
-              </a:rPr>
-              <a:t>Simplified, illustrative hackathon stress model. Not a production or regulatory risk model.</a:t>
+              <a:t>1,325 docs → 54 simulated runs</a:t>
             </a:r>
           </a:p>
         </p:txBody>
       </p:sp>
       <p:pic>
         <p:nvPicPr>
-          <p:cNvPr id="34" name="Picture 33" descr="stress_waterfall.png"/>
+          <p:cNvPr id="33" name="Picture 32" descr="stress_waterfall.png"/>
           <p:cNvPicPr>
             <a:picLocks noChangeAspect="1"/>
           </p:cNvPicPr>
@@ -7167,7 +7094,7 @@
         </p:blipFill>
         <p:spPr>
           <a:xfrm>
-            <a:off x="5120640" y="3246120"/>
+            <a:off x="5120640" y="3291839"/>
             <a:ext cx="6537960" cy="2451735"/>
           </a:xfrm>
           <a:prstGeom prst="rect">
@@ -7182,14 +7109,14 @@
       </p:pic>
       <p:sp>
         <p:nvSpPr>
-          <p:cNvPr id="35" name="TextBox 34"/>
+          <p:cNvPr id="34" name="TextBox 33"/>
           <p:cNvSpPr txBox="1"/>
           <p:nvPr/>
         </p:nvSpPr>
         <p:spPr>
           <a:xfrm>
-            <a:off x="5120640" y="5725287"/>
-            <a:ext cx="6537960" cy="274320"/>
+            <a:off x="5120640" y="5771006"/>
+            <a:ext cx="6537960" cy="320040"/>
           </a:xfrm>
           <a:prstGeom prst="rect">
             <a:avLst/>
@@ -7204,27 +7131,27 @@
           <a:p>
             <a:pPr algn="l"/>
             <a:r>
-              <a:rPr sz="1200" b="0" i="1">
+              <a:rPr sz="1800" b="0" i="1">
                 <a:solidFill>
                   <a:srgbClr val="555B66"/>
                 </a:solidFill>
                 <a:latin typeface="Calibri"/>
               </a:rPr>
-              <a:t>Before → after, corroborated geopolitical shock · Illustrative model, synthetic portfolio</a:t>
-            </a:r>
-          </a:p>
-        </p:txBody>
-      </p:sp>
-      <p:sp>
-        <p:nvSpPr>
-          <p:cNvPr id="36" name="Footer"/>
+              <a:t>Before → after, corroborated geopolitical shock</a:t>
+            </a:r>
+          </a:p>
+        </p:txBody>
+      </p:sp>
+      <p:sp>
+        <p:nvSpPr>
+          <p:cNvPr id="35" name="Disclaimer"/>
           <p:cNvSpPr txBox="1"/>
           <p:nvPr/>
         </p:nvSpPr>
         <p:spPr>
           <a:xfrm>
-            <a:off x="548640" y="6446520"/>
-            <a:ext cx="8686800" cy="274320"/>
+            <a:off x="548640" y="6080760"/>
+            <a:ext cx="11094415" cy="320040"/>
           </a:xfrm>
           <a:prstGeom prst="rect">
             <a:avLst/>
@@ -7239,27 +7166,27 @@
           <a:p>
             <a:pPr algn="l"/>
             <a:r>
-              <a:rPr sz="1100" b="0" i="0">
-                <a:solidFill>
-                  <a:srgbClr val="555B66"/>
-                </a:solidFill>
-                <a:latin typeface="Calibri"/>
-              </a:rPr>
-              <a:t>Demo losses: simulated, illustrative model, synthetic portfolio · not investment advice</a:t>
-            </a:r>
-          </a:p>
-        </p:txBody>
-      </p:sp>
-      <p:sp>
-        <p:nvSpPr>
-          <p:cNvPr id="37" name="SlideNo"/>
+              <a:rPr sz="1800" b="1" i="0">
+                <a:solidFill>
+                  <a:srgbClr val="D03B3B"/>
+                </a:solidFill>
+                <a:latin typeface="Calibri"/>
+              </a:rPr>
+              <a:t>Simplified, illustrative hackathon stress model. Not a production or regulatory risk model.</a:t>
+            </a:r>
+          </a:p>
+        </p:txBody>
+      </p:sp>
+      <p:sp>
+        <p:nvSpPr>
+          <p:cNvPr id="36" name="Footer"/>
           <p:cNvSpPr txBox="1"/>
           <p:nvPr/>
         </p:nvSpPr>
         <p:spPr>
           <a:xfrm>
-            <a:off x="10911535" y="6446520"/>
-            <a:ext cx="731520" cy="274320"/>
+            <a:off x="548640" y="6446520"/>
+            <a:ext cx="8686800" cy="274320"/>
           </a:xfrm>
           <a:prstGeom prst="rect">
             <a:avLst/>
@@ -7272,9 +7199,44 @@
           </a:bodyPr>
           <a:lstStyle/>
           <a:p>
+            <a:pPr algn="l"/>
+            <a:r>
+              <a:rPr sz="1800" b="0" i="0">
+                <a:solidFill>
+                  <a:srgbClr val="555B66"/>
+                </a:solidFill>
+                <a:latin typeface="Calibri"/>
+              </a:rPr>
+              <a:t>Simulated losses · illustrative model, synthetic portfolio · not investment advice</a:t>
+            </a:r>
+          </a:p>
+        </p:txBody>
+      </p:sp>
+      <p:sp>
+        <p:nvSpPr>
+          <p:cNvPr id="37" name="SlideNo"/>
+          <p:cNvSpPr txBox="1"/>
+          <p:nvPr/>
+        </p:nvSpPr>
+        <p:spPr>
+          <a:xfrm>
+            <a:off x="10911535" y="6446520"/>
+            <a:ext cx="731520" cy="274320"/>
+          </a:xfrm>
+          <a:prstGeom prst="rect">
+            <a:avLst/>
+          </a:prstGeom>
+          <a:noFill/>
+        </p:spPr>
+        <p:txBody>
+          <a:bodyPr wrap="square" anchor="t" lIns="0" rIns="0" tIns="0" bIns="0">
+            <a:spAutoFit/>
+          </a:bodyPr>
+          <a:lstStyle/>
+          <a:p>
             <a:pPr algn="r"/>
             <a:r>
-              <a:rPr sz="1100" b="0" i="0">
+              <a:rPr sz="1800" b="0" i="0">
                 <a:solidFill>
                   <a:srgbClr val="555B66"/>
                 </a:solidFill>
@@ -7382,7 +7344,7 @@
         <p:spPr>
           <a:xfrm>
             <a:off x="548640" y="1417320"/>
-            <a:ext cx="3611880" cy="1188720"/>
+            <a:ext cx="3611880" cy="1280160"/>
           </a:xfrm>
           <a:prstGeom prst="roundRect">
             <a:avLst>
@@ -7462,8 +7424,8 @@
         </p:nvSpPr>
         <p:spPr>
           <a:xfrm>
-            <a:off x="731520" y="1920240"/>
-            <a:ext cx="3291840" cy="640080"/>
+            <a:off x="731520" y="1892808"/>
+            <a:ext cx="3291840" cy="731520"/>
           </a:xfrm>
           <a:prstGeom prst="rect">
             <a:avLst/>
@@ -7478,13 +7440,13 @@
           <a:p>
             <a:pPr algn="l"/>
             <a:r>
-              <a:rPr sz="1500" b="0" i="0">
+              <a:rPr sz="1800" b="0" i="0">
                 <a:solidFill>
                   <a:srgbClr val="1A1A1A"/>
                 </a:solidFill>
                 <a:latin typeface="Calibri"/>
               </a:rPr>
-              <a:t>see which held names need attention and the rule that fired</a:t>
+              <a:t>see which held names need attention, and why</a:t>
             </a:r>
           </a:p>
         </p:txBody>
@@ -7498,7 +7460,7 @@
         <p:spPr>
           <a:xfrm>
             <a:off x="4270248" y="1417320"/>
-            <a:ext cx="3611880" cy="1188720"/>
+            <a:ext cx="3611880" cy="1280160"/>
           </a:xfrm>
           <a:prstGeom prst="roundRect">
             <a:avLst>
@@ -7578,8 +7540,8 @@
         </p:nvSpPr>
         <p:spPr>
           <a:xfrm>
-            <a:off x="4453128" y="1920240"/>
-            <a:ext cx="3291840" cy="640080"/>
+            <a:off x="4453128" y="1892808"/>
+            <a:ext cx="3291840" cy="731520"/>
           </a:xfrm>
           <a:prstGeom prst="rect">
             <a:avLst/>
@@ -7594,13 +7556,13 @@
           <a:p>
             <a:pPr algn="l"/>
             <a:r>
-              <a:rPr sz="1500" b="0" i="0">
+              <a:rPr sz="1800" b="0" i="0">
                 <a:solidFill>
                   <a:srgbClr val="1A1A1A"/>
                 </a:solidFill>
                 <a:latin typeface="Calibri"/>
               </a:rPr>
-              <a:t>get an audited, simulated portfolio view when news breaks</a:t>
+              <a:t>get an audited portfolio view when news breaks</a:t>
             </a:r>
           </a:p>
         </p:txBody>
@@ -7614,7 +7576,7 @@
         <p:spPr>
           <a:xfrm>
             <a:off x="7991856" y="1417320"/>
-            <a:ext cx="3611880" cy="1188720"/>
+            <a:ext cx="3611880" cy="1280160"/>
           </a:xfrm>
           <a:prstGeom prst="roundRect">
             <a:avLst>
@@ -7694,8 +7656,8 @@
         </p:nvSpPr>
         <p:spPr>
           <a:xfrm>
-            <a:off x="8174736" y="1920240"/>
-            <a:ext cx="3291840" cy="640080"/>
+            <a:off x="8174736" y="1892808"/>
+            <a:ext cx="3291840" cy="731520"/>
           </a:xfrm>
           <a:prstGeom prst="rect">
             <a:avLst/>
@@ -7710,13 +7672,13 @@
           <a:p>
             <a:pPr algn="l"/>
             <a:r>
-              <a:rPr sz="1500" b="0" i="0">
+              <a:rPr sz="1800" b="0" i="0">
                 <a:solidFill>
                   <a:srgbClr val="1A1A1A"/>
                 </a:solidFill>
                 <a:latin typeface="Calibri"/>
               </a:rPr>
-              <a:t>see linked exposure and test their own shocks instantly</a:t>
+              <a:t>see linked exposure and test their own shocks</a:t>
             </a:r>
           </a:p>
         </p:txBody>
@@ -7737,8 +7699,8 @@
         </p:blipFill>
         <p:spPr>
           <a:xfrm>
-            <a:off x="548640" y="2834640"/>
-            <a:ext cx="3840480" cy="2057400"/>
+            <a:off x="548640" y="2880360"/>
+            <a:ext cx="3755136" cy="2011680"/>
           </a:xfrm>
           <a:prstGeom prst="rect">
             <a:avLst/>
@@ -7766,8 +7728,8 @@
         </p:blipFill>
         <p:spPr>
           <a:xfrm>
-            <a:off x="4526280" y="2834640"/>
-            <a:ext cx="3923756" cy="2057400"/>
+            <a:off x="4440936" y="2880360"/>
+            <a:ext cx="3836561" cy="2011680"/>
           </a:xfrm>
           <a:prstGeom prst="rect">
             <a:avLst/>
@@ -7795,8 +7757,8 @@
         </p:blipFill>
         <p:spPr>
           <a:xfrm>
-            <a:off x="8587196" y="2834640"/>
-            <a:ext cx="3055859" cy="2218327"/>
+            <a:off x="8414657" y="2880360"/>
+            <a:ext cx="2771192" cy="2011680"/>
           </a:xfrm>
           <a:prstGeom prst="rect">
             <a:avLst/>
@@ -7817,7 +7779,7 @@
         <p:spPr>
           <a:xfrm>
             <a:off x="548640" y="4928616"/>
-            <a:ext cx="3840480" cy="274320"/>
+            <a:ext cx="3755136" cy="320040"/>
           </a:xfrm>
           <a:prstGeom prst="rect">
             <a:avLst/>
@@ -7832,13 +7794,13 @@
           <a:p>
             <a:pPr algn="l"/>
             <a:r>
-              <a:rPr sz="1200" b="0" i="1">
+              <a:rPr sz="1800" b="0" i="1">
                 <a:solidFill>
                   <a:srgbClr val="555B66"/>
                 </a:solidFill>
                 <a:latin typeface="Calibri"/>
               </a:rPr>
-              <a:t>Early-warning watchlist on real news</a:t>
+              <a:t>Watchlist on real news</a:t>
             </a:r>
           </a:p>
         </p:txBody>
@@ -7851,8 +7813,8 @@
         </p:nvSpPr>
         <p:spPr>
           <a:xfrm>
-            <a:off x="4526280" y="4928616"/>
-            <a:ext cx="3923756" cy="274320"/>
+            <a:off x="4440936" y="4928616"/>
+            <a:ext cx="3836561" cy="320040"/>
           </a:xfrm>
           <a:prstGeom prst="rect">
             <a:avLst/>
@@ -7867,13 +7829,13 @@
           <a:p>
             <a:pPr algn="l"/>
             <a:r>
-              <a:rPr sz="1200" b="0" i="1">
+              <a:rPr sz="1800" b="0" i="1">
                 <a:solidFill>
                   <a:srgbClr val="555B66"/>
                 </a:solidFill>
                 <a:latin typeface="Calibri"/>
               </a:rPr>
-              <a:t>One-click credit brief (template, no LLM; PDF)</a:t>
+              <a:t>Credit brief (PDF)</a:t>
             </a:r>
           </a:p>
         </p:txBody>
@@ -7886,8 +7848,8 @@
         </p:nvSpPr>
         <p:spPr>
           <a:xfrm>
-            <a:off x="8587196" y="5089543"/>
-            <a:ext cx="3055859" cy="274320"/>
+            <a:off x="8414657" y="4928616"/>
+            <a:ext cx="2771192" cy="320040"/>
           </a:xfrm>
           <a:prstGeom prst="rect">
             <a:avLst/>
@@ -7902,20 +7864,101 @@
           <a:p>
             <a:pPr algn="l"/>
             <a:r>
-              <a:rPr sz="1200" b="0" i="1">
+              <a:rPr sz="1800" b="0" i="1">
                 <a:solidFill>
                   <a:srgbClr val="555B66"/>
                 </a:solidFill>
                 <a:latin typeface="Calibri"/>
               </a:rPr>
-              <a:t>Propagation over curated links</a:t>
-            </a:r>
-          </a:p>
-        </p:txBody>
-      </p:sp>
-      <p:sp>
-        <p:nvSpPr>
-          <p:cNvPr id="19" name="Footer"/>
+              <a:t>Propagation graph</a:t>
+            </a:r>
+          </a:p>
+        </p:txBody>
+      </p:sp>
+      <p:sp>
+        <p:nvSpPr>
+          <p:cNvPr id="19" name="Rounded Rectangle 18"/>
+          <p:cNvSpPr/>
+          <p:nvPr/>
+        </p:nvSpPr>
+        <p:spPr>
+          <a:xfrm>
+            <a:off x="548640" y="5440680"/>
+            <a:ext cx="11094415" cy="777240"/>
+          </a:xfrm>
+          <a:prstGeom prst="roundRect">
+            <a:avLst>
+              <a:gd name="adj" fmla="val 6000"/>
+            </a:avLst>
+          </a:prstGeom>
+          <a:solidFill>
+            <a:srgbClr val="1F2A44"/>
+          </a:solidFill>
+          <a:ln>
+            <a:noFill/>
+          </a:ln>
+          <a:effectLst/>
+        </p:spPr>
+        <p:style>
+          <a:lnRef idx="1">
+            <a:schemeClr val="accent1"/>
+          </a:lnRef>
+          <a:fillRef idx="3">
+            <a:schemeClr val="accent1"/>
+          </a:fillRef>
+          <a:effectRef idx="2">
+            <a:schemeClr val="accent1"/>
+          </a:effectRef>
+          <a:fontRef idx="minor">
+            <a:schemeClr val="lt1"/>
+          </a:fontRef>
+        </p:style>
+        <p:txBody>
+          <a:bodyPr rtlCol="0" anchor="ctr"/>
+          <a:lstStyle/>
+          <a:p>
+            <a:pPr algn="ctr"/>
+          </a:p>
+        </p:txBody>
+      </p:sp>
+      <p:sp>
+        <p:nvSpPr>
+          <p:cNvPr id="20" name="TextBox 19"/>
+          <p:cNvSpPr txBox="1"/>
+          <p:nvPr/>
+        </p:nvSpPr>
+        <p:spPr>
+          <a:xfrm>
+            <a:off x="914400" y="5440680"/>
+            <a:ext cx="10362895" cy="777240"/>
+          </a:xfrm>
+          <a:prstGeom prst="rect">
+            <a:avLst/>
+          </a:prstGeom>
+          <a:noFill/>
+        </p:spPr>
+        <p:txBody>
+          <a:bodyPr wrap="square" anchor="ctr" lIns="0" rIns="0" tIns="0" bIns="0">
+            <a:spAutoFit/>
+          </a:bodyPr>
+          <a:lstStyle/>
+          <a:p>
+            <a:pPr algn="l"/>
+            <a:r>
+              <a:rPr sz="2200" b="1" i="0">
+                <a:solidFill>
+                  <a:srgbClr val="FFFFFF"/>
+                </a:solidFill>
+                <a:latin typeface="Calibri"/>
+              </a:rPr>
+              <a:t>No ROI claims: earlier attention, triage with the reason shown, audit trail to the headline</a:t>
+            </a:r>
+          </a:p>
+        </p:txBody>
+      </p:sp>
+      <p:sp>
+        <p:nvSpPr>
+          <p:cNvPr id="21" name="Footer"/>
           <p:cNvSpPr txBox="1"/>
           <p:nvPr/>
         </p:nvSpPr>
@@ -7937,20 +7980,20 @@
           <a:p>
             <a:pPr algn="l"/>
             <a:r>
-              <a:rPr sz="1100" b="0" i="0">
+              <a:rPr sz="1800" b="0" i="0">
                 <a:solidFill>
                   <a:srgbClr val="555B66"/>
                 </a:solidFill>
                 <a:latin typeface="Calibri"/>
               </a:rPr>
-              <a:t>Risk Signal Engine · Code to Connect 2026 · decision-support prototype, not investment advice</a:t>
-            </a:r>
-          </a:p>
-        </p:txBody>
-      </p:sp>
-      <p:sp>
-        <p:nvSpPr>
-          <p:cNvPr id="20" name="SlideNo"/>
+              <a:t>Risk Signal Engine · decision support, not investment advice</a:t>
+            </a:r>
+          </a:p>
+        </p:txBody>
+      </p:sp>
+      <p:sp>
+        <p:nvSpPr>
+          <p:cNvPr id="22" name="SlideNo"/>
           <p:cNvSpPr txBox="1"/>
           <p:nvPr/>
         </p:nvSpPr>
@@ -7972,7 +8015,7 @@
           <a:p>
             <a:pPr algn="r"/>
             <a:r>
-              <a:rPr sz="1100" b="0" i="0">
+              <a:rPr sz="1800" b="0" i="0">
                 <a:solidFill>
                   <a:srgbClr val="555B66"/>
                 </a:solidFill>
@@ -8045,7 +8088,7 @@
         <p:spPr>
           <a:xfrm>
             <a:off x="548640" y="1188720"/>
-            <a:ext cx="3566160" cy="3611880"/>
+            <a:ext cx="3566160" cy="3429000"/>
           </a:xfrm>
           <a:prstGeom prst="roundRect">
             <a:avLst>
@@ -8125,8 +8168,8 @@
         </p:nvSpPr>
         <p:spPr>
           <a:xfrm>
-            <a:off x="822960" y="1920240"/>
-            <a:ext cx="3063240" cy="2743200"/>
+            <a:off x="822960" y="1965960"/>
+            <a:ext cx="3063240" cy="2651760"/>
           </a:xfrm>
           <a:prstGeom prst="rect">
             <a:avLst/>
@@ -8141,7 +8184,7 @@
           <a:p>
             <a:pPr marL="274320" indent="-274320">
               <a:spcAft>
-                <a:spcPts val="600"/>
+                <a:spcPts val="1400"/>
               </a:spcAft>
               <a:buClr>
                 <a:srgbClr val="0E8A84"/>
@@ -8150,19 +8193,19 @@
               <a:buChar char="•"/>
             </a:pPr>
             <a:r>
-              <a:rPr sz="1700" b="0" i="0">
+              <a:rPr sz="1800" b="0" i="0">
                 <a:solidFill>
                   <a:srgbClr val="1A1A1A"/>
                 </a:solidFill>
                 <a:latin typeface="Calibri"/>
               </a:rPr>
-              <a:t>Impact weights are uncalibrated priors</a:t>
+              <a:t>Uncalibrated impact weights</a:t>
             </a:r>
           </a:p>
           <a:p>
             <a:pPr marL="274320" indent="-274320">
               <a:spcAft>
-                <a:spcPts val="600"/>
+                <a:spcPts val="1400"/>
               </a:spcAft>
               <a:buClr>
                 <a:srgbClr val="0E8A84"/>
@@ -8171,19 +8214,19 @@
               <a:buChar char="•"/>
             </a:pPr>
             <a:r>
-              <a:rPr sz="1700" b="0" i="0">
+              <a:rPr sz="1800" b="0" i="0">
                 <a:solidFill>
                   <a:srgbClr val="1A1A1A"/>
                 </a:solidFill>
                 <a:latin typeface="Calibri"/>
               </a:rPr>
-              <a:t>Keyword rules still misfire on real data</a:t>
+              <a:t>Rules still misfire at times</a:t>
             </a:r>
           </a:p>
           <a:p>
             <a:pPr marL="274320" indent="-274320">
               <a:spcAft>
-                <a:spcPts val="600"/>
+                <a:spcPts val="1400"/>
               </a:spcAft>
               <a:buClr>
                 <a:srgbClr val="0E8A84"/>
@@ -8192,19 +8235,19 @@
               <a:buChar char="•"/>
             </a:pPr>
             <a:r>
-              <a:rPr sz="1700" b="0" i="0">
+              <a:rPr sz="1800" b="0" i="0">
                 <a:solidFill>
                   <a:srgbClr val="1A1A1A"/>
                 </a:solidFill>
                 <a:latin typeface="Calibri"/>
               </a:rPr>
-              <a:t>Headline-only news text</a:t>
+              <a:t>Headline-only news</a:t>
             </a:r>
           </a:p>
           <a:p>
             <a:pPr marL="274320" indent="-274320">
               <a:spcAft>
-                <a:spcPts val="600"/>
+                <a:spcPts val="1400"/>
               </a:spcAft>
               <a:buClr>
                 <a:srgbClr val="0E8A84"/>
@@ -8213,19 +8256,19 @@
               <a:buChar char="•"/>
             </a:pPr>
             <a:r>
-              <a:rPr sz="1700" b="0" i="0">
+              <a:rPr sz="1800" b="0" i="0">
                 <a:solidFill>
                   <a:srgbClr val="1A1A1A"/>
                 </a:solidFill>
                 <a:latin typeface="Calibri"/>
               </a:rPr>
-              <a:t>Small AI-labelled evaluation set</a:t>
+              <a:t>Small AI-labelled eval set</a:t>
             </a:r>
           </a:p>
           <a:p>
             <a:pPr marL="274320" indent="-274320">
               <a:spcAft>
-                <a:spcPts val="600"/>
+                <a:spcPts val="1400"/>
               </a:spcAft>
               <a:buClr>
                 <a:srgbClr val="0E8A84"/>
@@ -8234,13 +8277,13 @@
               <a:buChar char="•"/>
             </a:pPr>
             <a:r>
-              <a:rPr sz="1700" b="0" i="0">
+              <a:rPr sz="1800" b="0" i="0">
                 <a:solidFill>
                   <a:srgbClr val="1A1A1A"/>
                 </a:solidFill>
                 <a:latin typeface="Calibri"/>
               </a:rPr>
-              <a:t>Illustrative stress model, synthetic portfolio</a:t>
+              <a:t>Illustrative stress model</a:t>
             </a:r>
           </a:p>
         </p:txBody>
@@ -8254,7 +8297,7 @@
         <p:spPr>
           <a:xfrm>
             <a:off x="4270248" y="1188720"/>
-            <a:ext cx="3566160" cy="3611880"/>
+            <a:ext cx="3566160" cy="3429000"/>
           </a:xfrm>
           <a:prstGeom prst="roundRect">
             <a:avLst>
@@ -8334,8 +8377,8 @@
         </p:nvSpPr>
         <p:spPr>
           <a:xfrm>
-            <a:off x="4544568" y="1920240"/>
-            <a:ext cx="3063240" cy="2743200"/>
+            <a:off x="4544568" y="1965960"/>
+            <a:ext cx="3063240" cy="2651760"/>
           </a:xfrm>
           <a:prstGeom prst="rect">
             <a:avLst/>
@@ -8350,7 +8393,7 @@
           <a:p>
             <a:pPr marL="274320" indent="-274320">
               <a:spcAft>
-                <a:spcPts val="600"/>
+                <a:spcPts val="1400"/>
               </a:spcAft>
               <a:buClr>
                 <a:srgbClr val="0E8A84"/>
@@ -8359,19 +8402,19 @@
               <a:buChar char="•"/>
             </a:pPr>
             <a:r>
-              <a:rPr sz="1700" b="0" i="0">
+              <a:rPr sz="1800" b="0" i="0">
                 <a:solidFill>
                   <a:srgbClr val="1A1A1A"/>
                 </a:solidFill>
                 <a:latin typeface="Calibri"/>
               </a:rPr>
-              <a:t>Calibrate impact on market moves</a:t>
+              <a:t>Calibrate on market moves</a:t>
             </a:r>
           </a:p>
           <a:p>
             <a:pPr marL="274320" indent="-274320">
               <a:spcAft>
-                <a:spcPts val="600"/>
+                <a:spcPts val="1400"/>
               </a:spcAft>
               <a:buClr>
                 <a:srgbClr val="0E8A84"/>
@@ -8380,7 +8423,7 @@
               <a:buChar char="•"/>
             </a:pPr>
             <a:r>
-              <a:rPr sz="1700" b="0" i="0">
+              <a:rPr sz="1800" b="0" i="0">
                 <a:solidFill>
                   <a:srgbClr val="1A1A1A"/>
                 </a:solidFill>
@@ -8392,7 +8435,7 @@
           <a:p>
             <a:pPr marL="274320" indent="-274320">
               <a:spcAft>
-                <a:spcPts val="600"/>
+                <a:spcPts val="1400"/>
               </a:spcAft>
               <a:buClr>
                 <a:srgbClr val="0E8A84"/>
@@ -8401,19 +8444,19 @@
               <a:buChar char="•"/>
             </a:pPr>
             <a:r>
-              <a:rPr sz="1700" b="0" i="0">
+              <a:rPr sz="1800" b="0" i="0">
                 <a:solidFill>
                   <a:srgbClr val="1A1A1A"/>
                 </a:solidFill>
                 <a:latin typeface="Calibri"/>
               </a:rPr>
-              <a:t>Fine-tuned models on public labels (notebook ready)</a:t>
+              <a:t>Fine-tuned models (ready)</a:t>
             </a:r>
           </a:p>
           <a:p>
             <a:pPr marL="274320" indent="-274320">
               <a:spcAft>
-                <a:spcPts val="600"/>
+                <a:spcPts val="1400"/>
               </a:spcAft>
               <a:buClr>
                 <a:srgbClr val="0E8A84"/>
@@ -8422,19 +8465,19 @@
               <a:buChar char="•"/>
             </a:pPr>
             <a:r>
-              <a:rPr sz="1700" b="0" i="0">
+              <a:rPr sz="1800" b="0" i="0">
                 <a:solidFill>
                   <a:srgbClr val="1A1A1A"/>
                 </a:solidFill>
                 <a:latin typeface="Calibri"/>
               </a:rPr>
-              <a:t>Kafka streaming</a:t>
+              <a:t>Streaming (Kafka)</a:t>
             </a:r>
           </a:p>
           <a:p>
             <a:pPr marL="274320" indent="-274320">
               <a:spcAft>
-                <a:spcPts val="600"/>
+                <a:spcPts val="1400"/>
               </a:spcAft>
               <a:buClr>
                 <a:srgbClr val="0E8A84"/>
@@ -8443,13 +8486,13 @@
               <a:buChar char="•"/>
             </a:pPr>
             <a:r>
-              <a:rPr sz="1700" b="0" i="0">
+              <a:rPr sz="1800" b="0" i="0">
                 <a:solidFill>
                   <a:srgbClr val="1A1A1A"/>
                 </a:solidFill>
                 <a:latin typeface="Calibri"/>
               </a:rPr>
-              <a:t>Backtesting and full revaluation</a:t>
+              <a:t>Backtesting</a:t>
             </a:r>
           </a:p>
         </p:txBody>
@@ -8463,7 +8506,7 @@
         <p:spPr>
           <a:xfrm>
             <a:off x="7991856" y="1188720"/>
-            <a:ext cx="3566160" cy="3611880"/>
+            <a:ext cx="3566160" cy="3429000"/>
           </a:xfrm>
           <a:prstGeom prst="roundRect">
             <a:avLst>
@@ -8543,8 +8586,8 @@
         </p:nvSpPr>
         <p:spPr>
           <a:xfrm>
-            <a:off x="8266176" y="1920240"/>
-            <a:ext cx="3063240" cy="2743200"/>
+            <a:off x="8266176" y="1965960"/>
+            <a:ext cx="3063240" cy="2651760"/>
           </a:xfrm>
           <a:prstGeom prst="rect">
             <a:avLst/>
@@ -8559,7 +8602,7 @@
           <a:p>
             <a:pPr marL="274320" indent="-274320">
               <a:spcAft>
-                <a:spcPts val="600"/>
+                <a:spcPts val="1400"/>
               </a:spcAft>
               <a:buClr>
                 <a:srgbClr val="0E8A84"/>
@@ -8568,7 +8611,7 @@
               <a:buChar char="•"/>
             </a:pPr>
             <a:r>
-              <a:rPr sz="1700" b="0" i="0">
+              <a:rPr sz="1800" b="0" i="0">
                 <a:solidFill>
                   <a:srgbClr val="1A1A1A"/>
                 </a:solidFill>
@@ -8580,7 +8623,7 @@
           <a:p>
             <a:pPr marL="274320" indent="-274320">
               <a:spcAft>
-                <a:spcPts val="600"/>
+                <a:spcPts val="1400"/>
               </a:spcAft>
               <a:buClr>
                 <a:srgbClr val="0E8A84"/>
@@ -8589,19 +8632,19 @@
               <a:buChar char="•"/>
             </a:pPr>
             <a:r>
-              <a:rPr sz="1700" b="0" i="0">
+              <a:rPr sz="1800" b="0" i="0">
                 <a:solidFill>
                   <a:srgbClr val="1A1A1A"/>
                 </a:solidFill>
                 <a:latin typeface="Calibri"/>
               </a:rPr>
-              <a:t>One pipeline for every input</a:t>
+              <a:t>One pipeline for all input</a:t>
             </a:r>
           </a:p>
           <a:p>
             <a:pPr marL="274320" indent="-274320">
               <a:spcAft>
-                <a:spcPts val="600"/>
+                <a:spcPts val="1400"/>
               </a:spcAft>
               <a:buClr>
                 <a:srgbClr val="0E8A84"/>
@@ -8610,7 +8653,7 @@
               <a:buChar char="•"/>
             </a:pPr>
             <a:r>
-              <a:rPr sz="1700" b="0" i="0">
+              <a:rPr sz="1800" b="0" i="0">
                 <a:solidFill>
                   <a:srgbClr val="1A1A1A"/>
                 </a:solidFill>
@@ -8622,7 +8665,7 @@
           <a:p>
             <a:pPr marL="274320" indent="-274320">
               <a:spcAft>
-                <a:spcPts val="600"/>
+                <a:spcPts val="1400"/>
               </a:spcAft>
               <a:buClr>
                 <a:srgbClr val="0E8A84"/>
@@ -8631,7 +8674,7 @@
               <a:buChar char="•"/>
             </a:pPr>
             <a:r>
-              <a:rPr sz="1700" b="0" i="0">
+              <a:rPr sz="1800" b="0" i="0">
                 <a:solidFill>
                   <a:srgbClr val="1A1A1A"/>
                 </a:solidFill>
@@ -8643,7 +8686,7 @@
           <a:p>
             <a:pPr marL="274320" indent="-274320">
               <a:spcAft>
-                <a:spcPts val="600"/>
+                <a:spcPts val="1400"/>
               </a:spcAft>
               <a:buClr>
                 <a:srgbClr val="0E8A84"/>
@@ -8652,13 +8695,13 @@
               <a:buChar char="•"/>
             </a:pPr>
             <a:r>
-              <a:rPr sz="1700" b="0" i="0">
+              <a:rPr sz="1800" b="0" i="0">
                 <a:solidFill>
                   <a:srgbClr val="1A1A1A"/>
                 </a:solidFill>
                 <a:latin typeface="Calibri"/>
               </a:rPr>
-              <a:t>Offline demo on a laptop</a:t>
+              <a:t>Offline laptop demo</a:t>
             </a:r>
           </a:p>
         </p:txBody>
@@ -8671,8 +8714,8 @@
         </p:nvSpPr>
         <p:spPr>
           <a:xfrm>
-            <a:off x="548640" y="5029200"/>
-            <a:ext cx="11094415" cy="1051560"/>
+            <a:off x="548640" y="4892040"/>
+            <a:ext cx="11094415" cy="1097280"/>
           </a:xfrm>
           <a:prstGeom prst="roundRect">
             <a:avLst>
@@ -8717,8 +8760,8 @@
         </p:nvSpPr>
         <p:spPr>
           <a:xfrm>
-            <a:off x="914400" y="5029200"/>
-            <a:ext cx="10362895" cy="1051560"/>
+            <a:off x="914400" y="4892040"/>
+            <a:ext cx="10362895" cy="1097280"/>
           </a:xfrm>
           <a:prstGeom prst="rect">
             <a:avLst/>
@@ -8739,7 +8782,7 @@
                 </a:solidFill>
                 <a:latin typeface="Calibri"/>
               </a:rPr>
-              <a:t>An honest, explainable bridge from text to portfolio risk that runs offline on a laptop.</a:t>
+              <a:t>An honest, explainable bridge from text to portfolio risk, offline on a laptop</a:t>
             </a:r>
           </a:p>
         </p:txBody>
@@ -8768,13 +8811,13 @@
           <a:p>
             <a:pPr algn="l"/>
             <a:r>
-              <a:rPr sz="1100" b="0" i="0">
+              <a:rPr sz="1800" b="0" i="0">
                 <a:solidFill>
                   <a:srgbClr val="555B66"/>
                 </a:solidFill>
                 <a:latin typeface="Calibri"/>
               </a:rPr>
-              <a:t>Risk Signal Engine · Code to Connect 2026 · decision-support prototype, not investment advice</a:t>
+              <a:t>Risk Signal Engine · decision support, not investment advice</a:t>
             </a:r>
           </a:p>
         </p:txBody>
@@ -8803,7 +8846,7 @@
           <a:p>
             <a:pPr algn="r"/>
             <a:r>
-              <a:rPr sz="1100" b="0" i="0">
+              <a:rPr sz="1800" b="0" i="0">
                 <a:solidFill>
                   <a:srgbClr val="555B66"/>
                 </a:solidFill>
